--- a/presentations/nova_africa.pptx
+++ b/presentations/nova_africa.pptx
@@ -11,11 +11,23 @@
     <p:handoutMasterId r:id="rId11"/>
   </p:handoutMasterIdLst>
   <p:sldIdLst>
-    <p:sldId id="256" r:id="rId5"/>
     <p:sldId id="257" r:id="rId6"/>
-    <p:sldId id="260" r:id="rId7"/>
-    <p:sldId id="261" r:id="rId8"/>
-    <p:sldId id="262" r:id="rId9"/>
+    <p:sldId id="263" r:id="rId17"/>
+    <p:sldId id="264" r:id="rId18"/>
+    <p:sldId id="265" r:id="rId19"/>
+    <p:sldId id="266" r:id="rId20"/>
+    <p:sldId id="267" r:id="rId21"/>
+    <p:sldId id="268" r:id="rId22"/>
+    <p:sldId id="269" r:id="rId23"/>
+    <p:sldId id="270" r:id="rId24"/>
+    <p:sldId id="271" r:id="rId25"/>
+    <p:sldId id="272" r:id="rId26"/>
+    <p:sldId id="273" r:id="rId27"/>
+    <p:sldId id="274" r:id="rId28"/>
+    <p:sldId id="275" r:id="rId29"/>
+    <p:sldId id="276" r:id="rId30"/>
+    <p:sldId id="277" r:id="rId31"/>
+    <p:sldId id="278" r:id="rId32"/>
   </p:sldIdLst>
   <p:sldSz cx="12192000" cy="6858000"/>
   <p:notesSz cx="6858000" cy="9144000"/>
@@ -660,6 +672,1196 @@
     </a:lvl9pPr>
   </p:notesStyle>
 </p:notesMaster>
+</file>
+
+<file path=ppt/notesSlides/notesSlide1.xml><?xml version="1.0" encoding="utf-8"?>
+<p:notes xmlns:a="http://schemas.openxmlformats.org/drawingml/2006/main" xmlns:p="http://schemas.openxmlformats.org/presentationml/2006/main" xmlns:r="http://schemas.openxmlformats.org/officeDocument/2006/relationships">
+  <p:cSld>
+    <p:spTree>
+      <p:nvGrpSpPr>
+        <p:cNvPr id="1" name=""/>
+        <p:cNvGrpSpPr/>
+        <p:nvPr/>
+      </p:nvGrpSpPr>
+      <p:grpSpPr>
+        <a:xfrm>
+          <a:off x="0" y="0"/>
+          <a:ext cx="0" cy="0"/>
+          <a:chOff x="0" y="0"/>
+          <a:chExt cx="0" cy="0"/>
+        </a:xfrm>
+      </p:grpSpPr>
+      <p:sp>
+        <p:nvSpPr>
+          <p:cNvPr id="2" name="Slide Image Placeholder 1"/>
+          <p:cNvSpPr>
+            <a:spLocks noGrp="1"/>
+          </p:cNvSpPr>
+          <p:nvPr>
+            <p:ph type="sldImg" idx="2"/>
+          </p:nvPr>
+        </p:nvSpPr>
+        <p:spPr/>
+      </p:sp>
+      <p:sp>
+        <p:nvSpPr>
+          <p:cNvPr id="3" name="Notes Placeholder 2"/>
+          <p:cNvSpPr>
+            <a:spLocks noGrp="1"/>
+          </p:cNvSpPr>
+          <p:nvPr>
+            <p:ph type="body" idx="3" sz="quarter"/>
+          </p:nvPr>
+        </p:nvSpPr>
+        <p:spPr/>
+        <p:txBody>
+          <a:bodyPr/>
+          <a:lstStyle/>
+          <a:p>
+            <a:r>
+              <a:t>Two linked field experiments in Uganda's dairy sector asking a single question: can making quality observable create a market for quality? Spoiler: observability is necessary but not sufficient.</a:t>
+            </a:r>
+          </a:p>
+        </p:txBody>
+      </p:sp>
+      <p:sp>
+        <p:nvSpPr>
+          <p:cNvPr id="4" name="Slide Number Placeholder 3"/>
+          <p:cNvSpPr>
+            <a:spLocks noGrp="1"/>
+          </p:cNvSpPr>
+          <p:nvPr>
+            <p:ph type="sldNum" idx="5" sz="quarter"/>
+          </p:nvPr>
+        </p:nvSpPr>
+        <p:spPr/>
+      </p:sp>
+    </p:spTree>
+  </p:cSld>
+  <p:clrMapOvr>
+    <a:masterClrMapping/>
+  </p:clrMapOvr>
+</p:notes>
+</file>
+
+<file path=ppt/notesSlides/notesSlide10.xml><?xml version="1.0" encoding="utf-8"?>
+<p:notes xmlns:a="http://schemas.openxmlformats.org/drawingml/2006/main" xmlns:p="http://schemas.openxmlformats.org/presentationml/2006/main" xmlns:r="http://schemas.openxmlformats.org/officeDocument/2006/relationships">
+  <p:cSld>
+    <p:spTree>
+      <p:nvGrpSpPr>
+        <p:cNvPr id="1" name=""/>
+        <p:cNvGrpSpPr/>
+        <p:nvPr/>
+      </p:nvGrpSpPr>
+      <p:grpSpPr>
+        <a:xfrm>
+          <a:off x="0" y="0"/>
+          <a:ext cx="0" cy="0"/>
+          <a:chOff x="0" y="0"/>
+          <a:chExt cx="0" cy="0"/>
+        </a:xfrm>
+      </p:grpSpPr>
+      <p:sp>
+        <p:nvSpPr>
+          <p:cNvPr id="2" name="Slide Image Placeholder 1"/>
+          <p:cNvSpPr>
+            <a:spLocks noGrp="1"/>
+          </p:cNvSpPr>
+          <p:nvPr>
+            <p:ph type="sldImg" idx="2"/>
+          </p:nvPr>
+        </p:nvSpPr>
+        <p:spPr/>
+      </p:sp>
+      <p:sp>
+        <p:nvSpPr>
+          <p:cNvPr id="3" name="Notes Placeholder 2"/>
+          <p:cNvSpPr>
+            <a:spLocks noGrp="1"/>
+          </p:cNvSpPr>
+          <p:nvPr>
+            <p:ph type="body" idx="3" sz="quarter"/>
+          </p:nvPr>
+        </p:nvSpPr>
+        <p:spPr/>
+        <p:txBody>
+          <a:bodyPr/>
+          <a:lstStyle/>
+          <a:p>
+            <a:r>
+              <a:t>The model formalises why quality can rise with no price response. Two channels. Exp 1 is the enforcement channel operating in isolation: σ² falls, the floor bites, but α stays at zero because processors still buy flat per litre.</a:t>
+            </a:r>
+          </a:p>
+        </p:txBody>
+      </p:sp>
+      <p:sp>
+        <p:nvSpPr>
+          <p:cNvPr id="4" name="Slide Number Placeholder 3"/>
+          <p:cNvSpPr>
+            <a:spLocks noGrp="1"/>
+          </p:cNvSpPr>
+          <p:nvPr>
+            <p:ph type="sldNum" idx="5" sz="quarter"/>
+          </p:nvPr>
+        </p:nvSpPr>
+        <p:spPr/>
+      </p:sp>
+    </p:spTree>
+  </p:cSld>
+  <p:clrMapOvr>
+    <a:masterClrMapping/>
+  </p:clrMapOvr>
+</p:notes>
+</file>
+
+<file path=ppt/notesSlides/notesSlide11.xml><?xml version="1.0" encoding="utf-8"?>
+<p:notes xmlns:a="http://schemas.openxmlformats.org/drawingml/2006/main" xmlns:p="http://schemas.openxmlformats.org/presentationml/2006/main" xmlns:r="http://schemas.openxmlformats.org/officeDocument/2006/relationships">
+  <p:cSld>
+    <p:spTree>
+      <p:nvGrpSpPr>
+        <p:cNvPr id="1" name=""/>
+        <p:cNvGrpSpPr/>
+        <p:nvPr/>
+      </p:nvGrpSpPr>
+      <p:grpSpPr>
+        <a:xfrm>
+          <a:off x="0" y="0"/>
+          <a:ext cx="0" cy="0"/>
+          <a:chOff x="0" y="0"/>
+          <a:chExt cx="0" cy="0"/>
+        </a:xfrm>
+      </p:grpSpPr>
+      <p:sp>
+        <p:nvSpPr>
+          <p:cNvPr id="2" name="Slide Image Placeholder 1"/>
+          <p:cNvSpPr>
+            <a:spLocks noGrp="1"/>
+          </p:cNvSpPr>
+          <p:nvPr>
+            <p:ph type="sldImg" idx="2"/>
+          </p:nvPr>
+        </p:nvSpPr>
+        <p:spPr/>
+      </p:sp>
+      <p:sp>
+        <p:nvSpPr>
+          <p:cNvPr id="3" name="Notes Placeholder 2"/>
+          <p:cNvSpPr>
+            <a:spLocks noGrp="1"/>
+          </p:cNvSpPr>
+          <p:nvPr>
+            <p:ph type="body" idx="3" sz="quarter"/>
+          </p:nvPr>
+        </p:nvSpPr>
+        <p:spPr/>
+        <p:txBody>
+          <a:bodyPr/>
+          <a:lstStyle/>
+          <a:p>
+            <a:r>
+              <a:t>This CDF is the visual fingerprint of the enforcement channel. The whole treatment effect is in the right tail — the egregious adulterators — exactly what 'making the floor bite' predicts. Clean suppliers don't move.</a:t>
+            </a:r>
+          </a:p>
+        </p:txBody>
+      </p:sp>
+      <p:sp>
+        <p:nvSpPr>
+          <p:cNvPr id="4" name="Slide Number Placeholder 3"/>
+          <p:cNvSpPr>
+            <a:spLocks noGrp="1"/>
+          </p:cNvSpPr>
+          <p:nvPr>
+            <p:ph type="sldNum" idx="5" sz="quarter"/>
+          </p:nvPr>
+        </p:nvSpPr>
+        <p:spPr/>
+      </p:sp>
+    </p:spTree>
+  </p:cSld>
+  <p:clrMapOvr>
+    <a:masterClrMapping/>
+  </p:clrMapOvr>
+</p:notes>
+</file>
+
+<file path=ppt/notesSlides/notesSlide12.xml><?xml version="1.0" encoding="utf-8"?>
+<p:notes xmlns:a="http://schemas.openxmlformats.org/drawingml/2006/main" xmlns:p="http://schemas.openxmlformats.org/presentationml/2006/main" xmlns:r="http://schemas.openxmlformats.org/officeDocument/2006/relationships">
+  <p:cSld>
+    <p:spTree>
+      <p:nvGrpSpPr>
+        <p:cNvPr id="1" name=""/>
+        <p:cNvGrpSpPr/>
+        <p:nvPr/>
+      </p:nvGrpSpPr>
+      <p:grpSpPr>
+        <a:xfrm>
+          <a:off x="0" y="0"/>
+          <a:ext cx="0" cy="0"/>
+          <a:chOff x="0" y="0"/>
+          <a:chExt cx="0" cy="0"/>
+        </a:xfrm>
+      </p:grpSpPr>
+      <p:sp>
+        <p:nvSpPr>
+          <p:cNvPr id="2" name="Slide Image Placeholder 1"/>
+          <p:cNvSpPr>
+            <a:spLocks noGrp="1"/>
+          </p:cNvSpPr>
+          <p:nvPr>
+            <p:ph type="sldImg" idx="2"/>
+          </p:nvPr>
+        </p:nvSpPr>
+        <p:spPr/>
+      </p:sp>
+      <p:sp>
+        <p:nvSpPr>
+          <p:cNvPr id="3" name="Notes Placeholder 2"/>
+          <p:cNvSpPr>
+            <a:spLocks noGrp="1"/>
+          </p:cNvSpPr>
+          <p:nvPr>
+            <p:ph type="body" idx="3" sz="quarter"/>
+          </p:nvPr>
+        </p:nvSpPr>
+        <p:spPr/>
+        <p:txBody>
+          <a:bodyPr/>
+          <a:lstStyle/>
+          <a:p>
+            <a:r>
+              <a:t>Bridge to Exp 2. We can't literally raise α at the processor, so we inject the quality-linked transfer one node downstream, paying traders for verified quality. This creates a clean pass-through test: do traders share it with farmers?</a:t>
+            </a:r>
+          </a:p>
+        </p:txBody>
+      </p:sp>
+      <p:sp>
+        <p:nvSpPr>
+          <p:cNvPr id="4" name="Slide Number Placeholder 3"/>
+          <p:cNvSpPr>
+            <a:spLocks noGrp="1"/>
+          </p:cNvSpPr>
+          <p:nvPr>
+            <p:ph type="sldNum" idx="5" sz="quarter"/>
+          </p:nvPr>
+        </p:nvSpPr>
+        <p:spPr/>
+      </p:sp>
+    </p:spTree>
+  </p:cSld>
+  <p:clrMapOvr>
+    <a:masterClrMapping/>
+  </p:clrMapOvr>
+</p:notes>
+</file>
+
+<file path=ppt/notesSlides/notesSlide13.xml><?xml version="1.0" encoding="utf-8"?>
+<p:notes xmlns:a="http://schemas.openxmlformats.org/drawingml/2006/main" xmlns:p="http://schemas.openxmlformats.org/presentationml/2006/main" xmlns:r="http://schemas.openxmlformats.org/officeDocument/2006/relationships">
+  <p:cSld>
+    <p:spTree>
+      <p:nvGrpSpPr>
+        <p:cNvPr id="1" name=""/>
+        <p:cNvGrpSpPr/>
+        <p:nvPr/>
+      </p:nvGrpSpPr>
+      <p:grpSpPr>
+        <a:xfrm>
+          <a:off x="0" y="0"/>
+          <a:ext cx="0" cy="0"/>
+          <a:chOff x="0" y="0"/>
+          <a:chExt cx="0" cy="0"/>
+        </a:xfrm>
+      </p:grpSpPr>
+      <p:sp>
+        <p:nvSpPr>
+          <p:cNvPr id="2" name="Slide Image Placeholder 1"/>
+          <p:cNvSpPr>
+            <a:spLocks noGrp="1"/>
+          </p:cNvSpPr>
+          <p:nvPr>
+            <p:ph type="sldImg" idx="2"/>
+          </p:nvPr>
+        </p:nvSpPr>
+        <p:spPr/>
+      </p:sp>
+      <p:sp>
+        <p:nvSpPr>
+          <p:cNvPr id="3" name="Notes Placeholder 2"/>
+          <p:cNvSpPr>
+            <a:spLocks noGrp="1"/>
+          </p:cNvSpPr>
+          <p:nvPr>
+            <p:ph type="body" idx="3" sz="quarter"/>
+          </p:nvPr>
+        </p:nvSpPr>
+        <p:spPr/>
+        <p:txBody>
+          <a:bodyPr/>
+          <a:lstStyle/>
+          <a:p>
+            <a:r>
+              <a:t>Design isolates the price channel: both arms get information; only treated get money. Daily payments give a panel. The unannounced threshold increase moves the regime from intensive-margin (gradient) to extensive-margin (floor) — the model's key comparative static.</a:t>
+            </a:r>
+          </a:p>
+        </p:txBody>
+      </p:sp>
+      <p:sp>
+        <p:nvSpPr>
+          <p:cNvPr id="4" name="Slide Number Placeholder 3"/>
+          <p:cNvSpPr>
+            <a:spLocks noGrp="1"/>
+          </p:cNvSpPr>
+          <p:nvPr>
+            <p:ph type="sldNum" idx="5" sz="quarter"/>
+          </p:nvPr>
+        </p:nvSpPr>
+        <p:spPr/>
+      </p:sp>
+    </p:spTree>
+  </p:cSld>
+  <p:clrMapOvr>
+    <a:masterClrMapping/>
+  </p:clrMapOvr>
+</p:notes>
+</file>
+
+<file path=ppt/notesSlides/notesSlide14.xml><?xml version="1.0" encoding="utf-8"?>
+<p:notes xmlns:a="http://schemas.openxmlformats.org/drawingml/2006/main" xmlns:p="http://schemas.openxmlformats.org/presentationml/2006/main" xmlns:r="http://schemas.openxmlformats.org/officeDocument/2006/relationships">
+  <p:cSld>
+    <p:spTree>
+      <p:nvGrpSpPr>
+        <p:cNvPr id="1" name=""/>
+        <p:cNvGrpSpPr/>
+        <p:nvPr/>
+      </p:nvGrpSpPr>
+      <p:grpSpPr>
+        <a:xfrm>
+          <a:off x="0" y="0"/>
+          <a:ext cx="0" cy="0"/>
+          <a:chOff x="0" y="0"/>
+          <a:chExt cx="0" cy="0"/>
+        </a:xfrm>
+      </p:grpSpPr>
+      <p:sp>
+        <p:nvSpPr>
+          <p:cNvPr id="2" name="Slide Image Placeholder 1"/>
+          <p:cNvSpPr>
+            <a:spLocks noGrp="1"/>
+          </p:cNvSpPr>
+          <p:nvPr>
+            <p:ph type="sldImg" idx="2"/>
+          </p:nvPr>
+        </p:nvSpPr>
+        <p:spPr/>
+      </p:sp>
+      <p:sp>
+        <p:nvSpPr>
+          <p:cNvPr id="3" name="Notes Placeholder 2"/>
+          <p:cNvSpPr>
+            <a:spLocks noGrp="1"/>
+          </p:cNvSpPr>
+          <p:nvPr>
+            <p:ph type="body" idx="3" sz="quarter"/>
+          </p:nvPr>
+        </p:nvSpPr>
+        <p:spPr/>
+        <p:txBody>
+          <a:bodyPr/>
+          <a:lstStyle/>
+          <a:p>
+            <a:r>
+              <a:t>First result of the daily panel: a large, immediate volume response sustained across both stages. Consistent with traders working the extensive margin of the bonus when quality is easy — grab volume.</a:t>
+            </a:r>
+          </a:p>
+        </p:txBody>
+      </p:sp>
+      <p:sp>
+        <p:nvSpPr>
+          <p:cNvPr id="4" name="Slide Number Placeholder 3"/>
+          <p:cNvSpPr>
+            <a:spLocks noGrp="1"/>
+          </p:cNvSpPr>
+          <p:nvPr>
+            <p:ph type="sldNum" idx="5" sz="quarter"/>
+          </p:nvPr>
+        </p:nvSpPr>
+        <p:spPr/>
+      </p:sp>
+    </p:spTree>
+  </p:cSld>
+  <p:clrMapOvr>
+    <a:masterClrMapping/>
+  </p:clrMapOvr>
+</p:notes>
+</file>
+
+<file path=ppt/notesSlides/notesSlide15.xml><?xml version="1.0" encoding="utf-8"?>
+<p:notes xmlns:a="http://schemas.openxmlformats.org/drawingml/2006/main" xmlns:p="http://schemas.openxmlformats.org/presentationml/2006/main" xmlns:r="http://schemas.openxmlformats.org/officeDocument/2006/relationships">
+  <p:cSld>
+    <p:spTree>
+      <p:nvGrpSpPr>
+        <p:cNvPr id="1" name=""/>
+        <p:cNvGrpSpPr/>
+        <p:nvPr/>
+      </p:nvGrpSpPr>
+      <p:grpSpPr>
+        <a:xfrm>
+          <a:off x="0" y="0"/>
+          <a:ext cx="0" cy="0"/>
+          <a:chOff x="0" y="0"/>
+          <a:chExt cx="0" cy="0"/>
+        </a:xfrm>
+      </p:grpSpPr>
+      <p:sp>
+        <p:nvSpPr>
+          <p:cNvPr id="2" name="Slide Image Placeholder 1"/>
+          <p:cNvSpPr>
+            <a:spLocks noGrp="1"/>
+          </p:cNvSpPr>
+          <p:nvPr>
+            <p:ph type="sldImg" idx="2"/>
+          </p:nvPr>
+        </p:nvSpPr>
+        <p:spPr/>
+      </p:sp>
+      <p:sp>
+        <p:nvSpPr>
+          <p:cNvPr id="3" name="Notes Placeholder 2"/>
+          <p:cNvSpPr>
+            <a:spLocks noGrp="1"/>
+          </p:cNvSpPr>
+          <p:nvPr>
+            <p:ph type="body" idx="3" sz="quarter"/>
+          </p:nvPr>
+        </p:nvSpPr>
+        <p:spPr/>
+        <p:txBody>
+          <a:bodyPr/>
+          <a:lstStyle/>
+          <a:p>
+            <a:r>
+              <a:t>Central finding. The continuous gradient — live the whole time — elicits nothing. Only when the discrete pass/fail floor rises do traders screen for quality. Discrete stakes beat smooth incentives. The ~1-week lag fits costly supplier re-sorting (and possibly loss aversion).</a:t>
+            </a:r>
+          </a:p>
+        </p:txBody>
+      </p:sp>
+      <p:sp>
+        <p:nvSpPr>
+          <p:cNvPr id="4" name="Slide Number Placeholder 3"/>
+          <p:cNvSpPr>
+            <a:spLocks noGrp="1"/>
+          </p:cNvSpPr>
+          <p:nvPr>
+            <p:ph type="sldNum" idx="5" sz="quarter"/>
+          </p:nvPr>
+        </p:nvSpPr>
+        <p:spPr/>
+      </p:sp>
+    </p:spTree>
+  </p:cSld>
+  <p:clrMapOvr>
+    <a:masterClrMapping/>
+  </p:clrMapOvr>
+</p:notes>
+</file>
+
+<file path=ppt/notesSlides/notesSlide16.xml><?xml version="1.0" encoding="utf-8"?>
+<p:notes xmlns:a="http://schemas.openxmlformats.org/drawingml/2006/main" xmlns:p="http://schemas.openxmlformats.org/presentationml/2006/main" xmlns:r="http://schemas.openxmlformats.org/officeDocument/2006/relationships">
+  <p:cSld>
+    <p:spTree>
+      <p:nvGrpSpPr>
+        <p:cNvPr id="1" name=""/>
+        <p:cNvGrpSpPr/>
+        <p:nvPr/>
+      </p:nvGrpSpPr>
+      <p:grpSpPr>
+        <a:xfrm>
+          <a:off x="0" y="0"/>
+          <a:ext cx="0" cy="0"/>
+          <a:chOff x="0" y="0"/>
+          <a:chExt cx="0" cy="0"/>
+        </a:xfrm>
+      </p:grpSpPr>
+      <p:sp>
+        <p:nvSpPr>
+          <p:cNvPr id="2" name="Slide Image Placeholder 1"/>
+          <p:cNvSpPr>
+            <a:spLocks noGrp="1"/>
+          </p:cNvSpPr>
+          <p:nvPr>
+            <p:ph type="sldImg" idx="2"/>
+          </p:nvPr>
+        </p:nvSpPr>
+        <p:spPr/>
+      </p:sp>
+      <p:sp>
+        <p:nvSpPr>
+          <p:cNvPr id="3" name="Notes Placeholder 2"/>
+          <p:cNvSpPr>
+            <a:spLocks noGrp="1"/>
+          </p:cNvSpPr>
+          <p:nvPr>
+            <p:ph type="body" idx="3" sz="quarter"/>
+          </p:nvPr>
+        </p:nvSpPr>
+        <p:spPr/>
+        <p:txBody>
+          <a:bodyPr/>
+          <a:lstStyle/>
+          <a:p>
+            <a:r>
+              <a:t>The pass-through test fails — and worse, prices to farmers fall. Treated traders screen harder and capture the bonus; farmers see no gain and a price cut. Quality upgrading at the source still has no champion.</a:t>
+            </a:r>
+          </a:p>
+        </p:txBody>
+      </p:sp>
+      <p:sp>
+        <p:nvSpPr>
+          <p:cNvPr id="4" name="Slide Number Placeholder 3"/>
+          <p:cNvSpPr>
+            <a:spLocks noGrp="1"/>
+          </p:cNvSpPr>
+          <p:nvPr>
+            <p:ph type="sldNum" idx="5" sz="quarter"/>
+          </p:nvPr>
+        </p:nvSpPr>
+        <p:spPr/>
+      </p:sp>
+    </p:spTree>
+  </p:cSld>
+  <p:clrMapOvr>
+    <a:masterClrMapping/>
+  </p:clrMapOvr>
+</p:notes>
+</file>
+
+<file path=ppt/notesSlides/notesSlide17.xml><?xml version="1.0" encoding="utf-8"?>
+<p:notes xmlns:a="http://schemas.openxmlformats.org/drawingml/2006/main" xmlns:p="http://schemas.openxmlformats.org/presentationml/2006/main" xmlns:r="http://schemas.openxmlformats.org/officeDocument/2006/relationships">
+  <p:cSld>
+    <p:spTree>
+      <p:nvGrpSpPr>
+        <p:cNvPr id="1" name=""/>
+        <p:cNvGrpSpPr/>
+        <p:nvPr/>
+      </p:nvGrpSpPr>
+      <p:grpSpPr>
+        <a:xfrm>
+          <a:off x="0" y="0"/>
+          <a:ext cx="0" cy="0"/>
+          <a:chOff x="0" y="0"/>
+          <a:chExt cx="0" cy="0"/>
+        </a:xfrm>
+      </p:grpSpPr>
+      <p:sp>
+        <p:nvSpPr>
+          <p:cNvPr id="2" name="Slide Image Placeholder 1"/>
+          <p:cNvSpPr>
+            <a:spLocks noGrp="1"/>
+          </p:cNvSpPr>
+          <p:nvPr>
+            <p:ph type="sldImg" idx="2"/>
+          </p:nvPr>
+        </p:nvSpPr>
+        <p:spPr/>
+      </p:sp>
+      <p:sp>
+        <p:nvSpPr>
+          <p:cNvPr id="3" name="Notes Placeholder 2"/>
+          <p:cNvSpPr>
+            <a:spLocks noGrp="1"/>
+          </p:cNvSpPr>
+          <p:nvPr>
+            <p:ph type="body" idx="3" sz="quarter"/>
+          </p:nvPr>
+        </p:nvSpPr>
+        <p:spPr/>
+        <p:txBody>
+          <a:bodyPr/>
+          <a:lstStyle/>
+          <a:p>
+            <a:r>
+              <a:t>Land the thesis: observability necessary, not sufficient. The two experiments together show a low-level equilibrium trap that single-margin interventions can't escape. Two design lessons: thresholds &gt; gradients for intermediaries; and pass-through to farmers must be engineered, not assumed. Thank you.</a:t>
+            </a:r>
+          </a:p>
+        </p:txBody>
+      </p:sp>
+      <p:sp>
+        <p:nvSpPr>
+          <p:cNvPr id="4" name="Slide Number Placeholder 3"/>
+          <p:cNvSpPr>
+            <a:spLocks noGrp="1"/>
+          </p:cNvSpPr>
+          <p:nvPr>
+            <p:ph type="sldNum" idx="5" sz="quarter"/>
+          </p:nvPr>
+        </p:nvSpPr>
+        <p:spPr/>
+      </p:sp>
+    </p:spTree>
+  </p:cSld>
+  <p:clrMapOvr>
+    <a:masterClrMapping/>
+  </p:clrMapOvr>
+</p:notes>
+</file>
+
+<file path=ppt/notesSlides/notesSlide2.xml><?xml version="1.0" encoding="utf-8"?>
+<p:notes xmlns:a="http://schemas.openxmlformats.org/drawingml/2006/main" xmlns:p="http://schemas.openxmlformats.org/presentationml/2006/main" xmlns:r="http://schemas.openxmlformats.org/officeDocument/2006/relationships">
+  <p:cSld>
+    <p:spTree>
+      <p:nvGrpSpPr>
+        <p:cNvPr id="1" name=""/>
+        <p:cNvGrpSpPr/>
+        <p:nvPr/>
+      </p:nvGrpSpPr>
+      <p:grpSpPr>
+        <a:xfrm>
+          <a:off x="0" y="0"/>
+          <a:ext cx="0" cy="0"/>
+          <a:chOff x="0" y="0"/>
+          <a:chExt cx="0" cy="0"/>
+        </a:xfrm>
+      </p:grpSpPr>
+      <p:sp>
+        <p:nvSpPr>
+          <p:cNvPr id="2" name="Slide Image Placeholder 1"/>
+          <p:cNvSpPr>
+            <a:spLocks noGrp="1"/>
+          </p:cNvSpPr>
+          <p:nvPr>
+            <p:ph type="sldImg" idx="2"/>
+          </p:nvPr>
+        </p:nvSpPr>
+        <p:spPr/>
+      </p:sp>
+      <p:sp>
+        <p:nvSpPr>
+          <p:cNvPr id="3" name="Notes Placeholder 2"/>
+          <p:cNvSpPr>
+            <a:spLocks noGrp="1"/>
+          </p:cNvSpPr>
+          <p:nvPr>
+            <p:ph type="body" idx="3" sz="quarter"/>
+          </p:nvPr>
+        </p:nvSpPr>
+        <p:spPr/>
+        <p:txBody>
+          <a:bodyPr/>
+          <a:lstStyle/>
+          <a:p>
+            <a:r>
+              <a:t>Start with the information problem. Quality is a credence/experience attribute at first sale. Crude tests catch only gross adulteration. Pay-per-litre with no composition adjustment means both watering and skimming are profitable. This is the lemons problem.</a:t>
+            </a:r>
+          </a:p>
+        </p:txBody>
+      </p:sp>
+      <p:sp>
+        <p:nvSpPr>
+          <p:cNvPr id="4" name="Slide Number Placeholder 3"/>
+          <p:cNvSpPr>
+            <a:spLocks noGrp="1"/>
+          </p:cNvSpPr>
+          <p:nvPr>
+            <p:ph type="sldNum" idx="5" sz="quarter"/>
+          </p:nvPr>
+        </p:nvSpPr>
+        <p:spPr/>
+      </p:sp>
+    </p:spTree>
+  </p:cSld>
+  <p:clrMapOvr>
+    <a:masterClrMapping/>
+  </p:clrMapOvr>
+</p:notes>
+</file>
+
+<file path=ppt/notesSlides/notesSlide3.xml><?xml version="1.0" encoding="utf-8"?>
+<p:notes xmlns:a="http://schemas.openxmlformats.org/drawingml/2006/main" xmlns:p="http://schemas.openxmlformats.org/presentationml/2006/main" xmlns:r="http://schemas.openxmlformats.org/officeDocument/2006/relationships">
+  <p:cSld>
+    <p:spTree>
+      <p:nvGrpSpPr>
+        <p:cNvPr id="1" name=""/>
+        <p:cNvGrpSpPr/>
+        <p:nvPr/>
+      </p:nvGrpSpPr>
+      <p:grpSpPr>
+        <a:xfrm>
+          <a:off x="0" y="0"/>
+          <a:ext cx="0" cy="0"/>
+          <a:chOff x="0" y="0"/>
+          <a:chExt cx="0" cy="0"/>
+        </a:xfrm>
+      </p:grpSpPr>
+      <p:sp>
+        <p:nvSpPr>
+          <p:cNvPr id="2" name="Slide Image Placeholder 1"/>
+          <p:cNvSpPr>
+            <a:spLocks noGrp="1"/>
+          </p:cNvSpPr>
+          <p:nvPr>
+            <p:ph type="sldImg" idx="2"/>
+          </p:nvPr>
+        </p:nvSpPr>
+        <p:spPr/>
+      </p:sp>
+      <p:sp>
+        <p:nvSpPr>
+          <p:cNvPr id="3" name="Notes Placeholder 2"/>
+          <p:cNvSpPr>
+            <a:spLocks noGrp="1"/>
+          </p:cNvSpPr>
+          <p:nvPr>
+            <p:ph type="body" idx="3" sz="quarter"/>
+          </p:nvPr>
+        </p:nvSpPr>
+        <p:spPr/>
+        <p:txBody>
+          <a:bodyPr/>
+          <a:lstStyle/>
+          <a:p>
+            <a:r>
+              <a:t>Second, conceptually distinct impediment: aggregation. Pooling makes reputation a common-pool resource; moral-hazard-in-teams logic means individual effort is not rewarded. Intermediation layers worsen traceability. Two barriers: (i) observability at point of sale, (ii) traceability through aggregation.</a:t>
+            </a:r>
+          </a:p>
+        </p:txBody>
+      </p:sp>
+      <p:sp>
+        <p:nvSpPr>
+          <p:cNvPr id="4" name="Slide Number Placeholder 3"/>
+          <p:cNvSpPr>
+            <a:spLocks noGrp="1"/>
+          </p:cNvSpPr>
+          <p:nvPr>
+            <p:ph type="sldNum" idx="5" sz="quarter"/>
+          </p:nvPr>
+        </p:nvSpPr>
+        <p:spPr/>
+      </p:sp>
+    </p:spTree>
+  </p:cSld>
+  <p:clrMapOvr>
+    <a:masterClrMapping/>
+  </p:clrMapOvr>
+</p:notes>
+</file>
+
+<file path=ppt/notesSlides/notesSlide4.xml><?xml version="1.0" encoding="utf-8"?>
+<p:notes xmlns:a="http://schemas.openxmlformats.org/drawingml/2006/main" xmlns:p="http://schemas.openxmlformats.org/presentationml/2006/main" xmlns:r="http://schemas.openxmlformats.org/officeDocument/2006/relationships">
+  <p:cSld>
+    <p:spTree>
+      <p:nvGrpSpPr>
+        <p:cNvPr id="1" name=""/>
+        <p:cNvGrpSpPr/>
+        <p:nvPr/>
+      </p:nvGrpSpPr>
+      <p:grpSpPr>
+        <a:xfrm>
+          <a:off x="0" y="0"/>
+          <a:ext cx="0" cy="0"/>
+          <a:chOff x="0" y="0"/>
+          <a:chExt cx="0" cy="0"/>
+        </a:xfrm>
+      </p:grpSpPr>
+      <p:sp>
+        <p:nvSpPr>
+          <p:cNvPr id="2" name="Slide Image Placeholder 1"/>
+          <p:cNvSpPr>
+            <a:spLocks noGrp="1"/>
+          </p:cNvSpPr>
+          <p:nvPr>
+            <p:ph type="sldImg" idx="2"/>
+          </p:nvPr>
+        </p:nvSpPr>
+        <p:spPr/>
+      </p:sp>
+      <p:sp>
+        <p:nvSpPr>
+          <p:cNvPr id="3" name="Notes Placeholder 2"/>
+          <p:cNvSpPr>
+            <a:spLocks noGrp="1"/>
+          </p:cNvSpPr>
+          <p:nvPr>
+            <p:ph type="body" idx="3" sz="quarter"/>
+          </p:nvPr>
+        </p:nvSpPr>
+        <p:spPr/>
+        <p:txBody>
+          <a:bodyPr/>
+          <a:lstStyle/>
+          <a:p>
+            <a:r>
+              <a:t>Roadmap. The sequential design separates the informational dimension (Exp 1) from the pricing dimension (Exp 2) in the same supply chain. Exp 2 is run on infrastructure built by Exp 1.</a:t>
+            </a:r>
+          </a:p>
+        </p:txBody>
+      </p:sp>
+      <p:sp>
+        <p:nvSpPr>
+          <p:cNvPr id="4" name="Slide Number Placeholder 3"/>
+          <p:cNvSpPr>
+            <a:spLocks noGrp="1"/>
+          </p:cNvSpPr>
+          <p:nvPr>
+            <p:ph type="sldNum" idx="5" sz="quarter"/>
+          </p:nvPr>
+        </p:nvSpPr>
+        <p:spPr/>
+      </p:sp>
+    </p:spTree>
+  </p:cSld>
+  <p:clrMapOvr>
+    <a:masterClrMapping/>
+  </p:clrMapOvr>
+</p:notes>
+</file>
+
+<file path=ppt/notesSlides/notesSlide5.xml><?xml version="1.0" encoding="utf-8"?>
+<p:notes xmlns:a="http://schemas.openxmlformats.org/drawingml/2006/main" xmlns:p="http://schemas.openxmlformats.org/presentationml/2006/main" xmlns:r="http://schemas.openxmlformats.org/officeDocument/2006/relationships">
+  <p:cSld>
+    <p:spTree>
+      <p:nvGrpSpPr>
+        <p:cNvPr id="1" name=""/>
+        <p:cNvGrpSpPr/>
+        <p:nvPr/>
+      </p:nvGrpSpPr>
+      <p:grpSpPr>
+        <a:xfrm>
+          <a:off x="0" y="0"/>
+          <a:ext cx="0" cy="0"/>
+          <a:chOff x="0" y="0"/>
+          <a:chExt cx="0" cy="0"/>
+        </a:xfrm>
+      </p:grpSpPr>
+      <p:sp>
+        <p:nvSpPr>
+          <p:cNvPr id="2" name="Slide Image Placeholder 1"/>
+          <p:cNvSpPr>
+            <a:spLocks noGrp="1"/>
+          </p:cNvSpPr>
+          <p:nvPr>
+            <p:ph type="sldImg" idx="2"/>
+          </p:nvPr>
+        </p:nvSpPr>
+        <p:spPr/>
+      </p:sp>
+      <p:sp>
+        <p:nvSpPr>
+          <p:cNvPr id="3" name="Notes Placeholder 2"/>
+          <p:cNvSpPr>
+            <a:spLocks noGrp="1"/>
+          </p:cNvSpPr>
+          <p:nvPr>
+            <p:ph type="body" idx="3" sz="quarter"/>
+          </p:nvPr>
+        </p:nvSpPr>
+        <p:spPr/>
+        <p:txBody>
+          <a:bodyPr/>
+          <a:lstStyle/>
+          <a:p>
+            <a:r>
+              <a:t>Set the scene: a transforming, commercially organised sector where quality genuinely matters for downstream products, but pricing institutions are flat per-litre. Photo: milk analyzer installed at an MCC during piloting.</a:t>
+            </a:r>
+          </a:p>
+        </p:txBody>
+      </p:sp>
+      <p:sp>
+        <p:nvSpPr>
+          <p:cNvPr id="4" name="Slide Number Placeholder 3"/>
+          <p:cNvSpPr>
+            <a:spLocks noGrp="1"/>
+          </p:cNvSpPr>
+          <p:nvPr>
+            <p:ph type="sldNum" idx="5" sz="quarter"/>
+          </p:nvPr>
+        </p:nvSpPr>
+        <p:spPr/>
+      </p:sp>
+    </p:spTree>
+  </p:cSld>
+  <p:clrMapOvr>
+    <a:masterClrMapping/>
+  </p:clrMapOvr>
+</p:notes>
+</file>
+
+<file path=ppt/notesSlides/notesSlide6.xml><?xml version="1.0" encoding="utf-8"?>
+<p:notes xmlns:a="http://schemas.openxmlformats.org/drawingml/2006/main" xmlns:p="http://schemas.openxmlformats.org/presentationml/2006/main" xmlns:r="http://schemas.openxmlformats.org/officeDocument/2006/relationships">
+  <p:cSld>
+    <p:spTree>
+      <p:nvGrpSpPr>
+        <p:cNvPr id="1" name=""/>
+        <p:cNvGrpSpPr/>
+        <p:nvPr/>
+      </p:nvGrpSpPr>
+      <p:grpSpPr>
+        <a:xfrm>
+          <a:off x="0" y="0"/>
+          <a:ext cx="0" cy="0"/>
+          <a:chOff x="0" y="0"/>
+          <a:chExt cx="0" cy="0"/>
+        </a:xfrm>
+      </p:grpSpPr>
+      <p:sp>
+        <p:nvSpPr>
+          <p:cNvPr id="2" name="Slide Image Placeholder 1"/>
+          <p:cNvSpPr>
+            <a:spLocks noGrp="1"/>
+          </p:cNvSpPr>
+          <p:nvPr>
+            <p:ph type="sldImg" idx="2"/>
+          </p:nvPr>
+        </p:nvSpPr>
+        <p:spPr/>
+      </p:sp>
+      <p:sp>
+        <p:nvSpPr>
+          <p:cNvPr id="3" name="Notes Placeholder 2"/>
+          <p:cNvSpPr>
+            <a:spLocks noGrp="1"/>
+          </p:cNvSpPr>
+          <p:nvPr>
+            <p:ph type="body" idx="3" sz="quarter"/>
+          </p:nvPr>
+        </p:nvSpPr>
+        <p:spPr/>
+        <p:txBody>
+          <a:bodyPr/>
+          <a:lstStyle/>
+          <a:p>
+            <a:r>
+              <a:t>Cluster RCT at the catchment level because the intervention is at the MCC and farmers within a catchment share MCCs. Three measurement levels including objective supervised milk testing — the cleanest outcome.</a:t>
+            </a:r>
+          </a:p>
+        </p:txBody>
+      </p:sp>
+      <p:sp>
+        <p:nvSpPr>
+          <p:cNvPr id="4" name="Slide Number Placeholder 3"/>
+          <p:cNvSpPr>
+            <a:spLocks noGrp="1"/>
+          </p:cNvSpPr>
+          <p:nvPr>
+            <p:ph type="sldNum" idx="5" sz="quarter"/>
+          </p:nvPr>
+        </p:nvSpPr>
+        <p:spPr/>
+      </p:sp>
+    </p:spTree>
+  </p:cSld>
+  <p:clrMapOvr>
+    <a:masterClrMapping/>
+  </p:clrMapOvr>
+</p:notes>
+</file>
+
+<file path=ppt/notesSlides/notesSlide7.xml><?xml version="1.0" encoding="utf-8"?>
+<p:notes xmlns:a="http://schemas.openxmlformats.org/drawingml/2006/main" xmlns:p="http://schemas.openxmlformats.org/presentationml/2006/main" xmlns:r="http://schemas.openxmlformats.org/officeDocument/2006/relationships">
+  <p:cSld>
+    <p:spTree>
+      <p:nvGrpSpPr>
+        <p:cNvPr id="1" name=""/>
+        <p:cNvGrpSpPr/>
+        <p:nvPr/>
+      </p:nvGrpSpPr>
+      <p:grpSpPr>
+        <a:xfrm>
+          <a:off x="0" y="0"/>
+          <a:ext cx="0" cy="0"/>
+          <a:chOff x="0" y="0"/>
+          <a:chExt cx="0" cy="0"/>
+        </a:xfrm>
+      </p:grpSpPr>
+      <p:sp>
+        <p:nvSpPr>
+          <p:cNvPr id="2" name="Slide Image Placeholder 1"/>
+          <p:cNvSpPr>
+            <a:spLocks noGrp="1"/>
+          </p:cNvSpPr>
+          <p:nvPr>
+            <p:ph type="sldImg" idx="2"/>
+          </p:nvPr>
+        </p:nvSpPr>
+        <p:spPr/>
+      </p:sp>
+      <p:sp>
+        <p:nvSpPr>
+          <p:cNvPr id="3" name="Notes Placeholder 2"/>
+          <p:cNvSpPr>
+            <a:spLocks noGrp="1"/>
+          </p:cNvSpPr>
+          <p:nvPr>
+            <p:ph type="body" idx="3" sz="quarter"/>
+          </p:nvPr>
+        </p:nvSpPr>
+        <p:spPr/>
+        <p:txBody>
+          <a:bodyPr/>
+          <a:lstStyle/>
+          <a:p>
+            <a:r>
+              <a:t>Three components: hardware (analyzer), software (app + portals for owners and DDA), and a farmer-facing information campaign to avoid power imbalance. Note imperfect compliance: analyzers moved, some unused. First stage 0.37, so ITT attenuated; we also report LATE.</a:t>
+            </a:r>
+          </a:p>
+        </p:txBody>
+      </p:sp>
+      <p:sp>
+        <p:nvSpPr>
+          <p:cNvPr id="4" name="Slide Number Placeholder 3"/>
+          <p:cNvSpPr>
+            <a:spLocks noGrp="1"/>
+          </p:cNvSpPr>
+          <p:nvPr>
+            <p:ph type="sldNum" idx="5" sz="quarter"/>
+          </p:nvPr>
+        </p:nvSpPr>
+        <p:spPr/>
+      </p:sp>
+    </p:spTree>
+  </p:cSld>
+  <p:clrMapOvr>
+    <a:masterClrMapping/>
+  </p:clrMapOvr>
+</p:notes>
+</file>
+
+<file path=ppt/notesSlides/notesSlide8.xml><?xml version="1.0" encoding="utf-8"?>
+<p:notes xmlns:a="http://schemas.openxmlformats.org/drawingml/2006/main" xmlns:p="http://schemas.openxmlformats.org/presentationml/2006/main" xmlns:r="http://schemas.openxmlformats.org/officeDocument/2006/relationships">
+  <p:cSld>
+    <p:spTree>
+      <p:nvGrpSpPr>
+        <p:cNvPr id="1" name=""/>
+        <p:cNvGrpSpPr/>
+        <p:nvPr/>
+      </p:nvGrpSpPr>
+      <p:grpSpPr>
+        <a:xfrm>
+          <a:off x="0" y="0"/>
+          <a:ext cx="0" cy="0"/>
+          <a:chOff x="0" y="0"/>
+          <a:chExt cx="0" cy="0"/>
+        </a:xfrm>
+      </p:grpSpPr>
+      <p:sp>
+        <p:nvSpPr>
+          <p:cNvPr id="2" name="Slide Image Placeholder 1"/>
+          <p:cNvSpPr>
+            <a:spLocks noGrp="1"/>
+          </p:cNvSpPr>
+          <p:nvPr>
+            <p:ph type="sldImg" idx="2"/>
+          </p:nvPr>
+        </p:nvSpPr>
+        <p:spPr/>
+      </p:sp>
+      <p:sp>
+        <p:nvSpPr>
+          <p:cNvPr id="3" name="Notes Placeholder 2"/>
+          <p:cNvSpPr>
+            <a:spLocks noGrp="1"/>
+          </p:cNvSpPr>
+          <p:nvPr>
+            <p:ph type="body" idx="3" sz="quarter"/>
+          </p:nvPr>
+        </p:nvSpPr>
+        <p:spPr/>
+        <p:txBody>
+          <a:bodyPr/>
+          <a:lstStyle/>
+          <a:p>
+            <a:r>
+              <a:t>Headline of Exp 1: quality improves, but selectively — on the margins a farmer/trader can manipulate quickly (water, skimming) rather than on composition that needs feeding changes. Significance stars: **=1%, *=5%.</a:t>
+            </a:r>
+          </a:p>
+        </p:txBody>
+      </p:sp>
+      <p:sp>
+        <p:nvSpPr>
+          <p:cNvPr id="4" name="Slide Number Placeholder 3"/>
+          <p:cNvSpPr>
+            <a:spLocks noGrp="1"/>
+          </p:cNvSpPr>
+          <p:nvPr>
+            <p:ph type="sldNum" idx="5" sz="quarter"/>
+          </p:nvPr>
+        </p:nvSpPr>
+        <p:spPr/>
+      </p:sp>
+    </p:spTree>
+  </p:cSld>
+  <p:clrMapOvr>
+    <a:masterClrMapping/>
+  </p:clrMapOvr>
+</p:notes>
+</file>
+
+<file path=ppt/notesSlides/notesSlide9.xml><?xml version="1.0" encoding="utf-8"?>
+<p:notes xmlns:a="http://schemas.openxmlformats.org/drawingml/2006/main" xmlns:p="http://schemas.openxmlformats.org/presentationml/2006/main" xmlns:r="http://schemas.openxmlformats.org/officeDocument/2006/relationships">
+  <p:cSld>
+    <p:spTree>
+      <p:nvGrpSpPr>
+        <p:cNvPr id="1" name=""/>
+        <p:cNvGrpSpPr/>
+        <p:nvPr/>
+      </p:nvGrpSpPr>
+      <p:grpSpPr>
+        <a:xfrm>
+          <a:off x="0" y="0"/>
+          <a:ext cx="0" cy="0"/>
+          <a:chOff x="0" y="0"/>
+          <a:chExt cx="0" cy="0"/>
+        </a:xfrm>
+      </p:grpSpPr>
+      <p:sp>
+        <p:nvSpPr>
+          <p:cNvPr id="2" name="Slide Image Placeholder 1"/>
+          <p:cNvSpPr>
+            <a:spLocks noGrp="1"/>
+          </p:cNvSpPr>
+          <p:nvPr>
+            <p:ph type="sldImg" idx="2"/>
+          </p:nvPr>
+        </p:nvSpPr>
+        <p:spPr/>
+      </p:sp>
+      <p:sp>
+        <p:nvSpPr>
+          <p:cNvPr id="3" name="Notes Placeholder 2"/>
+          <p:cNvSpPr>
+            <a:spLocks noGrp="1"/>
+          </p:cNvSpPr>
+          <p:nvPr>
+            <p:ph type="body" idx="3" sz="quarter"/>
+          </p:nvPr>
+        </p:nvSpPr>
+        <p:spPr/>
+        <p:txBody>
+          <a:bodyPr/>
+          <a:lstStyle/>
+          <a:p>
+            <a:r>
+              <a:t>Three forest plots: MCC primary outcomes, farmer primary outcomes, farmer prices by season. Testing rises sharply; every price/premium coefficient straddles zero. The quality gain is real but unrewarded — this is the puzzle the model resolves.</a:t>
+            </a:r>
+          </a:p>
+        </p:txBody>
+      </p:sp>
+      <p:sp>
+        <p:nvSpPr>
+          <p:cNvPr id="4" name="Slide Number Placeholder 3"/>
+          <p:cNvSpPr>
+            <a:spLocks noGrp="1"/>
+          </p:cNvSpPr>
+          <p:nvPr>
+            <p:ph type="sldNum" idx="5" sz="quarter"/>
+          </p:nvPr>
+        </p:nvSpPr>
+        <p:spPr/>
+      </p:sp>
+    </p:spTree>
+  </p:cSld>
+  <p:clrMapOvr>
+    <a:masterClrMapping/>
+  </p:clrMapOvr>
+</p:notes>
 </file>
 
 <file path=ppt/slideLayouts/slideLayout1.xml><?xml version="1.0" encoding="utf-8"?>
@@ -2597,6 +3799,3451 @@
 </p:sld>
 </file>
 
+<file path=ppt/slides/slide10.xml><?xml version="1.0" encoding="utf-8"?>
+<p:sld xmlns:a="http://schemas.openxmlformats.org/drawingml/2006/main" xmlns:p="http://schemas.openxmlformats.org/presentationml/2006/main" xmlns:r="http://schemas.openxmlformats.org/officeDocument/2006/relationships">
+  <p:cSld>
+    <p:spTree>
+      <p:nvGrpSpPr>
+        <p:cNvPr id="1" name=""/>
+        <p:cNvGrpSpPr/>
+        <p:nvPr/>
+      </p:nvGrpSpPr>
+      <p:grpSpPr/>
+      <p:sp>
+        <p:nvSpPr>
+          <p:cNvPr id="2" name="Title 1"/>
+          <p:cNvSpPr>
+            <a:spLocks noGrp="1"/>
+          </p:cNvSpPr>
+          <p:nvPr>
+            <p:ph type="title"/>
+          </p:nvPr>
+        </p:nvSpPr>
+        <p:spPr/>
+        <p:txBody>
+          <a:bodyPr/>
+          <a:lstStyle/>
+          <a:p>
+            <a:r>
+              <a:rPr sz="3000" b="1">
+                <a:solidFill>
+                  <a:srgbClr val="44546A"/>
+                </a:solidFill>
+                <a:latin typeface="Arial"/>
+              </a:rPr>
+              <a:t>Experiment 1: design</a:t>
+            </a:r>
+          </a:p>
+        </p:txBody>
+      </p:sp>
+      <p:sp>
+        <p:nvSpPr>
+          <p:cNvPr id="3" name="TextBox 2"/>
+          <p:cNvSpPr txBox="1"/>
+          <p:nvPr/>
+        </p:nvSpPr>
+        <p:spPr>
+          <a:xfrm>
+            <a:off x="640080" y="1554480"/>
+            <a:ext cx="5669280" cy="4754880"/>
+          </a:xfrm>
+          <a:prstGeom prst="rect">
+            <a:avLst/>
+          </a:prstGeom>
+          <a:noFill/>
+        </p:spPr>
+        <p:txBody>
+          <a:bodyPr wrap="square" anchor="t">
+            <a:spAutoFit/>
+          </a:bodyPr>
+          <a:lstStyle/>
+          <a:p>
+            <a:pPr algn="l">
+              <a:spcAft>
+                <a:spcPts val="1200"/>
+              </a:spcAft>
+              <a:buNone/>
+            </a:pPr>
+            <a:r>
+              <a:rPr sz="1900" b="1" i="0">
+                <a:solidFill>
+                  <a:srgbClr val="62BA45"/>
+                </a:solidFill>
+                <a:latin typeface="Arial"/>
+              </a:rPr>
+              <a:t>Cluster-randomised controlled trial</a:t>
+            </a:r>
+          </a:p>
+          <a:p>
+            <a:pPr algn="l" marL="274320" indent="-274320">
+              <a:spcAft>
+                <a:spcPts val="800"/>
+              </a:spcAft>
+              <a:buFont typeface="Arial"/>
+              <a:buChar char="•"/>
+            </a:pPr>
+            <a:r>
+              <a:rPr sz="1700" b="0" i="0">
+                <a:solidFill>
+                  <a:srgbClr val="2A2A2A"/>
+                </a:solidFill>
+                <a:latin typeface="Arial"/>
+              </a:rPr>
+              <a:t>Unit of randomisation: </a:t>
+            </a:r>
+            <a:r>
+              <a:rPr sz="1700" b="1" i="0">
+                <a:solidFill>
+                  <a:srgbClr val="00AE9A"/>
+                </a:solidFill>
+                <a:latin typeface="Arial"/>
+              </a:rPr>
+              <a:t>catchment area</a:t>
+            </a:r>
+            <a:r>
+              <a:rPr sz="1700" b="0" i="0">
+                <a:solidFill>
+                  <a:srgbClr val="2A2A2A"/>
+                </a:solidFill>
+                <a:latin typeface="Arial"/>
+              </a:rPr>
+              <a:t> (1–few co-located MCCs + their farmers).</a:t>
+            </a:r>
+          </a:p>
+          <a:p>
+            <a:pPr algn="l" marL="274320" indent="-274320">
+              <a:spcAft>
+                <a:spcPts val="800"/>
+              </a:spcAft>
+              <a:buFont typeface="Arial"/>
+              <a:buChar char="•"/>
+            </a:pPr>
+            <a:r>
+              <a:rPr sz="1700" b="1" i="0">
+                <a:solidFill>
+                  <a:srgbClr val="007DB3"/>
+                </a:solidFill>
+                <a:latin typeface="Arial"/>
+              </a:rPr>
+              <a:t>95 clusters / 125 MCCs</a:t>
+            </a:r>
+            <a:r>
+              <a:rPr sz="1700" b="0" i="0">
+                <a:solidFill>
+                  <a:srgbClr val="2A2A2A"/>
+                </a:solidFill>
+                <a:latin typeface="Arial"/>
+              </a:rPr>
+              <a:t>; ~half treated, half control.</a:t>
+            </a:r>
+          </a:p>
+          <a:p>
+            <a:pPr algn="l" marL="274320" indent="-274320">
+              <a:spcAft>
+                <a:spcPts val="800"/>
+              </a:spcAft>
+              <a:buFont typeface="Arial"/>
+              <a:buChar char="•"/>
+            </a:pPr>
+            <a:r>
+              <a:rPr sz="1700" b="1" i="0">
+                <a:solidFill>
+                  <a:srgbClr val="007DB3"/>
+                </a:solidFill>
+                <a:latin typeface="Arial"/>
+              </a:rPr>
+              <a:t>20 farmers</a:t>
+            </a:r>
+            <a:r>
+              <a:rPr sz="1700" b="0" i="0">
+                <a:solidFill>
+                  <a:srgbClr val="2A2A2A"/>
+                </a:solidFill>
+                <a:latin typeface="Arial"/>
+              </a:rPr>
+              <a:t> sampled per MCC → ~2,500 farmers.</a:t>
+            </a:r>
+          </a:p>
+          <a:p>
+            <a:pPr algn="l" marL="274320" indent="-274320">
+              <a:spcAft>
+                <a:spcPts val="800"/>
+              </a:spcAft>
+              <a:buFont typeface="Arial"/>
+              <a:buChar char="•"/>
+            </a:pPr>
+            <a:r>
+              <a:rPr sz="1700" b="0" i="0">
+                <a:solidFill>
+                  <a:srgbClr val="2A2A2A"/>
+                </a:solidFill>
+                <a:latin typeface="Arial"/>
+              </a:rPr>
+              <a:t>Effects estimated at </a:t>
+            </a:r>
+            <a:r>
+              <a:rPr sz="1700" b="1" i="0">
+                <a:solidFill>
+                  <a:srgbClr val="8850A0"/>
+                </a:solidFill>
+                <a:latin typeface="Arial"/>
+              </a:rPr>
+              <a:t>three levels</a:t>
+            </a:r>
+            <a:r>
+              <a:rPr sz="1700" b="0" i="0">
+                <a:solidFill>
+                  <a:srgbClr val="2A2A2A"/>
+                </a:solidFill>
+                <a:latin typeface="Arial"/>
+              </a:rPr>
+              <a:t>: MCC, farmer, and 2,518 supervised </a:t>
+            </a:r>
+            <a:r>
+              <a:rPr sz="1700" b="1" i="0">
+                <a:solidFill>
+                  <a:srgbClr val="8850A0"/>
+                </a:solidFill>
+                <a:latin typeface="Arial"/>
+              </a:rPr>
+              <a:t>milk samples</a:t>
+            </a:r>
+            <a:r>
+              <a:rPr sz="1700" b="0" i="0">
+                <a:solidFill>
+                  <a:srgbClr val="2A2A2A"/>
+                </a:solidFill>
+                <a:latin typeface="Arial"/>
+              </a:rPr>
+              <a:t> at endline.</a:t>
+            </a:r>
+          </a:p>
+          <a:p>
+            <a:pPr algn="l" marL="274320" indent="-274320">
+              <a:spcAft>
+                <a:spcPts val="0"/>
+              </a:spcAft>
+              <a:buFont typeface="Arial"/>
+              <a:buChar char="•"/>
+            </a:pPr>
+            <a:r>
+              <a:rPr sz="1700" b="0" i="0">
+                <a:solidFill>
+                  <a:srgbClr val="2A2A2A"/>
+                </a:solidFill>
+                <a:latin typeface="Arial"/>
+              </a:rPr>
+              <a:t>Baseline 2022  →  install/train 2023  →  endline Dec 2024.</a:t>
+            </a:r>
+          </a:p>
+        </p:txBody>
+      </p:sp>
+      <p:pic>
+        <p:nvPicPr>
+          <p:cNvPr id="4" name="Picture 3" descr="sampling_two_panels.png"/>
+          <p:cNvPicPr>
+            <a:picLocks noChangeAspect="1"/>
+          </p:cNvPicPr>
+          <p:nvPr/>
+        </p:nvPicPr>
+        <p:blipFill>
+          <a:blip r:embed="rId2"/>
+          <a:stretch>
+            <a:fillRect/>
+          </a:stretch>
+        </p:blipFill>
+        <p:spPr>
+          <a:xfrm>
+            <a:off x="6492240" y="1737360"/>
+            <a:ext cx="5120640" cy="3629114"/>
+          </a:xfrm>
+          <a:prstGeom prst="rect">
+            <a:avLst/>
+          </a:prstGeom>
+        </p:spPr>
+      </p:pic>
+      <p:sp>
+        <p:nvSpPr>
+          <p:cNvPr id="5" name="TextBox 4"/>
+          <p:cNvSpPr txBox="1"/>
+          <p:nvPr/>
+        </p:nvSpPr>
+        <p:spPr>
+          <a:xfrm>
+            <a:off x="6492240" y="5715000"/>
+            <a:ext cx="5120640" cy="548640"/>
+          </a:xfrm>
+          <a:prstGeom prst="rect">
+            <a:avLst/>
+          </a:prstGeom>
+          <a:noFill/>
+        </p:spPr>
+        <p:txBody>
+          <a:bodyPr wrap="square" anchor="t">
+            <a:spAutoFit/>
+          </a:bodyPr>
+          <a:lstStyle/>
+          <a:p>
+            <a:pPr algn="ctr">
+              <a:spcAft>
+                <a:spcPts val="0"/>
+              </a:spcAft>
+              <a:buNone/>
+            </a:pPr>
+            <a:r>
+              <a:rPr sz="1100" b="0" i="0">
+                <a:solidFill>
+                  <a:srgbClr val="6E6E6E"/>
+                </a:solidFill>
+                <a:latin typeface="Arial"/>
+              </a:rPr>
+              <a:t>Treatment assignment: MCCs (left) and their farmers (right). Green = treated, red = control.</a:t>
+            </a:r>
+          </a:p>
+        </p:txBody>
+      </p:sp>
+    </p:spTree>
+  </p:cSld>
+  <p:clrMapOvr>
+    <a:masterClrMapping/>
+  </p:clrMapOvr>
+</p:sld>
+</file>
+
+<file path=ppt/slides/slide11.xml><?xml version="1.0" encoding="utf-8"?>
+<p:sld xmlns:a="http://schemas.openxmlformats.org/drawingml/2006/main" xmlns:p="http://schemas.openxmlformats.org/presentationml/2006/main" xmlns:r="http://schemas.openxmlformats.org/officeDocument/2006/relationships">
+  <p:cSld>
+    <p:spTree>
+      <p:nvGrpSpPr>
+        <p:cNvPr id="1" name=""/>
+        <p:cNvGrpSpPr/>
+        <p:nvPr/>
+      </p:nvGrpSpPr>
+      <p:grpSpPr/>
+      <p:sp>
+        <p:nvSpPr>
+          <p:cNvPr id="2" name="Title 1"/>
+          <p:cNvSpPr>
+            <a:spLocks noGrp="1"/>
+          </p:cNvSpPr>
+          <p:nvPr>
+            <p:ph type="title"/>
+          </p:nvPr>
+        </p:nvSpPr>
+        <p:spPr/>
+        <p:txBody>
+          <a:bodyPr/>
+          <a:lstStyle/>
+          <a:p>
+            <a:r>
+              <a:rPr sz="3000" b="1">
+                <a:solidFill>
+                  <a:srgbClr val="44546A"/>
+                </a:solidFill>
+                <a:latin typeface="Arial"/>
+              </a:rPr>
+              <a:t>Experiment 1: the intervention bundle</a:t>
+            </a:r>
+          </a:p>
+        </p:txBody>
+      </p:sp>
+      <p:sp>
+        <p:nvSpPr>
+          <p:cNvPr id="3" name="TextBox 2"/>
+          <p:cNvSpPr txBox="1"/>
+          <p:nvPr/>
+        </p:nvSpPr>
+        <p:spPr>
+          <a:xfrm>
+            <a:off x="640080" y="1554480"/>
+            <a:ext cx="7223760" cy="4754880"/>
+          </a:xfrm>
+          <a:prstGeom prst="rect">
+            <a:avLst/>
+          </a:prstGeom>
+          <a:noFill/>
+        </p:spPr>
+        <p:txBody>
+          <a:bodyPr wrap="square" anchor="t">
+            <a:spAutoFit/>
+          </a:bodyPr>
+          <a:lstStyle/>
+          <a:p>
+            <a:pPr algn="l">
+              <a:spcAft>
+                <a:spcPts val="1200"/>
+              </a:spcAft>
+              <a:buNone/>
+            </a:pPr>
+            <a:r>
+              <a:rPr sz="1800" b="1" i="0">
+                <a:solidFill>
+                  <a:srgbClr val="62BA45"/>
+                </a:solidFill>
+                <a:latin typeface="Arial"/>
+              </a:rPr>
+              <a:t>1.  Milk analyzer</a:t>
+            </a:r>
+            <a:r>
+              <a:rPr sz="1800" b="0" i="0">
+                <a:solidFill>
+                  <a:srgbClr val="2A2A2A"/>
+                </a:solidFill>
+                <a:latin typeface="Arial"/>
+              </a:rPr>
+              <a:t>  — measures fat, SNF, protein, added water &amp; density in &lt;1 min/sample.</a:t>
+            </a:r>
+          </a:p>
+          <a:p>
+            <a:pPr algn="l">
+              <a:spcAft>
+                <a:spcPts val="1200"/>
+              </a:spcAft>
+              <a:buNone/>
+            </a:pPr>
+            <a:r>
+              <a:rPr sz="1800" b="1" i="0">
+                <a:solidFill>
+                  <a:srgbClr val="00AE9A"/>
+                </a:solidFill>
+                <a:latin typeface="Arial"/>
+              </a:rPr>
+              <a:t>2.  Digital record-keeping app</a:t>
+            </a:r>
+            <a:r>
+              <a:rPr sz="1800" b="0" i="0">
+                <a:solidFill>
+                  <a:srgbClr val="2A2A2A"/>
+                </a:solidFill>
+                <a:latin typeface="Arial"/>
+              </a:rPr>
+              <a:t>  — Android tablet replaces paper notebook; stores quality + quantity per farmer, builds quality histories.</a:t>
+            </a:r>
+          </a:p>
+          <a:p>
+            <a:pPr algn="l">
+              <a:spcAft>
+                <a:spcPts val="1600"/>
+              </a:spcAft>
+              <a:buNone/>
+            </a:pPr>
+            <a:r>
+              <a:rPr sz="1800" b="1" i="0">
+                <a:solidFill>
+                  <a:srgbClr val="007DB3"/>
+                </a:solidFill>
+                <a:latin typeface="Arial"/>
+              </a:rPr>
+              <a:t>3.  Farmer awareness campaign</a:t>
+            </a:r>
+            <a:r>
+              <a:rPr sz="1800" b="0" i="0">
+                <a:solidFill>
+                  <a:srgbClr val="2A2A2A"/>
+                </a:solidFill>
+                <a:latin typeface="Arial"/>
+              </a:rPr>
+              <a:t>  — posters publicise the new testing capacity and farmers’ right to request a free test.</a:t>
+            </a:r>
+          </a:p>
+          <a:p>
+            <a:pPr algn="l">
+              <a:spcAft>
+                <a:spcPts val="1000"/>
+              </a:spcAft>
+              <a:buNone/>
+            </a:pPr>
+            <a:r>
+              <a:rPr sz="1800" b="1" i="0">
+                <a:solidFill>
+                  <a:srgbClr val="44546A"/>
+                </a:solidFill>
+                <a:latin typeface="Arial"/>
+              </a:rPr>
+              <a:t>Together: make quality </a:t>
+            </a:r>
+            <a:r>
+              <a:rPr sz="1800" b="1" i="0">
+                <a:solidFill>
+                  <a:srgbClr val="8850A0"/>
+                </a:solidFill>
+                <a:latin typeface="Arial"/>
+              </a:rPr>
+              <a:t>observable, traceable, and actionable</a:t>
+            </a:r>
+            <a:r>
+              <a:rPr sz="1800" b="1" i="0">
+                <a:solidFill>
+                  <a:srgbClr val="44546A"/>
+                </a:solidFill>
+                <a:latin typeface="Arial"/>
+              </a:rPr>
+              <a:t>.</a:t>
+            </a:r>
+          </a:p>
+          <a:p>
+            <a:pPr algn="l">
+              <a:spcAft>
+                <a:spcPts val="0"/>
+              </a:spcAft>
+              <a:buNone/>
+            </a:pPr>
+            <a:r>
+              <a:rPr sz="1500" b="0" i="1">
+                <a:solidFill>
+                  <a:srgbClr val="2A2A2A"/>
+                </a:solidFill>
+                <a:latin typeface="Arial"/>
+              </a:rPr>
+              <a:t>Compliance was imperfect — first stage = </a:t>
+            </a:r>
+            <a:r>
+              <a:rPr sz="1500" b="1" i="1">
+                <a:solidFill>
+                  <a:srgbClr val="EF463B"/>
+                </a:solidFill>
+                <a:latin typeface="Arial"/>
+              </a:rPr>
+              <a:t>0.37</a:t>
+            </a:r>
+            <a:r>
+              <a:rPr sz="1500" b="0" i="1">
+                <a:solidFill>
+                  <a:srgbClr val="2A2A2A"/>
+                </a:solidFill>
+                <a:latin typeface="Arial"/>
+              </a:rPr>
+              <a:t> (24% → 61% with a functioning analyzer). ITT is a lower bound.</a:t>
+            </a:r>
+          </a:p>
+        </p:txBody>
+      </p:sp>
+      <p:pic>
+        <p:nvPicPr>
+          <p:cNvPr id="4" name="Picture 3" descr="app.png"/>
+          <p:cNvPicPr>
+            <a:picLocks noChangeAspect="1"/>
+          </p:cNvPicPr>
+          <p:nvPr/>
+        </p:nvPicPr>
+        <p:blipFill>
+          <a:blip r:embed="rId2"/>
+          <a:stretch>
+            <a:fillRect/>
+          </a:stretch>
+        </p:blipFill>
+        <p:spPr>
+          <a:xfrm>
+            <a:off x="8780526" y="1554480"/>
+            <a:ext cx="2098548" cy="4663440"/>
+          </a:xfrm>
+          <a:prstGeom prst="rect">
+            <a:avLst/>
+          </a:prstGeom>
+        </p:spPr>
+      </p:pic>
+    </p:spTree>
+  </p:cSld>
+  <p:clrMapOvr>
+    <a:masterClrMapping/>
+  </p:clrMapOvr>
+</p:sld>
+</file>
+
+<file path=ppt/slides/slide12.xml><?xml version="1.0" encoding="utf-8"?>
+<p:sld xmlns:a="http://schemas.openxmlformats.org/drawingml/2006/main" xmlns:p="http://schemas.openxmlformats.org/presentationml/2006/main" xmlns:r="http://schemas.openxmlformats.org/officeDocument/2006/relationships">
+  <p:cSld>
+    <p:spTree>
+      <p:nvGrpSpPr>
+        <p:cNvPr id="1" name=""/>
+        <p:cNvGrpSpPr/>
+        <p:nvPr/>
+      </p:nvGrpSpPr>
+      <p:grpSpPr/>
+      <p:sp>
+        <p:nvSpPr>
+          <p:cNvPr id="2" name="Title 1"/>
+          <p:cNvSpPr>
+            <a:spLocks noGrp="1"/>
+          </p:cNvSpPr>
+          <p:nvPr>
+            <p:ph type="title"/>
+          </p:nvPr>
+        </p:nvSpPr>
+        <p:spPr/>
+        <p:txBody>
+          <a:bodyPr/>
+          <a:lstStyle/>
+          <a:p>
+            <a:r>
+              <a:rPr sz="3000" b="1">
+                <a:solidFill>
+                  <a:srgbClr val="44546A"/>
+                </a:solidFill>
+                <a:latin typeface="Arial"/>
+              </a:rPr>
+              <a:t>Experiment 1 results: milk quality improves</a:t>
+            </a:r>
+          </a:p>
+        </p:txBody>
+      </p:sp>
+      <p:sp>
+        <p:nvSpPr>
+          <p:cNvPr id="3" name="TextBox 2"/>
+          <p:cNvSpPr txBox="1"/>
+          <p:nvPr/>
+        </p:nvSpPr>
+        <p:spPr>
+          <a:xfrm>
+            <a:off x="640080" y="1417320"/>
+            <a:ext cx="10972800" cy="731520"/>
+          </a:xfrm>
+          <a:prstGeom prst="rect">
+            <a:avLst/>
+          </a:prstGeom>
+          <a:noFill/>
+        </p:spPr>
+        <p:txBody>
+          <a:bodyPr wrap="square" anchor="t">
+            <a:spAutoFit/>
+          </a:bodyPr>
+          <a:lstStyle/>
+          <a:p>
+            <a:pPr algn="l">
+              <a:spcAft>
+                <a:spcPts val="0"/>
+              </a:spcAft>
+              <a:buNone/>
+            </a:pPr>
+            <a:r>
+              <a:rPr sz="2000" b="0" i="0">
+                <a:solidFill>
+                  <a:srgbClr val="44546A"/>
+                </a:solidFill>
+                <a:latin typeface="Arial"/>
+              </a:rPr>
+              <a:t>On 2,518 supervised milk samples, treated MCCs receive </a:t>
+            </a:r>
+            <a:r>
+              <a:rPr sz="2000" b="1" i="0">
+                <a:solidFill>
+                  <a:srgbClr val="62BA45"/>
+                </a:solidFill>
+                <a:latin typeface="Arial"/>
+              </a:rPr>
+              <a:t>cleaner, richer milk</a:t>
+            </a:r>
+            <a:r>
+              <a:rPr sz="2000" b="0" i="0">
+                <a:solidFill>
+                  <a:srgbClr val="44546A"/>
+                </a:solidFill>
+                <a:latin typeface="Arial"/>
+              </a:rPr>
+              <a:t>.</a:t>
+            </a:r>
+          </a:p>
+        </p:txBody>
+      </p:sp>
+      <p:sp>
+        <p:nvSpPr>
+          <p:cNvPr id="4" name="Rounded Rectangle 3"/>
+          <p:cNvSpPr/>
+          <p:nvPr/>
+        </p:nvSpPr>
+        <p:spPr>
+          <a:xfrm>
+            <a:off x="640080" y="2331720"/>
+            <a:ext cx="2514600" cy="1554480"/>
+          </a:xfrm>
+          <a:prstGeom prst="roundRect">
+            <a:avLst/>
+          </a:prstGeom>
+          <a:solidFill>
+            <a:srgbClr val="F5F7F9"/>
+          </a:solidFill>
+          <a:ln w="12700">
+            <a:solidFill>
+              <a:srgbClr val="D5DBE0"/>
+            </a:solidFill>
+          </a:ln>
+          <a:effectLst/>
+        </p:spPr>
+        <p:style>
+          <a:lnRef idx="1">
+            <a:schemeClr val="accent1"/>
+          </a:lnRef>
+          <a:fillRef idx="3">
+            <a:schemeClr val="accent1"/>
+          </a:fillRef>
+          <a:effectRef idx="2">
+            <a:schemeClr val="accent1"/>
+          </a:effectRef>
+          <a:fontRef idx="minor">
+            <a:schemeClr val="lt1"/>
+          </a:fontRef>
+        </p:style>
+        <p:txBody>
+          <a:bodyPr rtlCol="0" anchor="ctr" wrap="square" tIns="76200" bIns="76200"/>
+          <a:lstStyle/>
+          <a:p>
+            <a:pPr algn="ctr">
+              <a:spcAft>
+                <a:spcPts val="200"/>
+              </a:spcAft>
+              <a:buNone/>
+            </a:pPr>
+            <a:r>
+              <a:rPr sz="3000" b="1" i="0">
+                <a:solidFill>
+                  <a:srgbClr val="62BA45"/>
+                </a:solidFill>
+                <a:latin typeface="Arial"/>
+              </a:rPr>
+              <a:t>+0.11pp</a:t>
+            </a:r>
+          </a:p>
+          <a:p>
+            <a:pPr algn="ctr">
+              <a:spcAft>
+                <a:spcPts val="0"/>
+              </a:spcAft>
+              <a:buNone/>
+            </a:pPr>
+            <a:r>
+              <a:rPr sz="1300" b="1" i="0">
+                <a:solidFill>
+                  <a:srgbClr val="44546A"/>
+                </a:solidFill>
+                <a:latin typeface="Arial"/>
+              </a:rPr>
+              <a:t>Butterfat **</a:t>
+            </a:r>
+          </a:p>
+          <a:p>
+            <a:pPr algn="ctr">
+              <a:spcAft>
+                <a:spcPts val="0"/>
+              </a:spcAft>
+              <a:buNone/>
+            </a:pPr>
+            <a:r>
+              <a:rPr sz="1100" b="0" i="0">
+                <a:solidFill>
+                  <a:srgbClr val="6E6E6E"/>
+                </a:solidFill>
+                <a:latin typeface="Arial"/>
+              </a:rPr>
+              <a:t>3.88% → ~4.0%</a:t>
+            </a:r>
+          </a:p>
+        </p:txBody>
+      </p:sp>
+      <p:sp>
+        <p:nvSpPr>
+          <p:cNvPr id="5" name="Rounded Rectangle 4"/>
+          <p:cNvSpPr/>
+          <p:nvPr/>
+        </p:nvSpPr>
+        <p:spPr>
+          <a:xfrm>
+            <a:off x="3383280" y="2331720"/>
+            <a:ext cx="2514600" cy="1554480"/>
+          </a:xfrm>
+          <a:prstGeom prst="roundRect">
+            <a:avLst/>
+          </a:prstGeom>
+          <a:solidFill>
+            <a:srgbClr val="F5F7F9"/>
+          </a:solidFill>
+          <a:ln w="12700">
+            <a:solidFill>
+              <a:srgbClr val="D5DBE0"/>
+            </a:solidFill>
+          </a:ln>
+          <a:effectLst/>
+        </p:spPr>
+        <p:style>
+          <a:lnRef idx="1">
+            <a:schemeClr val="accent1"/>
+          </a:lnRef>
+          <a:fillRef idx="3">
+            <a:schemeClr val="accent1"/>
+          </a:fillRef>
+          <a:effectRef idx="2">
+            <a:schemeClr val="accent1"/>
+          </a:effectRef>
+          <a:fontRef idx="minor">
+            <a:schemeClr val="lt1"/>
+          </a:fontRef>
+        </p:style>
+        <p:txBody>
+          <a:bodyPr rtlCol="0" anchor="ctr" wrap="square" tIns="76200" bIns="76200"/>
+          <a:lstStyle/>
+          <a:p>
+            <a:pPr algn="ctr">
+              <a:spcAft>
+                <a:spcPts val="200"/>
+              </a:spcAft>
+              <a:buNone/>
+            </a:pPr>
+            <a:r>
+              <a:rPr sz="3000" b="1" i="0">
+                <a:solidFill>
+                  <a:srgbClr val="EF463B"/>
+                </a:solidFill>
+                <a:latin typeface="Arial"/>
+              </a:rPr>
+              <a:t>−0.49pp</a:t>
+            </a:r>
+          </a:p>
+          <a:p>
+            <a:pPr algn="ctr">
+              <a:spcAft>
+                <a:spcPts val="0"/>
+              </a:spcAft>
+              <a:buNone/>
+            </a:pPr>
+            <a:r>
+              <a:rPr sz="1300" b="1" i="0">
+                <a:solidFill>
+                  <a:srgbClr val="44546A"/>
+                </a:solidFill>
+                <a:latin typeface="Arial"/>
+              </a:rPr>
+              <a:t>Added water *</a:t>
+            </a:r>
+          </a:p>
+          <a:p>
+            <a:pPr algn="ctr">
+              <a:spcAft>
+                <a:spcPts val="0"/>
+              </a:spcAft>
+              <a:buNone/>
+            </a:pPr>
+            <a:r>
+              <a:rPr sz="1100" b="0" i="0">
+                <a:solidFill>
+                  <a:srgbClr val="6E6E6E"/>
+                </a:solidFill>
+                <a:latin typeface="Arial"/>
+              </a:rPr>
+              <a:t>vs 1.63% control</a:t>
+            </a:r>
+          </a:p>
+        </p:txBody>
+      </p:sp>
+      <p:sp>
+        <p:nvSpPr>
+          <p:cNvPr id="6" name="Rounded Rectangle 5"/>
+          <p:cNvSpPr/>
+          <p:nvPr/>
+        </p:nvSpPr>
+        <p:spPr>
+          <a:xfrm>
+            <a:off x="6126480" y="2331720"/>
+            <a:ext cx="2514600" cy="1554480"/>
+          </a:xfrm>
+          <a:prstGeom prst="roundRect">
+            <a:avLst/>
+          </a:prstGeom>
+          <a:solidFill>
+            <a:srgbClr val="F5F7F9"/>
+          </a:solidFill>
+          <a:ln w="12700">
+            <a:solidFill>
+              <a:srgbClr val="D5DBE0"/>
+            </a:solidFill>
+          </a:ln>
+          <a:effectLst/>
+        </p:spPr>
+        <p:style>
+          <a:lnRef idx="1">
+            <a:schemeClr val="accent1"/>
+          </a:lnRef>
+          <a:fillRef idx="3">
+            <a:schemeClr val="accent1"/>
+          </a:fillRef>
+          <a:effectRef idx="2">
+            <a:schemeClr val="accent1"/>
+          </a:effectRef>
+          <a:fontRef idx="minor">
+            <a:schemeClr val="lt1"/>
+          </a:fontRef>
+        </p:style>
+        <p:txBody>
+          <a:bodyPr rtlCol="0" anchor="ctr" wrap="square" tIns="76200" bIns="76200"/>
+          <a:lstStyle/>
+          <a:p>
+            <a:pPr algn="ctr">
+              <a:spcAft>
+                <a:spcPts val="200"/>
+              </a:spcAft>
+              <a:buNone/>
+            </a:pPr>
+            <a:r>
+              <a:rPr sz="3000" b="1" i="0">
+                <a:solidFill>
+                  <a:srgbClr val="00AE9A"/>
+                </a:solidFill>
+                <a:latin typeface="Arial"/>
+              </a:rPr>
+              <a:t>+0.44</a:t>
+            </a:r>
+          </a:p>
+          <a:p>
+            <a:pPr algn="ctr">
+              <a:spcAft>
+                <a:spcPts val="0"/>
+              </a:spcAft>
+              <a:buNone/>
+            </a:pPr>
+            <a:r>
+              <a:rPr sz="1300" b="1" i="0">
+                <a:solidFill>
+                  <a:srgbClr val="44546A"/>
+                </a:solidFill>
+                <a:latin typeface="Arial"/>
+              </a:rPr>
+              <a:t>Density (CLR) *</a:t>
+            </a:r>
+          </a:p>
+          <a:p>
+            <a:pPr algn="ctr">
+              <a:spcAft>
+                <a:spcPts val="0"/>
+              </a:spcAft>
+              <a:buNone/>
+            </a:pPr>
+            <a:r>
+              <a:rPr sz="1100" b="0" i="0">
+                <a:solidFill>
+                  <a:srgbClr val="6E6E6E"/>
+                </a:solidFill>
+                <a:latin typeface="Arial"/>
+              </a:rPr>
+              <a:t>less dilution</a:t>
+            </a:r>
+          </a:p>
+        </p:txBody>
+      </p:sp>
+      <p:sp>
+        <p:nvSpPr>
+          <p:cNvPr id="7" name="Rounded Rectangle 6"/>
+          <p:cNvSpPr/>
+          <p:nvPr/>
+        </p:nvSpPr>
+        <p:spPr>
+          <a:xfrm>
+            <a:off x="8869680" y="2331720"/>
+            <a:ext cx="2514600" cy="1554480"/>
+          </a:xfrm>
+          <a:prstGeom prst="roundRect">
+            <a:avLst/>
+          </a:prstGeom>
+          <a:solidFill>
+            <a:srgbClr val="F5F7F9"/>
+          </a:solidFill>
+          <a:ln w="12700">
+            <a:solidFill>
+              <a:srgbClr val="D5DBE0"/>
+            </a:solidFill>
+          </a:ln>
+          <a:effectLst/>
+        </p:spPr>
+        <p:style>
+          <a:lnRef idx="1">
+            <a:schemeClr val="accent1"/>
+          </a:lnRef>
+          <a:fillRef idx="3">
+            <a:schemeClr val="accent1"/>
+          </a:fillRef>
+          <a:effectRef idx="2">
+            <a:schemeClr val="accent1"/>
+          </a:effectRef>
+          <a:fontRef idx="minor">
+            <a:schemeClr val="lt1"/>
+          </a:fontRef>
+        </p:style>
+        <p:txBody>
+          <a:bodyPr rtlCol="0" anchor="ctr" wrap="square" tIns="76200" bIns="76200"/>
+          <a:lstStyle/>
+          <a:p>
+            <a:pPr algn="ctr">
+              <a:spcAft>
+                <a:spcPts val="200"/>
+              </a:spcAft>
+              <a:buNone/>
+            </a:pPr>
+            <a:r>
+              <a:rPr sz="3000" b="1" i="0">
+                <a:solidFill>
+                  <a:srgbClr val="8850A0"/>
+                </a:solidFill>
+                <a:latin typeface="Arial"/>
+              </a:rPr>
+              <a:t>+0.21σ</a:t>
+            </a:r>
+          </a:p>
+          <a:p>
+            <a:pPr algn="ctr">
+              <a:spcAft>
+                <a:spcPts val="0"/>
+              </a:spcAft>
+              <a:buNone/>
+            </a:pPr>
+            <a:r>
+              <a:rPr sz="1300" b="1" i="0">
+                <a:solidFill>
+                  <a:srgbClr val="44546A"/>
+                </a:solidFill>
+                <a:latin typeface="Arial"/>
+              </a:rPr>
+              <a:t>Quality index **</a:t>
+            </a:r>
+          </a:p>
+          <a:p>
+            <a:pPr algn="ctr">
+              <a:spcAft>
+                <a:spcPts val="0"/>
+              </a:spcAft>
+              <a:buNone/>
+            </a:pPr>
+            <a:r>
+              <a:rPr sz="1100" b="0" i="0">
+                <a:solidFill>
+                  <a:srgbClr val="6E6E6E"/>
+                </a:solidFill>
+                <a:latin typeface="Arial"/>
+              </a:rPr>
+              <a:t>Anderson composite</a:t>
+            </a:r>
+          </a:p>
+        </p:txBody>
+      </p:sp>
+      <p:sp>
+        <p:nvSpPr>
+          <p:cNvPr id="8" name="TextBox 7"/>
+          <p:cNvSpPr txBox="1"/>
+          <p:nvPr/>
+        </p:nvSpPr>
+        <p:spPr>
+          <a:xfrm>
+            <a:off x="640080" y="4206240"/>
+            <a:ext cx="10972800" cy="2011680"/>
+          </a:xfrm>
+          <a:prstGeom prst="rect">
+            <a:avLst/>
+          </a:prstGeom>
+          <a:noFill/>
+        </p:spPr>
+        <p:txBody>
+          <a:bodyPr wrap="square" anchor="t">
+            <a:spAutoFit/>
+          </a:bodyPr>
+          <a:lstStyle/>
+          <a:p>
+            <a:pPr algn="l" marL="274320" indent="-274320">
+              <a:spcAft>
+                <a:spcPts val="1000"/>
+              </a:spcAft>
+              <a:buFont typeface="Arial"/>
+              <a:buChar char="•"/>
+            </a:pPr>
+            <a:r>
+              <a:rPr sz="1800" b="0" i="0">
+                <a:solidFill>
+                  <a:srgbClr val="2A2A2A"/>
+                </a:solidFill>
+                <a:latin typeface="Arial"/>
+              </a:rPr>
+              <a:t>Effects load on </a:t>
+            </a:r>
+            <a:r>
+              <a:rPr sz="1800" b="1" i="0">
+                <a:solidFill>
+                  <a:srgbClr val="62BA45"/>
+                </a:solidFill>
+                <a:latin typeface="Arial"/>
+              </a:rPr>
+              <a:t>handling/adulteration margins</a:t>
+            </a:r>
+            <a:r>
+              <a:rPr sz="1800" b="0" i="0">
+                <a:solidFill>
+                  <a:srgbClr val="2A2A2A"/>
+                </a:solidFill>
+                <a:latin typeface="Arial"/>
+              </a:rPr>
+              <a:t> (fat, water, density), not on biologically-determined SNF and protein (both null).</a:t>
+            </a:r>
+          </a:p>
+          <a:p>
+            <a:pPr algn="l" marL="274320" indent="-274320">
+              <a:spcAft>
+                <a:spcPts val="1000"/>
+              </a:spcAft>
+              <a:buFont typeface="Arial"/>
+              <a:buChar char="•"/>
+            </a:pPr>
+            <a:r>
+              <a:rPr sz="1800" b="0" i="0">
+                <a:solidFill>
+                  <a:srgbClr val="2A2A2A"/>
+                </a:solidFill>
+                <a:latin typeface="Arial"/>
+              </a:rPr>
+              <a:t>Pattern is consistent with </a:t>
+            </a:r>
+            <a:r>
+              <a:rPr sz="1800" b="1" i="0">
+                <a:solidFill>
+                  <a:srgbClr val="00AE9A"/>
+                </a:solidFill>
+                <a:latin typeface="Arial"/>
+              </a:rPr>
+              <a:t>reduced skimming and dilution</a:t>
+            </a:r>
+            <a:r>
+              <a:rPr sz="1800" b="0" i="0">
+                <a:solidFill>
+                  <a:srgbClr val="2A2A2A"/>
+                </a:solidFill>
+                <a:latin typeface="Arial"/>
+              </a:rPr>
+              <a:t>, not deeper changes in feeding or production.</a:t>
+            </a:r>
+          </a:p>
+          <a:p>
+            <a:pPr algn="l" marL="274320" indent="-274320">
+              <a:spcAft>
+                <a:spcPts val="0"/>
+              </a:spcAft>
+              <a:buFont typeface="Arial"/>
+              <a:buChar char="•"/>
+            </a:pPr>
+            <a:r>
+              <a:rPr sz="1800" b="0" i="0">
+                <a:solidFill>
+                  <a:srgbClr val="2A2A2A"/>
+                </a:solidFill>
+                <a:latin typeface="Arial"/>
+              </a:rPr>
+              <a:t>Robust to dropping </a:t>
+            </a:r>
+            <a:r>
+              <a:rPr sz="1800" b="1" i="0">
+                <a:solidFill>
+                  <a:srgbClr val="6E6E6E"/>
+                </a:solidFill>
+                <a:latin typeface="Arial"/>
+              </a:rPr>
+              <a:t>contaminated controls</a:t>
+            </a:r>
+            <a:r>
+              <a:rPr sz="1800" b="0" i="0">
+                <a:solidFill>
+                  <a:srgbClr val="2A2A2A"/>
+                </a:solidFill>
+                <a:latin typeface="Arial"/>
+              </a:rPr>
+              <a:t> (index +0.22σ on clean sample) and to LATE.</a:t>
+            </a:r>
+          </a:p>
+        </p:txBody>
+      </p:sp>
+    </p:spTree>
+  </p:cSld>
+  <p:clrMapOvr>
+    <a:masterClrMapping/>
+  </p:clrMapOvr>
+</p:sld>
+</file>
+
+<file path=ppt/slides/slide13.xml><?xml version="1.0" encoding="utf-8"?>
+<p:sld xmlns:a="http://schemas.openxmlformats.org/drawingml/2006/main" xmlns:p="http://schemas.openxmlformats.org/presentationml/2006/main" xmlns:r="http://schemas.openxmlformats.org/officeDocument/2006/relationships">
+  <p:cSld>
+    <p:spTree>
+      <p:nvGrpSpPr>
+        <p:cNvPr id="1" name=""/>
+        <p:cNvGrpSpPr/>
+        <p:nvPr/>
+      </p:nvGrpSpPr>
+      <p:grpSpPr/>
+      <p:sp>
+        <p:nvSpPr>
+          <p:cNvPr id="2" name="Title 1"/>
+          <p:cNvSpPr>
+            <a:spLocks noGrp="1"/>
+          </p:cNvSpPr>
+          <p:nvPr>
+            <p:ph type="title"/>
+          </p:nvPr>
+        </p:nvSpPr>
+        <p:spPr/>
+        <p:txBody>
+          <a:bodyPr/>
+          <a:lstStyle/>
+          <a:p>
+            <a:r>
+              <a:rPr sz="3000" b="1">
+                <a:solidFill>
+                  <a:srgbClr val="44546A"/>
+                </a:solidFill>
+                <a:latin typeface="Arial"/>
+              </a:rPr>
+              <a:t>Experiment 1 results: … but no price premium emerges</a:t>
+            </a:r>
+          </a:p>
+        </p:txBody>
+      </p:sp>
+      <p:pic>
+        <p:nvPicPr>
+          <p:cNvPr id="3" name="Picture 2" descr="fig_forest_mcc_primary.png"/>
+          <p:cNvPicPr>
+            <a:picLocks noChangeAspect="1"/>
+          </p:cNvPicPr>
+          <p:nvPr/>
+        </p:nvPicPr>
+        <p:blipFill>
+          <a:blip r:embed="rId2"/>
+          <a:stretch>
+            <a:fillRect/>
+          </a:stretch>
+        </p:blipFill>
+        <p:spPr>
+          <a:xfrm>
+            <a:off x="365760" y="1463040"/>
+            <a:ext cx="3886200" cy="2331720"/>
+          </a:xfrm>
+          <a:prstGeom prst="rect">
+            <a:avLst/>
+          </a:prstGeom>
+        </p:spPr>
+      </p:pic>
+      <p:pic>
+        <p:nvPicPr>
+          <p:cNvPr id="4" name="Picture 3" descr="fig_forest_farmer_primary.png"/>
+          <p:cNvPicPr>
+            <a:picLocks noChangeAspect="1"/>
+          </p:cNvPicPr>
+          <p:nvPr/>
+        </p:nvPicPr>
+        <p:blipFill>
+          <a:blip r:embed="rId3"/>
+          <a:stretch>
+            <a:fillRect/>
+          </a:stretch>
+        </p:blipFill>
+        <p:spPr>
+          <a:xfrm>
+            <a:off x="4160520" y="1463040"/>
+            <a:ext cx="3886200" cy="2331720"/>
+          </a:xfrm>
+          <a:prstGeom prst="rect">
+            <a:avLst/>
+          </a:prstGeom>
+        </p:spPr>
+      </p:pic>
+      <p:pic>
+        <p:nvPicPr>
+          <p:cNvPr id="5" name="Picture 4" descr="fig_forest_prices_exp1.png"/>
+          <p:cNvPicPr>
+            <a:picLocks noChangeAspect="1"/>
+          </p:cNvPicPr>
+          <p:nvPr/>
+        </p:nvPicPr>
+        <p:blipFill>
+          <a:blip r:embed="rId4"/>
+          <a:stretch>
+            <a:fillRect/>
+          </a:stretch>
+        </p:blipFill>
+        <p:spPr>
+          <a:xfrm>
+            <a:off x="7955279" y="1463040"/>
+            <a:ext cx="3886200" cy="2331720"/>
+          </a:xfrm>
+          <a:prstGeom prst="rect">
+            <a:avLst/>
+          </a:prstGeom>
+        </p:spPr>
+      </p:pic>
+      <p:sp>
+        <p:nvSpPr>
+          <p:cNvPr id="6" name="TextBox 5"/>
+          <p:cNvSpPr txBox="1"/>
+          <p:nvPr/>
+        </p:nvSpPr>
+        <p:spPr>
+          <a:xfrm>
+            <a:off x="640080" y="4800600"/>
+            <a:ext cx="10972800" cy="1737360"/>
+          </a:xfrm>
+          <a:prstGeom prst="rect">
+            <a:avLst/>
+          </a:prstGeom>
+          <a:noFill/>
+        </p:spPr>
+        <p:txBody>
+          <a:bodyPr wrap="square" anchor="t">
+            <a:spAutoFit/>
+          </a:bodyPr>
+          <a:lstStyle/>
+          <a:p>
+            <a:pPr algn="l" marL="274320" indent="-274320">
+              <a:spcAft>
+                <a:spcPts val="800"/>
+              </a:spcAft>
+              <a:buFont typeface="Arial"/>
+              <a:buChar char="•"/>
+            </a:pPr>
+            <a:r>
+              <a:rPr sz="1700" b="1" i="0">
+                <a:solidFill>
+                  <a:srgbClr val="62BA45"/>
+                </a:solidFill>
+                <a:latin typeface="Arial"/>
+              </a:rPr>
+              <a:t>Testing behaviour jumps</a:t>
+            </a:r>
+            <a:r>
+              <a:rPr sz="1700" b="0" i="0">
+                <a:solidFill>
+                  <a:srgbClr val="2A2A2A"/>
+                </a:solidFill>
+                <a:latin typeface="Arial"/>
+              </a:rPr>
+              <a:t>: treated MCCs test incoming milk +53pp (29% → 82%).</a:t>
+            </a:r>
+          </a:p>
+          <a:p>
+            <a:pPr algn="l" marL="274320" indent="-274320">
+              <a:spcAft>
+                <a:spcPts val="800"/>
+              </a:spcAft>
+              <a:buFont typeface="Arial"/>
+              <a:buChar char="•"/>
+            </a:pPr>
+            <a:r>
+              <a:rPr sz="1700" b="0" i="0">
+                <a:solidFill>
+                  <a:srgbClr val="2A2A2A"/>
+                </a:solidFill>
+                <a:latin typeface="Arial"/>
+              </a:rPr>
+              <a:t>Prices and premiums: </a:t>
+            </a:r>
+            <a:r>
+              <a:rPr sz="1700" b="1" i="0">
+                <a:solidFill>
+                  <a:srgbClr val="EF463B"/>
+                </a:solidFill>
+                <a:latin typeface="Arial"/>
+              </a:rPr>
+              <a:t>all null</a:t>
+            </a:r>
+            <a:r>
+              <a:rPr sz="1700" b="0" i="0">
+                <a:solidFill>
+                  <a:srgbClr val="2A2A2A"/>
+                </a:solidFill>
+                <a:latin typeface="Arial"/>
+              </a:rPr>
+              <a:t> — farm-gate price, MCC buy/sell price, quality bonuses (MCC &amp; farmer).</a:t>
+            </a:r>
+          </a:p>
+          <a:p>
+            <a:pPr algn="l">
+              <a:spcAft>
+                <a:spcPts val="0"/>
+              </a:spcAft>
+              <a:buNone/>
+            </a:pPr>
+            <a:r>
+              <a:rPr sz="1800" b="1" i="0">
+                <a:solidFill>
+                  <a:srgbClr val="44546A"/>
+                </a:solidFill>
+                <a:latin typeface="Arial"/>
+              </a:rPr>
+              <a:t>Quality rises, but no one is paid for it. </a:t>
+            </a:r>
+            <a:r>
+              <a:rPr sz="1800" b="1" i="0">
+                <a:solidFill>
+                  <a:srgbClr val="8850A0"/>
+                </a:solidFill>
+                <a:latin typeface="Arial"/>
+              </a:rPr>
+              <a:t>Enforcement without a price.</a:t>
+            </a:r>
+          </a:p>
+        </p:txBody>
+      </p:sp>
+    </p:spTree>
+  </p:cSld>
+  <p:clrMapOvr>
+    <a:masterClrMapping/>
+  </p:clrMapOvr>
+</p:sld>
+</file>
+
+<file path=ppt/slides/slide14.xml><?xml version="1.0" encoding="utf-8"?>
+<p:sld xmlns:a="http://schemas.openxmlformats.org/drawingml/2006/main" xmlns:p="http://schemas.openxmlformats.org/presentationml/2006/main" xmlns:r="http://schemas.openxmlformats.org/officeDocument/2006/relationships">
+  <p:cSld>
+    <p:spTree>
+      <p:nvGrpSpPr>
+        <p:cNvPr id="1" name=""/>
+        <p:cNvGrpSpPr/>
+        <p:nvPr/>
+      </p:nvGrpSpPr>
+      <p:grpSpPr/>
+      <p:sp>
+        <p:nvSpPr>
+          <p:cNvPr id="2" name="Title 1"/>
+          <p:cNvSpPr>
+            <a:spLocks noGrp="1"/>
+          </p:cNvSpPr>
+          <p:nvPr>
+            <p:ph type="title"/>
+          </p:nvPr>
+        </p:nvSpPr>
+        <p:spPr/>
+        <p:txBody>
+          <a:bodyPr/>
+          <a:lstStyle/>
+          <a:p>
+            <a:r>
+              <a:rPr sz="3000" b="1">
+                <a:solidFill>
+                  <a:srgbClr val="44546A"/>
+                </a:solidFill>
+                <a:latin typeface="Arial"/>
+              </a:rPr>
+              <a:t>A model: two channels for quality infrastructure</a:t>
+            </a:r>
+          </a:p>
+        </p:txBody>
+      </p:sp>
+      <p:sp>
+        <p:nvSpPr>
+          <p:cNvPr id="3" name="TextBox 2"/>
+          <p:cNvSpPr txBox="1"/>
+          <p:nvPr/>
+        </p:nvSpPr>
+        <p:spPr>
+          <a:xfrm>
+            <a:off x="640080" y="1417320"/>
+            <a:ext cx="10972800" cy="731520"/>
+          </a:xfrm>
+          <a:prstGeom prst="rect">
+            <a:avLst/>
+          </a:prstGeom>
+          <a:noFill/>
+        </p:spPr>
+        <p:txBody>
+          <a:bodyPr wrap="square" anchor="t">
+            <a:spAutoFit/>
+          </a:bodyPr>
+          <a:lstStyle/>
+          <a:p>
+            <a:pPr algn="l">
+              <a:spcAft>
+                <a:spcPts val="0"/>
+              </a:spcAft>
+              <a:buNone/>
+            </a:pPr>
+            <a:r>
+              <a:rPr sz="1800" b="0" i="0">
+                <a:solidFill>
+                  <a:srgbClr val="44546A"/>
+                </a:solidFill>
+                <a:latin typeface="Arial"/>
+              </a:rPr>
+              <a:t>MCC sees a noisy signal </a:t>
+            </a:r>
+            <a:r>
+              <a:rPr sz="1800" b="1" i="0">
+                <a:solidFill>
+                  <a:srgbClr val="007DB3"/>
+                </a:solidFill>
+                <a:latin typeface="Arial"/>
+              </a:rPr>
+              <a:t>sᵢ = qᵢ + ηᵢ,  ηᵢ ~ N(0, σ²)</a:t>
+            </a:r>
+            <a:r>
+              <a:rPr sz="1800" b="0" i="0">
+                <a:solidFill>
+                  <a:srgbClr val="44546A"/>
+                </a:solidFill>
+                <a:latin typeface="Arial"/>
+              </a:rPr>
+              <a:t>;  accepts if sᵢ ≥ q_min.  The analyzer drives σ² → 0.</a:t>
+            </a:r>
+          </a:p>
+        </p:txBody>
+      </p:sp>
+      <p:sp>
+        <p:nvSpPr>
+          <p:cNvPr id="4" name="Rounded Rectangle 3"/>
+          <p:cNvSpPr/>
+          <p:nvPr/>
+        </p:nvSpPr>
+        <p:spPr>
+          <a:xfrm>
+            <a:off x="640080" y="2377440"/>
+            <a:ext cx="5303520" cy="3566160"/>
+          </a:xfrm>
+          <a:prstGeom prst="roundRect">
+            <a:avLst/>
+          </a:prstGeom>
+          <a:solidFill>
+            <a:srgbClr val="ECF5E9"/>
+          </a:solidFill>
+          <a:ln w="12700">
+            <a:solidFill>
+              <a:srgbClr val="62BA45"/>
+            </a:solidFill>
+          </a:ln>
+          <a:effectLst/>
+        </p:spPr>
+        <p:style>
+          <a:lnRef idx="1">
+            <a:schemeClr val="accent1"/>
+          </a:lnRef>
+          <a:fillRef idx="3">
+            <a:schemeClr val="accent1"/>
+          </a:fillRef>
+          <a:effectRef idx="2">
+            <a:schemeClr val="accent1"/>
+          </a:effectRef>
+          <a:fontRef idx="minor">
+            <a:schemeClr val="lt1"/>
+          </a:fontRef>
+        </p:style>
+        <p:txBody>
+          <a:bodyPr rtlCol="0" anchor="ctr" wrap="square" lIns="203200" rIns="203200" tIns="152400"/>
+          <a:lstStyle/>
+          <a:p>
+            <a:pPr algn="l">
+              <a:spcAft>
+                <a:spcPts val="800"/>
+              </a:spcAft>
+              <a:buNone/>
+            </a:pPr>
+            <a:r>
+              <a:rPr sz="1900" b="1" i="0">
+                <a:solidFill>
+                  <a:srgbClr val="62BA45"/>
+                </a:solidFill>
+                <a:latin typeface="Arial"/>
+              </a:rPr>
+              <a:t>Enforcement channel</a:t>
+            </a:r>
+          </a:p>
+          <a:p>
+            <a:pPr algn="l" marL="274320" indent="-274320">
+              <a:spcAft>
+                <a:spcPts val="800"/>
+              </a:spcAft>
+              <a:buFont typeface="Arial"/>
+              <a:buChar char="•"/>
+            </a:pPr>
+            <a:r>
+              <a:rPr sz="1500" b="0" i="0">
+                <a:solidFill>
+                  <a:srgbClr val="2A2A2A"/>
+                </a:solidFill>
+                <a:latin typeface="Arial"/>
+              </a:rPr>
+              <a:t>Lower σ² makes the rejection threshold </a:t>
+            </a:r>
+            <a:r>
+              <a:rPr sz="1500" b="1" i="0">
+                <a:solidFill>
+                  <a:srgbClr val="62BA45"/>
+                </a:solidFill>
+                <a:latin typeface="Arial"/>
+              </a:rPr>
+              <a:t>credibly bind</a:t>
+            </a:r>
+            <a:r>
+              <a:rPr sz="1500" b="0" i="0">
+                <a:solidFill>
+                  <a:srgbClr val="2A2A2A"/>
+                </a:solidFill>
+                <a:latin typeface="Arial"/>
+              </a:rPr>
+              <a:t>.</a:t>
+            </a:r>
+          </a:p>
+          <a:p>
+            <a:pPr algn="l" marL="274320" indent="-274320">
+              <a:spcAft>
+                <a:spcPts val="800"/>
+              </a:spcAft>
+              <a:buFont typeface="Arial"/>
+              <a:buChar char="•"/>
+            </a:pPr>
+            <a:r>
+              <a:rPr sz="1500" b="0" i="0">
+                <a:solidFill>
+                  <a:srgbClr val="2A2A2A"/>
+                </a:solidFill>
+                <a:latin typeface="Arial"/>
+              </a:rPr>
+              <a:t>Farmers near q_min raise effort to </a:t>
+            </a:r>
+            <a:r>
+              <a:rPr sz="1500" b="1" i="0">
+                <a:solidFill>
+                  <a:srgbClr val="2A2A2A"/>
+                </a:solidFill>
+                <a:latin typeface="Arial"/>
+              </a:rPr>
+              <a:t>avoid rejection</a:t>
+            </a:r>
+            <a:r>
+              <a:rPr sz="1500" b="0" i="0">
+                <a:solidFill>
+                  <a:srgbClr val="2A2A2A"/>
+                </a:solidFill>
+                <a:latin typeface="Arial"/>
+              </a:rPr>
+              <a:t> — the extensive margin.</a:t>
+            </a:r>
+          </a:p>
+          <a:p>
+            <a:pPr algn="l" marL="274320" indent="-274320">
+              <a:spcAft>
+                <a:spcPts val="800"/>
+              </a:spcAft>
+              <a:buFont typeface="Arial"/>
+              <a:buChar char="•"/>
+            </a:pPr>
+            <a:r>
+              <a:rPr sz="1500" b="0" i="0">
+                <a:solidFill>
+                  <a:srgbClr val="2A2A2A"/>
+                </a:solidFill>
+                <a:latin typeface="Arial"/>
+              </a:rPr>
+              <a:t>Works even if the price premium α = 0.</a:t>
+            </a:r>
+          </a:p>
+          <a:p>
+            <a:pPr algn="l">
+              <a:spcAft>
+                <a:spcPts val="0"/>
+              </a:spcAft>
+              <a:buNone/>
+            </a:pPr>
+            <a:r>
+              <a:rPr sz="1500" b="1" i="0">
+                <a:solidFill>
+                  <a:srgbClr val="62BA45"/>
+                </a:solidFill>
+                <a:latin typeface="Arial"/>
+              </a:rPr>
+              <a:t>Signature: quality ↑ (esp. lower tail), prices flat.</a:t>
+            </a:r>
+          </a:p>
+        </p:txBody>
+      </p:sp>
+      <p:sp>
+        <p:nvSpPr>
+          <p:cNvPr id="5" name="Rounded Rectangle 4"/>
+          <p:cNvSpPr/>
+          <p:nvPr/>
+        </p:nvSpPr>
+        <p:spPr>
+          <a:xfrm>
+            <a:off x="6217920" y="2377440"/>
+            <a:ext cx="5303520" cy="3566160"/>
+          </a:xfrm>
+          <a:prstGeom prst="roundRect">
+            <a:avLst/>
+          </a:prstGeom>
+          <a:solidFill>
+            <a:srgbClr val="FDF0E4"/>
+          </a:solidFill>
+          <a:ln w="12700">
+            <a:solidFill>
+              <a:srgbClr val="F7921E"/>
+            </a:solidFill>
+          </a:ln>
+          <a:effectLst/>
+        </p:spPr>
+        <p:style>
+          <a:lnRef idx="1">
+            <a:schemeClr val="accent1"/>
+          </a:lnRef>
+          <a:fillRef idx="3">
+            <a:schemeClr val="accent1"/>
+          </a:fillRef>
+          <a:effectRef idx="2">
+            <a:schemeClr val="accent1"/>
+          </a:effectRef>
+          <a:fontRef idx="minor">
+            <a:schemeClr val="lt1"/>
+          </a:fontRef>
+        </p:style>
+        <p:txBody>
+          <a:bodyPr rtlCol="0" anchor="ctr" wrap="square" lIns="203200" rIns="203200" tIns="152400"/>
+          <a:lstStyle/>
+          <a:p>
+            <a:pPr algn="l">
+              <a:spcAft>
+                <a:spcPts val="800"/>
+              </a:spcAft>
+              <a:buNone/>
+            </a:pPr>
+            <a:r>
+              <a:rPr sz="1900" b="1" i="0">
+                <a:solidFill>
+                  <a:srgbClr val="F7921E"/>
+                </a:solidFill>
+                <a:latin typeface="Arial"/>
+              </a:rPr>
+              <a:t>Price channel</a:t>
+            </a:r>
+          </a:p>
+          <a:p>
+            <a:pPr algn="l" marL="274320" indent="-274320">
+              <a:spcAft>
+                <a:spcPts val="800"/>
+              </a:spcAft>
+              <a:buFont typeface="Arial"/>
+              <a:buChar char="•"/>
+            </a:pPr>
+            <a:r>
+              <a:rPr sz="1500" b="0" i="0">
+                <a:solidFill>
+                  <a:srgbClr val="2A2A2A"/>
+                </a:solidFill>
+                <a:latin typeface="Arial"/>
+              </a:rPr>
+              <a:t>Requires a per-unit quality premium </a:t>
+            </a:r>
+            <a:r>
+              <a:rPr sz="1500" b="1" i="0">
+                <a:solidFill>
+                  <a:srgbClr val="F7921E"/>
+                </a:solidFill>
+                <a:latin typeface="Arial"/>
+              </a:rPr>
+              <a:t>α &gt; 0</a:t>
+            </a:r>
+            <a:r>
+              <a:rPr sz="1500" b="0" i="0">
+                <a:solidFill>
+                  <a:srgbClr val="2A2A2A"/>
+                </a:solidFill>
+                <a:latin typeface="Arial"/>
+              </a:rPr>
+              <a:t> paid up the chain.</a:t>
+            </a:r>
+          </a:p>
+          <a:p>
+            <a:pPr algn="l" marL="274320" indent="-274320">
+              <a:spcAft>
+                <a:spcPts val="800"/>
+              </a:spcAft>
+              <a:buFont typeface="Arial"/>
+              <a:buChar char="•"/>
+            </a:pPr>
+            <a:r>
+              <a:rPr sz="1500" b="0" i="0">
+                <a:solidFill>
+                  <a:srgbClr val="2A2A2A"/>
+                </a:solidFill>
+                <a:latin typeface="Arial"/>
+              </a:rPr>
+              <a:t>And pass-through </a:t>
+            </a:r>
+            <a:r>
+              <a:rPr sz="1500" b="1" i="0">
+                <a:solidFill>
+                  <a:srgbClr val="F7921E"/>
+                </a:solidFill>
+                <a:latin typeface="Arial"/>
+              </a:rPr>
+              <a:t>λᵢ &gt; 0</a:t>
+            </a:r>
+            <a:r>
+              <a:rPr sz="1500" b="0" i="0">
+                <a:solidFill>
+                  <a:srgbClr val="2A2A2A"/>
+                </a:solidFill>
+                <a:latin typeface="Arial"/>
+              </a:rPr>
+              <a:t> so it reaches farmers.</a:t>
+            </a:r>
+          </a:p>
+          <a:p>
+            <a:pPr algn="l" marL="274320" indent="-274320">
+              <a:spcAft>
+                <a:spcPts val="800"/>
+              </a:spcAft>
+              <a:buFont typeface="Arial"/>
+              <a:buChar char="•"/>
+            </a:pPr>
+            <a:r>
+              <a:rPr sz="1500" b="0" i="0">
+                <a:solidFill>
+                  <a:srgbClr val="2A2A2A"/>
+                </a:solidFill>
+                <a:latin typeface="Arial"/>
+              </a:rPr>
+              <a:t>Rewards quality along the </a:t>
+            </a:r>
+            <a:r>
+              <a:rPr sz="1500" b="1" i="0">
+                <a:solidFill>
+                  <a:srgbClr val="2A2A2A"/>
+                </a:solidFill>
+                <a:latin typeface="Arial"/>
+              </a:rPr>
+              <a:t>continuous gradient</a:t>
+            </a:r>
+            <a:r>
+              <a:rPr sz="1500" b="0" i="0">
+                <a:solidFill>
+                  <a:srgbClr val="2A2A2A"/>
+                </a:solidFill>
+                <a:latin typeface="Arial"/>
+              </a:rPr>
+              <a:t>.</a:t>
+            </a:r>
+          </a:p>
+          <a:p>
+            <a:pPr algn="l">
+              <a:spcAft>
+                <a:spcPts val="0"/>
+              </a:spcAft>
+              <a:buNone/>
+            </a:pPr>
+            <a:r>
+              <a:rPr sz="1500" b="1" i="0">
+                <a:solidFill>
+                  <a:srgbClr val="2A2A2A"/>
+                </a:solidFill>
+                <a:latin typeface="Arial"/>
+              </a:rPr>
+              <a:t>Exp 1: measurement alone did </a:t>
+            </a:r>
+            <a:r>
+              <a:rPr sz="1500" b="1" i="0">
+                <a:solidFill>
+                  <a:srgbClr val="EF463B"/>
+                </a:solidFill>
+                <a:latin typeface="Arial"/>
+              </a:rPr>
+              <a:t>not</a:t>
+            </a:r>
+            <a:r>
+              <a:rPr sz="1500" b="1" i="0">
+                <a:solidFill>
+                  <a:srgbClr val="2A2A2A"/>
+                </a:solidFill>
+                <a:latin typeface="Arial"/>
+              </a:rPr>
+              <a:t> activate α.</a:t>
+            </a:r>
+          </a:p>
+        </p:txBody>
+      </p:sp>
+    </p:spTree>
+  </p:cSld>
+  <p:clrMapOvr>
+    <a:masterClrMapping/>
+  </p:clrMapOvr>
+</p:sld>
+</file>
+
+<file path=ppt/slides/slide15.xml><?xml version="1.0" encoding="utf-8"?>
+<p:sld xmlns:a="http://schemas.openxmlformats.org/drawingml/2006/main" xmlns:p="http://schemas.openxmlformats.org/presentationml/2006/main" xmlns:r="http://schemas.openxmlformats.org/officeDocument/2006/relationships">
+  <p:cSld>
+    <p:spTree>
+      <p:nvGrpSpPr>
+        <p:cNvPr id="1" name=""/>
+        <p:cNvGrpSpPr/>
+        <p:nvPr/>
+      </p:nvGrpSpPr>
+      <p:grpSpPr/>
+      <p:sp>
+        <p:nvSpPr>
+          <p:cNvPr id="2" name="Title 1"/>
+          <p:cNvSpPr>
+            <a:spLocks noGrp="1"/>
+          </p:cNvSpPr>
+          <p:nvPr>
+            <p:ph type="title"/>
+          </p:nvPr>
+        </p:nvSpPr>
+        <p:spPr/>
+        <p:txBody>
+          <a:bodyPr/>
+          <a:lstStyle/>
+          <a:p>
+            <a:r>
+              <a:rPr sz="3000" b="1">
+                <a:solidFill>
+                  <a:srgbClr val="44546A"/>
+                </a:solidFill>
+                <a:latin typeface="Arial"/>
+              </a:rPr>
+              <a:t>Making the floor bite: the enforcement signature</a:t>
+            </a:r>
+          </a:p>
+        </p:txBody>
+      </p:sp>
+      <p:pic>
+        <p:nvPicPr>
+          <p:cNvPr id="3" name="Picture 2" descr="fig_cdf_added_water.png"/>
+          <p:cNvPicPr>
+            <a:picLocks noChangeAspect="1"/>
+          </p:cNvPicPr>
+          <p:nvPr/>
+        </p:nvPicPr>
+        <p:blipFill>
+          <a:blip r:embed="rId2"/>
+          <a:stretch>
+            <a:fillRect/>
+          </a:stretch>
+        </p:blipFill>
+        <p:spPr>
+          <a:xfrm>
+            <a:off x="6126480" y="1554480"/>
+            <a:ext cx="5669280" cy="3401568"/>
+          </a:xfrm>
+          <a:prstGeom prst="rect">
+            <a:avLst/>
+          </a:prstGeom>
+        </p:spPr>
+      </p:pic>
+      <p:sp>
+        <p:nvSpPr>
+          <p:cNvPr id="4" name="TextBox 3"/>
+          <p:cNvSpPr txBox="1"/>
+          <p:nvPr/>
+        </p:nvSpPr>
+        <p:spPr>
+          <a:xfrm>
+            <a:off x="548640" y="1645920"/>
+            <a:ext cx="5394960" cy="4572000"/>
+          </a:xfrm>
+          <a:prstGeom prst="rect">
+            <a:avLst/>
+          </a:prstGeom>
+          <a:noFill/>
+        </p:spPr>
+        <p:txBody>
+          <a:bodyPr wrap="square" anchor="t">
+            <a:spAutoFit/>
+          </a:bodyPr>
+          <a:lstStyle/>
+          <a:p>
+            <a:pPr algn="l">
+              <a:spcAft>
+                <a:spcPts val="1400"/>
+              </a:spcAft>
+              <a:buNone/>
+            </a:pPr>
+            <a:r>
+              <a:rPr sz="1800" b="1" i="0">
+                <a:solidFill>
+                  <a:srgbClr val="44546A"/>
+                </a:solidFill>
+                <a:latin typeface="Arial"/>
+              </a:rPr>
+              <a:t>Prediction: </a:t>
+            </a:r>
+            <a:r>
+              <a:rPr sz="1800" b="1" i="0">
+                <a:solidFill>
+                  <a:srgbClr val="62BA45"/>
+                </a:solidFill>
+                <a:latin typeface="Arial"/>
+              </a:rPr>
+              <a:t>a credible floor disciplines the lower tail</a:t>
+            </a:r>
+            <a:r>
+              <a:rPr sz="1800" b="1" i="0">
+                <a:solidFill>
+                  <a:srgbClr val="44546A"/>
+                </a:solidFill>
+                <a:latin typeface="Arial"/>
+              </a:rPr>
+              <a:t>, leaving clean suppliers unchanged.</a:t>
+            </a:r>
+          </a:p>
+          <a:p>
+            <a:pPr algn="l" marL="274320" indent="-274320">
+              <a:spcAft>
+                <a:spcPts val="1000"/>
+              </a:spcAft>
+              <a:buFont typeface="Arial"/>
+              <a:buChar char="•"/>
+            </a:pPr>
+            <a:r>
+              <a:rPr sz="1600" b="0" i="0">
+                <a:solidFill>
+                  <a:srgbClr val="2A2A2A"/>
+                </a:solidFill>
+                <a:latin typeface="Arial"/>
+              </a:rPr>
+              <a:t>Treatment CDF of added water lies </a:t>
+            </a:r>
+            <a:r>
+              <a:rPr sz="1600" b="1" i="0">
+                <a:solidFill>
+                  <a:srgbClr val="62BA45"/>
+                </a:solidFill>
+                <a:latin typeface="Arial"/>
+              </a:rPr>
+              <a:t>above</a:t>
+            </a:r>
+            <a:r>
+              <a:rPr sz="1600" b="0" i="0">
+                <a:solidFill>
+                  <a:srgbClr val="2A2A2A"/>
+                </a:solidFill>
+                <a:latin typeface="Arial"/>
+              </a:rPr>
+              <a:t> control — first-order stochastic dominance.</a:t>
+            </a:r>
+          </a:p>
+          <a:p>
+            <a:pPr algn="l" marL="274320" indent="-274320">
+              <a:spcAft>
+                <a:spcPts val="1000"/>
+              </a:spcAft>
+              <a:buFont typeface="Arial"/>
+              <a:buChar char="•"/>
+            </a:pPr>
+            <a:r>
+              <a:rPr sz="1600" b="0" i="0">
+                <a:solidFill>
+                  <a:srgbClr val="2A2A2A"/>
+                </a:solidFill>
+                <a:latin typeface="Arial"/>
+              </a:rPr>
+              <a:t>Serious adulteration (&gt;5% water): </a:t>
+            </a:r>
+            <a:r>
+              <a:rPr sz="1600" b="1" i="0">
+                <a:solidFill>
+                  <a:srgbClr val="EF463B"/>
+                </a:solidFill>
+                <a:latin typeface="Arial"/>
+              </a:rPr>
+              <a:t>11% → 5%</a:t>
+            </a:r>
+            <a:r>
+              <a:rPr sz="1600" b="0" i="0">
+                <a:solidFill>
+                  <a:srgbClr val="2A2A2A"/>
+                </a:solidFill>
+                <a:latin typeface="Arial"/>
+              </a:rPr>
+              <a:t>, roughly halved.</a:t>
+            </a:r>
+          </a:p>
+          <a:p>
+            <a:pPr algn="l" marL="274320" indent="-274320">
+              <a:spcAft>
+                <a:spcPts val="1000"/>
+              </a:spcAft>
+              <a:buFont typeface="Arial"/>
+              <a:buChar char="•"/>
+            </a:pPr>
+            <a:r>
+              <a:rPr sz="1600" b="0" i="0">
+                <a:solidFill>
+                  <a:srgbClr val="2A2A2A"/>
+                </a:solidFill>
+                <a:latin typeface="Arial"/>
+              </a:rPr>
+              <a:t>Median delivery: </a:t>
+            </a:r>
+            <a:r>
+              <a:rPr sz="1600" b="1" i="0">
+                <a:solidFill>
+                  <a:srgbClr val="6E6E6E"/>
+                </a:solidFill>
+                <a:latin typeface="Arial"/>
+              </a:rPr>
+              <a:t>unchanged</a:t>
+            </a:r>
+            <a:r>
+              <a:rPr sz="1600" b="0" i="0">
+                <a:solidFill>
+                  <a:srgbClr val="2A2A2A"/>
+                </a:solidFill>
+                <a:latin typeface="Arial"/>
+              </a:rPr>
+              <a:t> — already clean.</a:t>
+            </a:r>
+          </a:p>
+          <a:p>
+            <a:pPr algn="l">
+              <a:spcAft>
+                <a:spcPts val="0"/>
+              </a:spcAft>
+              <a:buNone/>
+            </a:pPr>
+            <a:r>
+              <a:rPr sz="1600" b="1" i="0">
+                <a:solidFill>
+                  <a:srgbClr val="44546A"/>
+                </a:solidFill>
+                <a:latin typeface="Arial"/>
+              </a:rPr>
+              <a:t>The threat of rejection, once toothless under noise, becomes real. </a:t>
+            </a:r>
+            <a:r>
+              <a:rPr sz="1600" b="1" i="0">
+                <a:solidFill>
+                  <a:srgbClr val="62BA45"/>
+                </a:solidFill>
+                <a:latin typeface="Arial"/>
+              </a:rPr>
+              <a:t>The floor bites the worst adulterators.</a:t>
+            </a:r>
+          </a:p>
+        </p:txBody>
+      </p:sp>
+    </p:spTree>
+  </p:cSld>
+  <p:clrMapOvr>
+    <a:masterClrMapping/>
+  </p:clrMapOvr>
+</p:sld>
+</file>
+
+<file path=ppt/slides/slide16.xml><?xml version="1.0" encoding="utf-8"?>
+<p:sld xmlns:a="http://schemas.openxmlformats.org/drawingml/2006/main" xmlns:p="http://schemas.openxmlformats.org/presentationml/2006/main" xmlns:r="http://schemas.openxmlformats.org/officeDocument/2006/relationships">
+  <p:cSld>
+    <p:spTree>
+      <p:nvGrpSpPr>
+        <p:cNvPr id="1" name=""/>
+        <p:cNvGrpSpPr/>
+        <p:nvPr/>
+      </p:nvGrpSpPr>
+      <p:grpSpPr/>
+      <p:sp>
+        <p:nvSpPr>
+          <p:cNvPr id="2" name="Title 1"/>
+          <p:cNvSpPr>
+            <a:spLocks noGrp="1"/>
+          </p:cNvSpPr>
+          <p:nvPr>
+            <p:ph type="title"/>
+          </p:nvPr>
+        </p:nvSpPr>
+        <p:spPr/>
+        <p:txBody>
+          <a:bodyPr/>
+          <a:lstStyle/>
+          <a:p>
+            <a:r>
+              <a:rPr sz="3000" b="1">
+                <a:solidFill>
+                  <a:srgbClr val="44546A"/>
+                </a:solidFill>
+                <a:latin typeface="Arial"/>
+              </a:rPr>
+              <a:t>What the model says is missing</a:t>
+            </a:r>
+          </a:p>
+        </p:txBody>
+      </p:sp>
+      <p:sp>
+        <p:nvSpPr>
+          <p:cNvPr id="3" name="TextBox 2"/>
+          <p:cNvSpPr txBox="1"/>
+          <p:nvPr/>
+        </p:nvSpPr>
+        <p:spPr>
+          <a:xfrm>
+            <a:off x="640080" y="1645920"/>
+            <a:ext cx="10972800" cy="1463040"/>
+          </a:xfrm>
+          <a:prstGeom prst="rect">
+            <a:avLst/>
+          </a:prstGeom>
+          <a:noFill/>
+        </p:spPr>
+        <p:txBody>
+          <a:bodyPr wrap="square" anchor="t">
+            <a:spAutoFit/>
+          </a:bodyPr>
+          <a:lstStyle/>
+          <a:p>
+            <a:pPr algn="l">
+              <a:spcAft>
+                <a:spcPts val="0"/>
+              </a:spcAft>
+              <a:buNone/>
+            </a:pPr>
+            <a:r>
+              <a:rPr sz="2100" b="0" i="0">
+                <a:solidFill>
+                  <a:srgbClr val="44546A"/>
+                </a:solidFill>
+                <a:latin typeface="Arial"/>
+              </a:rPr>
+              <a:t>Enforcement fixed the </a:t>
+            </a:r>
+            <a:r>
+              <a:rPr sz="2100" b="1" i="0">
+                <a:solidFill>
+                  <a:srgbClr val="62BA45"/>
+                </a:solidFill>
+                <a:latin typeface="Arial"/>
+              </a:rPr>
+              <a:t>floor</a:t>
+            </a:r>
+            <a:r>
+              <a:rPr sz="2100" b="0" i="0">
+                <a:solidFill>
+                  <a:srgbClr val="44546A"/>
+                </a:solidFill>
+                <a:latin typeface="Arial"/>
+              </a:rPr>
+              <a:t>. To reward quality along the </a:t>
+            </a:r>
+            <a:r>
+              <a:rPr sz="2100" b="1" i="0">
+                <a:solidFill>
+                  <a:srgbClr val="F7921E"/>
+                </a:solidFill>
+                <a:latin typeface="Arial"/>
+              </a:rPr>
+              <a:t>gradient</a:t>
+            </a:r>
+            <a:r>
+              <a:rPr sz="2100" b="0" i="0">
+                <a:solidFill>
+                  <a:srgbClr val="44546A"/>
+                </a:solidFill>
+                <a:latin typeface="Arial"/>
+              </a:rPr>
+              <a:t>, someone must pay a premium — and pass it up.</a:t>
+            </a:r>
+          </a:p>
+        </p:txBody>
+      </p:sp>
+      <p:sp>
+        <p:nvSpPr>
+          <p:cNvPr id="4" name="Rounded Rectangle 3"/>
+          <p:cNvSpPr/>
+          <p:nvPr/>
+        </p:nvSpPr>
+        <p:spPr>
+          <a:xfrm>
+            <a:off x="640080" y="3108960"/>
+            <a:ext cx="3383280" cy="2194560"/>
+          </a:xfrm>
+          <a:prstGeom prst="roundRect">
+            <a:avLst/>
+          </a:prstGeom>
+          <a:solidFill>
+            <a:srgbClr val="F3F6F2"/>
+          </a:solidFill>
+          <a:ln w="12700">
+            <a:solidFill>
+              <a:srgbClr val="6E6E6E"/>
+            </a:solidFill>
+          </a:ln>
+          <a:effectLst/>
+        </p:spPr>
+        <p:style>
+          <a:lnRef idx="1">
+            <a:schemeClr val="accent1"/>
+          </a:lnRef>
+          <a:fillRef idx="3">
+            <a:schemeClr val="accent1"/>
+          </a:fillRef>
+          <a:effectRef idx="2">
+            <a:schemeClr val="accent1"/>
+          </a:effectRef>
+          <a:fontRef idx="minor">
+            <a:schemeClr val="lt1"/>
+          </a:fontRef>
+        </p:style>
+        <p:txBody>
+          <a:bodyPr rtlCol="0" anchor="ctr" wrap="square" lIns="152400" rIns="152400"/>
+          <a:lstStyle/>
+          <a:p>
+            <a:pPr algn="ctr">
+              <a:spcAft>
+                <a:spcPts val="600"/>
+              </a:spcAft>
+              <a:buNone/>
+            </a:pPr>
+            <a:r>
+              <a:rPr sz="1600" b="1" i="0">
+                <a:solidFill>
+                  <a:srgbClr val="44546A"/>
+                </a:solidFill>
+                <a:latin typeface="Arial"/>
+              </a:rPr>
+              <a:t>Can’t move α at the processor</a:t>
+            </a:r>
+          </a:p>
+          <a:p>
+            <a:pPr algn="ctr">
+              <a:spcAft>
+                <a:spcPts val="0"/>
+              </a:spcAft>
+              <a:buNone/>
+            </a:pPr>
+            <a:r>
+              <a:rPr sz="1300" b="0" i="0">
+                <a:solidFill>
+                  <a:srgbClr val="6E6E6E"/>
+                </a:solidFill>
+                <a:latin typeface="Arial"/>
+              </a:rPr>
+              <a:t>would need to change how processors price — outside the project’s reach</a:t>
+            </a:r>
+          </a:p>
+        </p:txBody>
+      </p:sp>
+      <p:sp>
+        <p:nvSpPr>
+          <p:cNvPr id="5" name="Rounded Rectangle 4"/>
+          <p:cNvSpPr/>
+          <p:nvPr/>
+        </p:nvSpPr>
+        <p:spPr>
+          <a:xfrm>
+            <a:off x="4389120" y="3108960"/>
+            <a:ext cx="3383280" cy="2194560"/>
+          </a:xfrm>
+          <a:prstGeom prst="roundRect">
+            <a:avLst/>
+          </a:prstGeom>
+          <a:solidFill>
+            <a:srgbClr val="FDF0E4"/>
+          </a:solidFill>
+          <a:ln w="12700">
+            <a:solidFill>
+              <a:srgbClr val="F7921E"/>
+            </a:solidFill>
+          </a:ln>
+          <a:effectLst/>
+        </p:spPr>
+        <p:style>
+          <a:lnRef idx="1">
+            <a:schemeClr val="accent1"/>
+          </a:lnRef>
+          <a:fillRef idx="3">
+            <a:schemeClr val="accent1"/>
+          </a:fillRef>
+          <a:effectRef idx="2">
+            <a:schemeClr val="accent1"/>
+          </a:effectRef>
+          <a:fontRef idx="minor">
+            <a:schemeClr val="lt1"/>
+          </a:fontRef>
+        </p:style>
+        <p:txBody>
+          <a:bodyPr rtlCol="0" anchor="ctr" wrap="square" lIns="152400" rIns="152400"/>
+          <a:lstStyle/>
+          <a:p>
+            <a:pPr algn="ctr">
+              <a:spcAft>
+                <a:spcPts val="600"/>
+              </a:spcAft>
+              <a:buNone/>
+            </a:pPr>
+            <a:r>
+              <a:rPr sz="1600" b="1" i="0">
+                <a:solidFill>
+                  <a:srgbClr val="F7921E"/>
+                </a:solidFill>
+                <a:latin typeface="Arial"/>
+              </a:rPr>
+              <a:t>So inject λα &gt; 0 one node down</a:t>
+            </a:r>
+          </a:p>
+          <a:p>
+            <a:pPr algn="ctr">
+              <a:spcAft>
+                <a:spcPts val="0"/>
+              </a:spcAft>
+              <a:buNone/>
+            </a:pPr>
+            <a:r>
+              <a:rPr sz="1300" b="0" i="0">
+                <a:solidFill>
+                  <a:srgbClr val="2A2A2A"/>
+                </a:solidFill>
+                <a:latin typeface="Arial"/>
+              </a:rPr>
+              <a:t>pay traders directly for verified quality at the trader–MCC interface</a:t>
+            </a:r>
+          </a:p>
+        </p:txBody>
+      </p:sp>
+      <p:sp>
+        <p:nvSpPr>
+          <p:cNvPr id="6" name="Rounded Rectangle 5"/>
+          <p:cNvSpPr/>
+          <p:nvPr/>
+        </p:nvSpPr>
+        <p:spPr>
+          <a:xfrm>
+            <a:off x="8138160" y="3108960"/>
+            <a:ext cx="3383280" cy="2194560"/>
+          </a:xfrm>
+          <a:prstGeom prst="roundRect">
+            <a:avLst/>
+          </a:prstGeom>
+          <a:solidFill>
+            <a:srgbClr val="ECF2F8"/>
+          </a:solidFill>
+          <a:ln w="12700">
+            <a:solidFill>
+              <a:srgbClr val="007DB3"/>
+            </a:solidFill>
+          </a:ln>
+          <a:effectLst/>
+        </p:spPr>
+        <p:style>
+          <a:lnRef idx="1">
+            <a:schemeClr val="accent1"/>
+          </a:lnRef>
+          <a:fillRef idx="3">
+            <a:schemeClr val="accent1"/>
+          </a:fillRef>
+          <a:effectRef idx="2">
+            <a:schemeClr val="accent1"/>
+          </a:effectRef>
+          <a:fontRef idx="minor">
+            <a:schemeClr val="lt1"/>
+          </a:fontRef>
+        </p:style>
+        <p:txBody>
+          <a:bodyPr rtlCol="0" anchor="ctr" wrap="square" lIns="152400" rIns="152400"/>
+          <a:lstStyle/>
+          <a:p>
+            <a:pPr algn="ctr">
+              <a:spcAft>
+                <a:spcPts val="600"/>
+              </a:spcAft>
+              <a:buNone/>
+            </a:pPr>
+            <a:r>
+              <a:rPr sz="1600" b="1" i="0">
+                <a:solidFill>
+                  <a:srgbClr val="007DB3"/>
+                </a:solidFill>
+                <a:latin typeface="Arial"/>
+              </a:rPr>
+              <a:t>Test: is it passed to farmers?</a:t>
+            </a:r>
+          </a:p>
+          <a:p>
+            <a:pPr algn="ctr">
+              <a:spcAft>
+                <a:spcPts val="0"/>
+              </a:spcAft>
+              <a:buNone/>
+            </a:pPr>
+            <a:r>
+              <a:rPr sz="1300" b="0" i="0">
+                <a:solidFill>
+                  <a:srgbClr val="2A2A2A"/>
+                </a:solidFill>
+                <a:latin typeface="Arial"/>
+              </a:rPr>
+              <a:t>observe whether traders share the bonus upstream — the pass-through margin</a:t>
+            </a:r>
+          </a:p>
+        </p:txBody>
+      </p:sp>
+      <p:sp>
+        <p:nvSpPr>
+          <p:cNvPr id="7" name="TextBox 6"/>
+          <p:cNvSpPr txBox="1"/>
+          <p:nvPr/>
+        </p:nvSpPr>
+        <p:spPr>
+          <a:xfrm>
+            <a:off x="4023360" y="3886200"/>
+            <a:ext cx="411480" cy="548640"/>
+          </a:xfrm>
+          <a:prstGeom prst="rect">
+            <a:avLst/>
+          </a:prstGeom>
+          <a:noFill/>
+        </p:spPr>
+        <p:txBody>
+          <a:bodyPr wrap="square" anchor="t">
+            <a:spAutoFit/>
+          </a:bodyPr>
+          <a:lstStyle/>
+          <a:p>
+            <a:pPr algn="ctr">
+              <a:spcAft>
+                <a:spcPts val="0"/>
+              </a:spcAft>
+              <a:buNone/>
+            </a:pPr>
+            <a:r>
+              <a:rPr sz="3400" b="1" i="0">
+                <a:solidFill>
+                  <a:srgbClr val="6E6E6E"/>
+                </a:solidFill>
+                <a:latin typeface="Arial"/>
+              </a:rPr>
+              <a:t>→</a:t>
+            </a:r>
+          </a:p>
+        </p:txBody>
+      </p:sp>
+      <p:sp>
+        <p:nvSpPr>
+          <p:cNvPr id="8" name="TextBox 7"/>
+          <p:cNvSpPr txBox="1"/>
+          <p:nvPr/>
+        </p:nvSpPr>
+        <p:spPr>
+          <a:xfrm>
+            <a:off x="7772400" y="3886200"/>
+            <a:ext cx="411480" cy="548640"/>
+          </a:xfrm>
+          <a:prstGeom prst="rect">
+            <a:avLst/>
+          </a:prstGeom>
+          <a:noFill/>
+        </p:spPr>
+        <p:txBody>
+          <a:bodyPr wrap="square" anchor="t">
+            <a:spAutoFit/>
+          </a:bodyPr>
+          <a:lstStyle/>
+          <a:p>
+            <a:pPr algn="ctr">
+              <a:spcAft>
+                <a:spcPts val="0"/>
+              </a:spcAft>
+              <a:buNone/>
+            </a:pPr>
+            <a:r>
+              <a:rPr sz="3400" b="1" i="0">
+                <a:solidFill>
+                  <a:srgbClr val="6E6E6E"/>
+                </a:solidFill>
+                <a:latin typeface="Arial"/>
+              </a:rPr>
+              <a:t>→</a:t>
+            </a:r>
+          </a:p>
+        </p:txBody>
+      </p:sp>
+    </p:spTree>
+  </p:cSld>
+  <p:clrMapOvr>
+    <a:masterClrMapping/>
+  </p:clrMapOvr>
+</p:sld>
+</file>
+
+<file path=ppt/slides/slide17.xml><?xml version="1.0" encoding="utf-8"?>
+<p:sld xmlns:a="http://schemas.openxmlformats.org/drawingml/2006/main" xmlns:p="http://schemas.openxmlformats.org/presentationml/2006/main" xmlns:r="http://schemas.openxmlformats.org/officeDocument/2006/relationships">
+  <p:cSld>
+    <p:spTree>
+      <p:nvGrpSpPr>
+        <p:cNvPr id="1" name=""/>
+        <p:cNvGrpSpPr/>
+        <p:nvPr/>
+      </p:nvGrpSpPr>
+      <p:grpSpPr/>
+      <p:sp>
+        <p:nvSpPr>
+          <p:cNvPr id="2" name="Title 1"/>
+          <p:cNvSpPr>
+            <a:spLocks noGrp="1"/>
+          </p:cNvSpPr>
+          <p:nvPr>
+            <p:ph type="title"/>
+          </p:nvPr>
+        </p:nvSpPr>
+        <p:spPr/>
+        <p:txBody>
+          <a:bodyPr/>
+          <a:lstStyle/>
+          <a:p>
+            <a:r>
+              <a:rPr sz="3000" b="1">
+                <a:solidFill>
+                  <a:srgbClr val="44546A"/>
+                </a:solidFill>
+                <a:latin typeface="Arial"/>
+              </a:rPr>
+              <a:t>Experiment 2: paying traders for quality</a:t>
+            </a:r>
+          </a:p>
+        </p:txBody>
+      </p:sp>
+      <p:sp>
+        <p:nvSpPr>
+          <p:cNvPr id="3" name="TextBox 2"/>
+          <p:cNvSpPr txBox="1"/>
+          <p:nvPr/>
+        </p:nvSpPr>
+        <p:spPr>
+          <a:xfrm>
+            <a:off x="640080" y="1508760"/>
+            <a:ext cx="6766560" cy="4846320"/>
+          </a:xfrm>
+          <a:prstGeom prst="rect">
+            <a:avLst/>
+          </a:prstGeom>
+          <a:noFill/>
+        </p:spPr>
+        <p:txBody>
+          <a:bodyPr wrap="square" anchor="t">
+            <a:spAutoFit/>
+          </a:bodyPr>
+          <a:lstStyle/>
+          <a:p>
+            <a:pPr algn="l">
+              <a:spcAft>
+                <a:spcPts val="1200"/>
+              </a:spcAft>
+              <a:buNone/>
+            </a:pPr>
+            <a:r>
+              <a:rPr sz="1900" b="1" i="0">
+                <a:solidFill>
+                  <a:srgbClr val="F7921E"/>
+                </a:solidFill>
+                <a:latin typeface="Arial"/>
+              </a:rPr>
+              <a:t>Within-MCC RCT on the Exp 1 infrastructure</a:t>
+            </a:r>
+          </a:p>
+          <a:p>
+            <a:pPr algn="l" marL="274320" indent="-274320">
+              <a:spcAft>
+                <a:spcPts val="800"/>
+              </a:spcAft>
+              <a:buFont typeface="Arial"/>
+              <a:buChar char="•"/>
+            </a:pPr>
+            <a:r>
+              <a:rPr sz="1600" b="0" i="0">
+                <a:solidFill>
+                  <a:srgbClr val="2A2A2A"/>
+                </a:solidFill>
+                <a:latin typeface="Arial"/>
+              </a:rPr>
+              <a:t>19 MCCs (Kazo) where the analyzer system stayed live; </a:t>
+            </a:r>
+            <a:r>
+              <a:rPr sz="1600" b="1" i="0">
+                <a:solidFill>
+                  <a:srgbClr val="007DB3"/>
+                </a:solidFill>
+                <a:latin typeface="Arial"/>
+              </a:rPr>
+              <a:t>47 treated / 52 control traders</a:t>
+            </a:r>
+            <a:r>
+              <a:rPr sz="1600" b="0" i="0">
+                <a:solidFill>
+                  <a:srgbClr val="2A2A2A"/>
+                </a:solidFill>
+                <a:latin typeface="Arial"/>
+              </a:rPr>
+              <a:t>, randomised within MCC.</a:t>
+            </a:r>
+          </a:p>
+          <a:p>
+            <a:pPr algn="l" marL="274320" indent="-274320">
+              <a:spcAft>
+                <a:spcPts val="800"/>
+              </a:spcAft>
+              <a:buFont typeface="Arial"/>
+              <a:buChar char="•"/>
+            </a:pPr>
+            <a:r>
+              <a:rPr sz="1600" b="0" i="0">
+                <a:solidFill>
+                  <a:srgbClr val="2A2A2A"/>
+                </a:solidFill>
+                <a:latin typeface="Arial"/>
+              </a:rPr>
+              <a:t>Both arms tested + told their readings. Treated traders additionally get a </a:t>
+            </a:r>
+            <a:r>
+              <a:rPr sz="1600" b="1" i="0">
+                <a:solidFill>
+                  <a:srgbClr val="F7921E"/>
+                </a:solidFill>
+                <a:latin typeface="Arial"/>
+              </a:rPr>
+              <a:t>cash bonus</a:t>
+            </a:r>
+            <a:r>
+              <a:rPr sz="1600" b="0" i="0">
+                <a:solidFill>
+                  <a:srgbClr val="2A2A2A"/>
+                </a:solidFill>
+                <a:latin typeface="Arial"/>
+              </a:rPr>
+              <a:t> via mobile money: UGX 100/litre per 0.1pp of fat &amp; SNF above standard.</a:t>
+            </a:r>
+          </a:p>
+          <a:p>
+            <a:pPr algn="l" marL="274320" indent="-274320">
+              <a:spcAft>
+                <a:spcPts val="800"/>
+              </a:spcAft>
+              <a:buFont typeface="Arial"/>
+              <a:buChar char="•"/>
+            </a:pPr>
+            <a:r>
+              <a:rPr sz="1600" b="0" i="0">
+                <a:solidFill>
+                  <a:srgbClr val="2A2A2A"/>
+                </a:solidFill>
+                <a:latin typeface="Arial"/>
+              </a:rPr>
+              <a:t>Isolates the </a:t>
+            </a:r>
+            <a:r>
+              <a:rPr sz="1600" b="1" i="0">
+                <a:solidFill>
+                  <a:srgbClr val="F7921E"/>
+                </a:solidFill>
+                <a:latin typeface="Arial"/>
+              </a:rPr>
+              <a:t>price incentive</a:t>
+            </a:r>
+            <a:r>
+              <a:rPr sz="1600" b="0" i="0">
+                <a:solidFill>
+                  <a:srgbClr val="2A2A2A"/>
+                </a:solidFill>
+                <a:latin typeface="Arial"/>
+              </a:rPr>
+              <a:t> from the information channel.</a:t>
+            </a:r>
+          </a:p>
+          <a:p>
+            <a:pPr algn="l" marL="274320" indent="-274320">
+              <a:spcAft>
+                <a:spcPts val="800"/>
+              </a:spcAft>
+              <a:buFont typeface="Arial"/>
+              <a:buChar char="•"/>
+            </a:pPr>
+            <a:r>
+              <a:rPr sz="1600" b="0" i="0">
+                <a:solidFill>
+                  <a:srgbClr val="2A2A2A"/>
+                </a:solidFill>
+                <a:latin typeface="Arial"/>
+              </a:rPr>
+              <a:t>Daily mobile-money payment + SMS → </a:t>
+            </a:r>
+            <a:r>
+              <a:rPr sz="1600" b="1" i="0">
+                <a:solidFill>
+                  <a:srgbClr val="8850A0"/>
+                </a:solidFill>
+                <a:latin typeface="Arial"/>
+              </a:rPr>
+              <a:t>dense daily panel</a:t>
+            </a:r>
+            <a:r>
+              <a:rPr sz="1600" b="0" i="0">
+                <a:solidFill>
+                  <a:srgbClr val="2A2A2A"/>
+                </a:solidFill>
+                <a:latin typeface="Arial"/>
+              </a:rPr>
+              <a:t> (5,596 submissions, 31 days).</a:t>
+            </a:r>
+          </a:p>
+          <a:p>
+            <a:pPr algn="l" marL="274320" indent="-274320">
+              <a:spcAft>
+                <a:spcPts val="400"/>
+              </a:spcAft>
+              <a:buFont typeface="Arial"/>
+              <a:buChar char="•"/>
+            </a:pPr>
+            <a:r>
+              <a:rPr sz="1600" b="1" i="0">
+                <a:solidFill>
+                  <a:srgbClr val="2A2A2A"/>
+                </a:solidFill>
+                <a:latin typeface="Arial"/>
+              </a:rPr>
+              <a:t>Surprise mid-experiment </a:t>
+            </a:r>
+            <a:r>
+              <a:rPr sz="1600" b="1" i="0">
+                <a:solidFill>
+                  <a:srgbClr val="EF463B"/>
+                </a:solidFill>
+                <a:latin typeface="Arial"/>
+              </a:rPr>
+              <a:t>threshold shift</a:t>
+            </a:r>
+            <a:r>
+              <a:rPr sz="1600" b="1" i="0">
+                <a:solidFill>
+                  <a:srgbClr val="2A2A2A"/>
+                </a:solidFill>
+                <a:latin typeface="Arial"/>
+              </a:rPr>
+              <a:t>:</a:t>
+            </a:r>
+          </a:p>
+          <a:p>
+            <a:pPr algn="l" lvl="1">
+              <a:spcAft>
+                <a:spcPts val="200"/>
+              </a:spcAft>
+              <a:buNone/>
+            </a:pPr>
+            <a:r>
+              <a:rPr sz="1500" b="1" i="0">
+                <a:solidFill>
+                  <a:srgbClr val="62BA45"/>
+                </a:solidFill>
+                <a:latin typeface="Arial"/>
+              </a:rPr>
+              <a:t>Stage 1 (fat ≥ 3.3%) </a:t>
+            </a:r>
+            <a:r>
+              <a:rPr sz="1500" b="0" i="0">
+                <a:solidFill>
+                  <a:srgbClr val="2A2A2A"/>
+                </a:solidFill>
+                <a:latin typeface="Arial"/>
+              </a:rPr>
+              <a:t>— easy, rainy season → low q_min.</a:t>
+            </a:r>
+          </a:p>
+          <a:p>
+            <a:pPr algn="l" lvl="1">
+              <a:spcAft>
+                <a:spcPts val="0"/>
+              </a:spcAft>
+              <a:buNone/>
+            </a:pPr>
+            <a:r>
+              <a:rPr sz="1500" b="1" i="0">
+                <a:solidFill>
+                  <a:srgbClr val="EF463B"/>
+                </a:solidFill>
+                <a:latin typeface="Arial"/>
+              </a:rPr>
+              <a:t>Stage 2 (fat ≥ 3.9%) </a:t>
+            </a:r>
+            <a:r>
+              <a:rPr sz="1500" b="0" i="0">
+                <a:solidFill>
+                  <a:srgbClr val="2A2A2A"/>
+                </a:solidFill>
+                <a:latin typeface="Arial"/>
+              </a:rPr>
+              <a:t>— many deliveries now fail → high q_min.</a:t>
+            </a:r>
+          </a:p>
+        </p:txBody>
+      </p:sp>
+      <p:sp>
+        <p:nvSpPr>
+          <p:cNvPr id="4" name="Rounded Rectangle 3"/>
+          <p:cNvSpPr/>
+          <p:nvPr/>
+        </p:nvSpPr>
+        <p:spPr>
+          <a:xfrm>
+            <a:off x="7680960" y="1828800"/>
+            <a:ext cx="3931920" cy="3108960"/>
+          </a:xfrm>
+          <a:prstGeom prst="roundRect">
+            <a:avLst/>
+          </a:prstGeom>
+          <a:solidFill>
+            <a:srgbClr val="FDF0E4"/>
+          </a:solidFill>
+          <a:ln>
+            <a:noFill/>
+          </a:ln>
+          <a:effectLst/>
+        </p:spPr>
+        <p:style>
+          <a:lnRef idx="1">
+            <a:schemeClr val="accent1"/>
+          </a:lnRef>
+          <a:fillRef idx="3">
+            <a:schemeClr val="accent1"/>
+          </a:fillRef>
+          <a:effectRef idx="2">
+            <a:schemeClr val="accent1"/>
+          </a:effectRef>
+          <a:fontRef idx="minor">
+            <a:schemeClr val="lt1"/>
+          </a:fontRef>
+        </p:style>
+        <p:txBody>
+          <a:bodyPr rtlCol="0" anchor="ctr" wrap="square" lIns="177800" rIns="177800"/>
+          <a:lstStyle/>
+          <a:p>
+            <a:pPr algn="ctr">
+              <a:spcAft>
+                <a:spcPts val="800"/>
+              </a:spcAft>
+              <a:buNone/>
+            </a:pPr>
+            <a:r>
+              <a:rPr sz="1800" b="1" i="0">
+                <a:solidFill>
+                  <a:srgbClr val="F7921E"/>
+                </a:solidFill>
+                <a:latin typeface="Arial"/>
+              </a:rPr>
+              <a:t>Why traders?</a:t>
+            </a:r>
+          </a:p>
+          <a:p>
+            <a:pPr algn="ctr">
+              <a:spcAft>
+                <a:spcPts val="800"/>
+              </a:spcAft>
+              <a:buNone/>
+            </a:pPr>
+            <a:r>
+              <a:rPr sz="1400" b="0" i="0">
+                <a:solidFill>
+                  <a:srgbClr val="2A2A2A"/>
+                </a:solidFill>
+                <a:latin typeface="Arial"/>
+              </a:rPr>
+              <a:t>largest unrealised quality gains sit at the trader link</a:t>
+            </a:r>
+          </a:p>
+          <a:p>
+            <a:pPr algn="ctr">
+              <a:spcAft>
+                <a:spcPts val="800"/>
+              </a:spcAft>
+              <a:buNone/>
+            </a:pPr>
+            <a:r>
+              <a:rPr sz="1400" b="0" i="0">
+                <a:solidFill>
+                  <a:srgbClr val="2A2A2A"/>
+                </a:solidFill>
+                <a:latin typeface="Arial"/>
+              </a:rPr>
+              <a:t>creates a testable pass-through margin to farmers</a:t>
+            </a:r>
+          </a:p>
+          <a:p>
+            <a:pPr algn="ctr">
+              <a:spcAft>
+                <a:spcPts val="0"/>
+              </a:spcAft>
+              <a:buNone/>
+            </a:pPr>
+            <a:r>
+              <a:rPr sz="1400" b="0" i="0">
+                <a:solidFill>
+                  <a:srgbClr val="2A2A2A"/>
+                </a:solidFill>
+                <a:latin typeface="Arial"/>
+              </a:rPr>
+              <a:t>~100 traders: power without 500 farmers</a:t>
+            </a:r>
+          </a:p>
+        </p:txBody>
+      </p:sp>
+    </p:spTree>
+  </p:cSld>
+  <p:clrMapOvr>
+    <a:masterClrMapping/>
+  </p:clrMapOvr>
+</p:sld>
+</file>
+
+<file path=ppt/slides/slide18.xml><?xml version="1.0" encoding="utf-8"?>
+<p:sld xmlns:a="http://schemas.openxmlformats.org/drawingml/2006/main" xmlns:p="http://schemas.openxmlformats.org/presentationml/2006/main" xmlns:r="http://schemas.openxmlformats.org/officeDocument/2006/relationships">
+  <p:cSld>
+    <p:spTree>
+      <p:nvGrpSpPr>
+        <p:cNvPr id="1" name=""/>
+        <p:cNvGrpSpPr/>
+        <p:nvPr/>
+      </p:nvGrpSpPr>
+      <p:grpSpPr/>
+      <p:sp>
+        <p:nvSpPr>
+          <p:cNvPr id="2" name="Title 1"/>
+          <p:cNvSpPr>
+            <a:spLocks noGrp="1"/>
+          </p:cNvSpPr>
+          <p:nvPr>
+            <p:ph type="title"/>
+          </p:nvPr>
+        </p:nvSpPr>
+        <p:spPr/>
+        <p:txBody>
+          <a:bodyPr/>
+          <a:lstStyle/>
+          <a:p>
+            <a:r>
+              <a:rPr sz="3000" b="1">
+                <a:solidFill>
+                  <a:srgbClr val="44546A"/>
+                </a:solidFill>
+                <a:latin typeface="Arial"/>
+              </a:rPr>
+              <a:t>Experiment 2: traders respond on volume first</a:t>
+            </a:r>
+          </a:p>
+        </p:txBody>
+      </p:sp>
+      <p:pic>
+        <p:nvPicPr>
+          <p:cNvPr id="3" name="Picture 2" descr="fig_daily_quantity.png"/>
+          <p:cNvPicPr>
+            <a:picLocks noChangeAspect="1"/>
+          </p:cNvPicPr>
+          <p:nvPr/>
+        </p:nvPicPr>
+        <p:blipFill>
+          <a:blip r:embed="rId2"/>
+          <a:stretch>
+            <a:fillRect/>
+          </a:stretch>
+        </p:blipFill>
+        <p:spPr>
+          <a:xfrm>
+            <a:off x="640080" y="1554480"/>
+            <a:ext cx="7040880" cy="4224528"/>
+          </a:xfrm>
+          <a:prstGeom prst="rect">
+            <a:avLst/>
+          </a:prstGeom>
+        </p:spPr>
+      </p:pic>
+      <p:sp>
+        <p:nvSpPr>
+          <p:cNvPr id="4" name="TextBox 3"/>
+          <p:cNvSpPr txBox="1"/>
+          <p:nvPr/>
+        </p:nvSpPr>
+        <p:spPr>
+          <a:xfrm>
+            <a:off x="7955279" y="1828800"/>
+            <a:ext cx="3749039" cy="4389120"/>
+          </a:xfrm>
+          <a:prstGeom prst="rect">
+            <a:avLst/>
+          </a:prstGeom>
+          <a:noFill/>
+        </p:spPr>
+        <p:txBody>
+          <a:bodyPr wrap="square" anchor="t">
+            <a:spAutoFit/>
+          </a:bodyPr>
+          <a:lstStyle/>
+          <a:p>
+            <a:pPr algn="l" marL="274320" indent="-274320">
+              <a:spcAft>
+                <a:spcPts val="1200"/>
+              </a:spcAft>
+              <a:buFont typeface="Arial"/>
+              <a:buChar char="•"/>
+            </a:pPr>
+            <a:r>
+              <a:rPr sz="1800" b="1" i="0">
+                <a:solidFill>
+                  <a:srgbClr val="F7921E"/>
+                </a:solidFill>
+                <a:latin typeface="Arial"/>
+              </a:rPr>
+              <a:t>+124 L/day</a:t>
+            </a:r>
+            <a:r>
+              <a:rPr sz="1800" b="0" i="0">
+                <a:solidFill>
+                  <a:srgbClr val="2A2A2A"/>
+                </a:solidFill>
+                <a:latin typeface="Arial"/>
+              </a:rPr>
+              <a:t> delivered by treated traders (~+45%).</a:t>
+            </a:r>
+          </a:p>
+          <a:p>
+            <a:pPr algn="l" marL="274320" indent="-274320">
+              <a:spcAft>
+                <a:spcPts val="1200"/>
+              </a:spcAft>
+              <a:buFont typeface="Arial"/>
+              <a:buChar char="•"/>
+            </a:pPr>
+            <a:r>
+              <a:rPr sz="1800" b="0" i="0">
+                <a:solidFill>
+                  <a:srgbClr val="2A2A2A"/>
+                </a:solidFill>
+                <a:latin typeface="Arial"/>
+              </a:rPr>
+              <a:t>Response is </a:t>
+            </a:r>
+            <a:r>
+              <a:rPr sz="1800" b="1" i="0">
+                <a:solidFill>
+                  <a:srgbClr val="62BA45"/>
+                </a:solidFill>
+                <a:latin typeface="Arial"/>
+              </a:rPr>
+              <a:t>immediate</a:t>
+            </a:r>
+            <a:r>
+              <a:rPr sz="1800" b="0" i="0">
+                <a:solidFill>
+                  <a:srgbClr val="2A2A2A"/>
+                </a:solidFill>
+                <a:latin typeface="Arial"/>
+              </a:rPr>
+              <a:t> and present in </a:t>
+            </a:r>
+            <a:r>
+              <a:rPr sz="1800" b="1" i="0">
+                <a:solidFill>
+                  <a:srgbClr val="2A2A2A"/>
+                </a:solidFill>
+                <a:latin typeface="Arial"/>
+              </a:rPr>
+              <a:t>both stages</a:t>
+            </a:r>
+            <a:r>
+              <a:rPr sz="1800" b="0" i="0">
+                <a:solidFill>
+                  <a:srgbClr val="2A2A2A"/>
+                </a:solidFill>
+                <a:latin typeface="Arial"/>
+              </a:rPr>
+              <a:t>.</a:t>
+            </a:r>
+          </a:p>
+          <a:p>
+            <a:pPr algn="l" marL="274320" indent="-274320">
+              <a:spcAft>
+                <a:spcPts val="1200"/>
+              </a:spcAft>
+              <a:buFont typeface="Arial"/>
+              <a:buChar char="•"/>
+            </a:pPr>
+            <a:r>
+              <a:rPr sz="1800" b="0" i="0">
+                <a:solidFill>
+                  <a:srgbClr val="2A2A2A"/>
+                </a:solidFill>
+                <a:latin typeface="Arial"/>
+              </a:rPr>
+              <a:t>When the threshold is easy to clear (Stage 1), the cheapest way to earn more bonus is to </a:t>
+            </a:r>
+            <a:r>
+              <a:rPr sz="1800" b="1" i="0">
+                <a:solidFill>
+                  <a:srgbClr val="F7921E"/>
+                </a:solidFill>
+                <a:latin typeface="Arial"/>
+              </a:rPr>
+              <a:t>source more milk</a:t>
+            </a:r>
+            <a:r>
+              <a:rPr sz="1800" b="0" i="0">
+                <a:solidFill>
+                  <a:srgbClr val="2A2A2A"/>
+                </a:solidFill>
+                <a:latin typeface="Arial"/>
+              </a:rPr>
+              <a:t>.</a:t>
+            </a:r>
+          </a:p>
+          <a:p>
+            <a:pPr algn="l" marL="274320" indent="-274320">
+              <a:spcAft>
+                <a:spcPts val="0"/>
+              </a:spcAft>
+              <a:buFont typeface="Arial"/>
+              <a:buChar char="•"/>
+            </a:pPr>
+            <a:r>
+              <a:rPr sz="1600" b="0" i="0">
+                <a:solidFill>
+                  <a:srgbClr val="2A2A2A"/>
+                </a:solidFill>
+                <a:latin typeface="Arial"/>
+              </a:rPr>
+              <a:t>Volume is a low-cost margin: recruit more suppliers, collect bigger loads.</a:t>
+            </a:r>
+          </a:p>
+        </p:txBody>
+      </p:sp>
+    </p:spTree>
+  </p:cSld>
+  <p:clrMapOvr>
+    <a:masterClrMapping/>
+  </p:clrMapOvr>
+</p:sld>
+</file>
+
+<file path=ppt/slides/slide19.xml><?xml version="1.0" encoding="utf-8"?>
+<p:sld xmlns:a="http://schemas.openxmlformats.org/drawingml/2006/main" xmlns:p="http://schemas.openxmlformats.org/presentationml/2006/main" xmlns:r="http://schemas.openxmlformats.org/officeDocument/2006/relationships">
+  <p:cSld>
+    <p:spTree>
+      <p:nvGrpSpPr>
+        <p:cNvPr id="1" name=""/>
+        <p:cNvGrpSpPr/>
+        <p:nvPr/>
+      </p:nvGrpSpPr>
+      <p:grpSpPr/>
+      <p:sp>
+        <p:nvSpPr>
+          <p:cNvPr id="2" name="Title 1"/>
+          <p:cNvSpPr>
+            <a:spLocks noGrp="1"/>
+          </p:cNvSpPr>
+          <p:nvPr>
+            <p:ph type="title"/>
+          </p:nvPr>
+        </p:nvSpPr>
+        <p:spPr/>
+        <p:txBody>
+          <a:bodyPr/>
+          <a:lstStyle/>
+          <a:p>
+            <a:r>
+              <a:rPr sz="3000" b="1">
+                <a:solidFill>
+                  <a:srgbClr val="44546A"/>
+                </a:solidFill>
+                <a:latin typeface="Arial"/>
+              </a:rPr>
+              <a:t>Quality responds only once the floor bites</a:t>
+            </a:r>
+          </a:p>
+        </p:txBody>
+      </p:sp>
+      <p:pic>
+        <p:nvPicPr>
+          <p:cNvPr id="3" name="Picture 2" descr="fig_daily_fat.png"/>
+          <p:cNvPicPr>
+            <a:picLocks noChangeAspect="1"/>
+          </p:cNvPicPr>
+          <p:nvPr/>
+        </p:nvPicPr>
+        <p:blipFill>
+          <a:blip r:embed="rId2"/>
+          <a:stretch>
+            <a:fillRect/>
+          </a:stretch>
+        </p:blipFill>
+        <p:spPr>
+          <a:xfrm>
+            <a:off x="640080" y="1554480"/>
+            <a:ext cx="7040880" cy="4224528"/>
+          </a:xfrm>
+          <a:prstGeom prst="rect">
+            <a:avLst/>
+          </a:prstGeom>
+        </p:spPr>
+      </p:pic>
+      <p:sp>
+        <p:nvSpPr>
+          <p:cNvPr id="4" name="TextBox 3"/>
+          <p:cNvSpPr txBox="1"/>
+          <p:nvPr/>
+        </p:nvSpPr>
+        <p:spPr>
+          <a:xfrm>
+            <a:off x="7955279" y="1737360"/>
+            <a:ext cx="3749039" cy="4572000"/>
+          </a:xfrm>
+          <a:prstGeom prst="rect">
+            <a:avLst/>
+          </a:prstGeom>
+          <a:noFill/>
+        </p:spPr>
+        <p:txBody>
+          <a:bodyPr wrap="square" anchor="t">
+            <a:spAutoFit/>
+          </a:bodyPr>
+          <a:lstStyle/>
+          <a:p>
+            <a:pPr algn="l" marL="274320" indent="-274320">
+              <a:spcAft>
+                <a:spcPts val="1200"/>
+              </a:spcAft>
+              <a:buFont typeface="Arial"/>
+              <a:buChar char="•"/>
+            </a:pPr>
+            <a:r>
+              <a:rPr sz="1700" b="1" i="0">
+                <a:solidFill>
+                  <a:srgbClr val="62BA45"/>
+                </a:solidFill>
+                <a:latin typeface="Arial"/>
+              </a:rPr>
+              <a:t>Stage 1 (fat ≥ 3.3%): </a:t>
+            </a:r>
+            <a:r>
+              <a:rPr sz="1700" b="1" i="0">
+                <a:solidFill>
+                  <a:srgbClr val="6E6E6E"/>
+                </a:solidFill>
+                <a:latin typeface="Arial"/>
+              </a:rPr>
+              <a:t>no quality response</a:t>
+            </a:r>
+            <a:r>
+              <a:rPr sz="1700" b="0" i="0">
+                <a:solidFill>
+                  <a:srgbClr val="2A2A2A"/>
+                </a:solidFill>
+                <a:latin typeface="Arial"/>
+              </a:rPr>
+              <a:t> (+0.035pp, n.s.).</a:t>
+            </a:r>
+          </a:p>
+          <a:p>
+            <a:pPr algn="l" marL="274320" indent="-274320">
+              <a:spcAft>
+                <a:spcPts val="1200"/>
+              </a:spcAft>
+              <a:buFont typeface="Arial"/>
+              <a:buChar char="•"/>
+            </a:pPr>
+            <a:r>
+              <a:rPr sz="1700" b="1" i="0">
+                <a:solidFill>
+                  <a:srgbClr val="EF463B"/>
+                </a:solidFill>
+                <a:latin typeface="Arial"/>
+              </a:rPr>
+              <a:t>Stage 2 (fat ≥ 3.9%): </a:t>
+            </a:r>
+            <a:r>
+              <a:rPr sz="1700" b="1" i="0">
+                <a:solidFill>
+                  <a:srgbClr val="62BA45"/>
+                </a:solidFill>
+                <a:latin typeface="Arial"/>
+              </a:rPr>
+              <a:t>fat jumps +0.17pp</a:t>
+            </a:r>
+            <a:r>
+              <a:rPr sz="1700" b="0" i="0">
+                <a:solidFill>
+                  <a:srgbClr val="2A2A2A"/>
+                </a:solidFill>
+                <a:latin typeface="Arial"/>
+              </a:rPr>
+              <a:t> (p&lt;0.001); SNF also rises.</a:t>
+            </a:r>
+          </a:p>
+          <a:p>
+            <a:pPr algn="l" marL="274320" indent="-274320">
+              <a:spcAft>
+                <a:spcPts val="1200"/>
+              </a:spcAft>
+              <a:buFont typeface="Arial"/>
+              <a:buChar char="•"/>
+            </a:pPr>
+            <a:r>
+              <a:rPr sz="1700" b="0" i="0">
+                <a:solidFill>
+                  <a:srgbClr val="2A2A2A"/>
+                </a:solidFill>
+                <a:latin typeface="Arial"/>
+              </a:rPr>
+              <a:t>The </a:t>
+            </a:r>
+            <a:r>
+              <a:rPr sz="1700" b="1" i="0">
+                <a:solidFill>
+                  <a:srgbClr val="EF463B"/>
+                </a:solidFill>
+                <a:latin typeface="Arial"/>
+              </a:rPr>
+              <a:t>threshold</a:t>
+            </a:r>
+            <a:r>
+              <a:rPr sz="1700" b="0" i="0">
+                <a:solidFill>
+                  <a:srgbClr val="2A2A2A"/>
+                </a:solidFill>
+                <a:latin typeface="Arial"/>
+              </a:rPr>
+              <a:t>, not the continuous gradient, triggers costly quality sourcing — exactly the model’s extensive-margin prediction.</a:t>
+            </a:r>
+          </a:p>
+          <a:p>
+            <a:pPr algn="l" marL="274320" indent="-274320">
+              <a:spcAft>
+                <a:spcPts val="0"/>
+              </a:spcAft>
+              <a:buFont typeface="Arial"/>
+              <a:buChar char="•"/>
+            </a:pPr>
+            <a:r>
+              <a:rPr sz="1700" b="0" i="0">
+                <a:solidFill>
+                  <a:srgbClr val="2A2A2A"/>
+                </a:solidFill>
+                <a:latin typeface="Arial"/>
+              </a:rPr>
+              <a:t>Quality adjusts </a:t>
+            </a:r>
+            <a:r>
+              <a:rPr sz="1700" b="1" i="0">
+                <a:solidFill>
+                  <a:srgbClr val="F7921E"/>
+                </a:solidFill>
+                <a:latin typeface="Arial"/>
+              </a:rPr>
+              <a:t>gradually</a:t>
+            </a:r>
+            <a:r>
+              <a:rPr sz="1700" b="0" i="0">
+                <a:solidFill>
+                  <a:srgbClr val="2A2A2A"/>
+                </a:solidFill>
+                <a:latin typeface="Arial"/>
+              </a:rPr>
+              <a:t> (~1 week): re-sorting suppliers is costly and lumpy.</a:t>
+            </a:r>
+          </a:p>
+        </p:txBody>
+      </p:sp>
+    </p:spTree>
+  </p:cSld>
+  <p:clrMapOvr>
+    <a:masterClrMapping/>
+  </p:clrMapOvr>
+</p:sld>
+</file>
+
 <file path=ppt/slides/slide2.xml><?xml version="1.0" encoding="utf-8"?>
 <p:sld xmlns:a="http://schemas.openxmlformats.org/drawingml/2006/main" xmlns:r="http://schemas.openxmlformats.org/officeDocument/2006/relationships" xmlns:p="http://schemas.openxmlformats.org/presentationml/2006/main">
   <p:cSld>
@@ -2647,7 +7294,7 @@
                   <a:srgbClr val="62BB46"/>
                 </a:solidFill>
               </a:rPr>
-              <a:t>TITLE GOES HERE</a:t>
+              <a:t>When Quality (doesn’t) Pay</a:t>
             </a:r>
           </a:p>
           <a:p>
@@ -2657,7 +7304,7 @@
                   <a:srgbClr val="62BB46"/>
                 </a:solidFill>
               </a:rPr>
-              <a:t>CAN RUN TWO LINES</a:t>
+              <a:t>Two Experiments in Ugandan Dairy</a:t>
             </a:r>
           </a:p>
         </p:txBody>
@@ -2695,7 +7342,7 @@
                   <a:srgbClr val="435464"/>
                 </a:solidFill>
               </a:rPr>
-              <a:t>Sub-title goes here</a:t>
+              <a:t>Technology, transparency, and the emergence of markets for quality</a:t>
             </a:r>
           </a:p>
         </p:txBody>
@@ -2736,7 +7383,7 @@
                   </a:schemeClr>
                 </a:solidFill>
               </a:rPr>
-              <a:t>Name</a:t>
+              <a:t>Bjorn Van Campenhout</a:t>
             </a:r>
             <a:br>
               <a:rPr lang="en-US" sz="2400" dirty="0">
@@ -2757,7 +7404,7 @@
                   </a:schemeClr>
                 </a:solidFill>
               </a:rPr>
-              <a:t>Department/Division</a:t>
+              <a:t>with R. Ariong, S. W. Kariuki &amp; J. Chamberlin</a:t>
             </a:r>
             <a:br>
               <a:rPr lang="en-US" sz="2400" dirty="0">
@@ -2778,7 +7425,7 @@
                   </a:schemeClr>
                 </a:solidFill>
               </a:rPr>
-              <a:t>Institution</a:t>
+              <a:t>IFPRI  |  KU Leuven</a:t>
             </a:r>
             <a:br>
               <a:rPr lang="en-US" sz="2400" dirty="0">
@@ -2819,7 +7466,7 @@
                   </a:schemeClr>
                 </a:solidFill>
               </a:rPr>
-              <a:t>Location | Date</a:t>
+              <a:t>NOVAFRICA Conference  |  19 June 2026</a:t>
             </a:r>
           </a:p>
         </p:txBody>
@@ -2866,6 +7513,547 @@
         <p14:creationId xmlns:p14="http://schemas.microsoft.com/office/powerpoint/2010/main" val="2678100160"/>
       </p:ext>
     </p:extLst>
+  </p:cSld>
+  <p:clrMapOvr>
+    <a:masterClrMapping/>
+  </p:clrMapOvr>
+</p:sld>
+</file>
+
+<file path=ppt/slides/slide20.xml><?xml version="1.0" encoding="utf-8"?>
+<p:sld xmlns:a="http://schemas.openxmlformats.org/drawingml/2006/main" xmlns:p="http://schemas.openxmlformats.org/presentationml/2006/main" xmlns:r="http://schemas.openxmlformats.org/officeDocument/2006/relationships">
+  <p:cSld>
+    <p:spTree>
+      <p:nvGrpSpPr>
+        <p:cNvPr id="1" name=""/>
+        <p:cNvGrpSpPr/>
+        <p:nvPr/>
+      </p:nvGrpSpPr>
+      <p:grpSpPr/>
+      <p:sp>
+        <p:nvSpPr>
+          <p:cNvPr id="2" name="Title 1"/>
+          <p:cNvSpPr>
+            <a:spLocks noGrp="1"/>
+          </p:cNvSpPr>
+          <p:nvPr>
+            <p:ph type="title"/>
+          </p:nvPr>
+        </p:nvSpPr>
+        <p:spPr/>
+        <p:txBody>
+          <a:bodyPr/>
+          <a:lstStyle/>
+          <a:p>
+            <a:r>
+              <a:rPr sz="3000" b="1">
+                <a:solidFill>
+                  <a:srgbClr val="44546A"/>
+                </a:solidFill>
+                <a:latin typeface="Arial"/>
+              </a:rPr>
+              <a:t>… but farmers are left out: the pass-through fails</a:t>
+            </a:r>
+          </a:p>
+        </p:txBody>
+      </p:sp>
+      <p:pic>
+        <p:nvPicPr>
+          <p:cNvPr id="3" name="Picture 2" descr="fig_forest_farmer_exp2.png"/>
+          <p:cNvPicPr>
+            <a:picLocks noChangeAspect="1"/>
+          </p:cNvPicPr>
+          <p:nvPr/>
+        </p:nvPicPr>
+        <p:blipFill>
+          <a:blip r:embed="rId2"/>
+          <a:stretch>
+            <a:fillRect/>
+          </a:stretch>
+        </p:blipFill>
+        <p:spPr>
+          <a:xfrm>
+            <a:off x="548640" y="1554480"/>
+            <a:ext cx="6035040" cy="3621023"/>
+          </a:xfrm>
+          <a:prstGeom prst="rect">
+            <a:avLst/>
+          </a:prstGeom>
+        </p:spPr>
+      </p:pic>
+      <p:sp>
+        <p:nvSpPr>
+          <p:cNvPr id="4" name="TextBox 3"/>
+          <p:cNvSpPr txBox="1"/>
+          <p:nvPr/>
+        </p:nvSpPr>
+        <p:spPr>
+          <a:xfrm>
+            <a:off x="6858000" y="1737360"/>
+            <a:ext cx="4846320" cy="4572000"/>
+          </a:xfrm>
+          <a:prstGeom prst="rect">
+            <a:avLst/>
+          </a:prstGeom>
+          <a:noFill/>
+        </p:spPr>
+        <p:txBody>
+          <a:bodyPr wrap="square" anchor="t">
+            <a:spAutoFit/>
+          </a:bodyPr>
+          <a:lstStyle/>
+          <a:p>
+            <a:pPr algn="l" marL="274320" indent="-274320">
+              <a:spcAft>
+                <a:spcPts val="1200"/>
+              </a:spcAft>
+              <a:buFont typeface="Arial"/>
+              <a:buChar char="•"/>
+            </a:pPr>
+            <a:r>
+              <a:rPr sz="1800" b="0" i="0">
+                <a:solidFill>
+                  <a:srgbClr val="2A2A2A"/>
+                </a:solidFill>
+                <a:latin typeface="Arial"/>
+              </a:rPr>
+              <a:t>Farm-gate price </a:t>
+            </a:r>
+            <a:r>
+              <a:rPr sz="1800" b="1" i="0">
+                <a:solidFill>
+                  <a:srgbClr val="EF463B"/>
+                </a:solidFill>
+                <a:latin typeface="Arial"/>
+              </a:rPr>
+              <a:t>falls</a:t>
+            </a:r>
+            <a:r>
+              <a:rPr sz="1800" b="0" i="0">
+                <a:solidFill>
+                  <a:srgbClr val="2A2A2A"/>
+                </a:solidFill>
+                <a:latin typeface="Arial"/>
+              </a:rPr>
+              <a:t>: −17 UGX/litre to farmers selling to treated traders (p=0.02).</a:t>
+            </a:r>
+          </a:p>
+          <a:p>
+            <a:pPr algn="l" marL="274320" indent="-274320">
+              <a:spcAft>
+                <a:spcPts val="1200"/>
+              </a:spcAft>
+              <a:buFont typeface="Arial"/>
+              <a:buChar char="•"/>
+            </a:pPr>
+            <a:r>
+              <a:rPr sz="1800" b="1" i="0">
+                <a:solidFill>
+                  <a:srgbClr val="EF463B"/>
+                </a:solidFill>
+                <a:latin typeface="Arial"/>
+              </a:rPr>
+              <a:t>Negative</a:t>
+            </a:r>
+            <a:r>
+              <a:rPr sz="1800" b="0" i="0">
+                <a:solidFill>
+                  <a:srgbClr val="2A2A2A"/>
+                </a:solidFill>
+                <a:latin typeface="Arial"/>
+              </a:rPr>
+              <a:t> pass-through — the opposite of what a price channel should deliver.</a:t>
+            </a:r>
+          </a:p>
+          <a:p>
+            <a:pPr algn="l" marL="274320" indent="-274320">
+              <a:spcAft>
+                <a:spcPts val="1200"/>
+              </a:spcAft>
+              <a:buFont typeface="Arial"/>
+              <a:buChar char="•"/>
+            </a:pPr>
+            <a:r>
+              <a:rPr sz="1700" b="0" i="0">
+                <a:solidFill>
+                  <a:srgbClr val="2A2A2A"/>
+                </a:solidFill>
+                <a:latin typeface="Arial"/>
+              </a:rPr>
+              <a:t>Quality-checking and feeding practices: </a:t>
+            </a:r>
+            <a:r>
+              <a:rPr sz="1700" b="1" i="0">
+                <a:solidFill>
+                  <a:srgbClr val="6E6E6E"/>
+                </a:solidFill>
+                <a:latin typeface="Arial"/>
+              </a:rPr>
+              <a:t>essentially null</a:t>
+            </a:r>
+            <a:r>
+              <a:rPr sz="1700" b="0" i="0">
+                <a:solidFill>
+                  <a:srgbClr val="2A2A2A"/>
+                </a:solidFill>
+                <a:latin typeface="Arial"/>
+              </a:rPr>
+              <a:t> (one marginal feeding index, fails multiple-testing correction).</a:t>
+            </a:r>
+          </a:p>
+          <a:p>
+            <a:pPr algn="l" marL="274320" indent="-274320">
+              <a:spcAft>
+                <a:spcPts val="1200"/>
+              </a:spcAft>
+              <a:buFont typeface="Arial"/>
+              <a:buChar char="•"/>
+            </a:pPr>
+            <a:r>
+              <a:rPr sz="1700" b="0" i="0">
+                <a:solidFill>
+                  <a:srgbClr val="2A2A2A"/>
+                </a:solidFill>
+                <a:latin typeface="Arial"/>
+              </a:rPr>
+              <a:t>Trader </a:t>
+            </a:r>
+            <a:r>
+              <a:rPr sz="1700" b="1" i="0">
+                <a:solidFill>
+                  <a:srgbClr val="2A2A2A"/>
+                </a:solidFill>
+                <a:latin typeface="Arial"/>
+              </a:rPr>
+              <a:t>endline survey</a:t>
+            </a:r>
+            <a:r>
+              <a:rPr sz="1700" b="0" i="0">
+                <a:solidFill>
+                  <a:srgbClr val="2A2A2A"/>
+                </a:solidFill>
+                <a:latin typeface="Arial"/>
+              </a:rPr>
+              <a:t>: all null too — effects live in the daily panel, not the snapshot.</a:t>
+            </a:r>
+          </a:p>
+          <a:p>
+            <a:pPr algn="l">
+              <a:spcAft>
+                <a:spcPts val="0"/>
+              </a:spcAft>
+              <a:buNone/>
+            </a:pPr>
+            <a:r>
+              <a:rPr sz="1800" b="1" i="0">
+                <a:solidFill>
+                  <a:srgbClr val="44546A"/>
+                </a:solidFill>
+                <a:latin typeface="Arial"/>
+              </a:rPr>
+              <a:t>Informed intermediaries </a:t>
+            </a:r>
+            <a:r>
+              <a:rPr sz="1800" b="1" i="0">
+                <a:solidFill>
+                  <a:srgbClr val="EF463B"/>
+                </a:solidFill>
+                <a:latin typeface="Arial"/>
+              </a:rPr>
+              <a:t>capture the surplus</a:t>
+            </a:r>
+            <a:r>
+              <a:rPr sz="1800" b="1" i="0">
+                <a:solidFill>
+                  <a:srgbClr val="44546A"/>
+                </a:solidFill>
+                <a:latin typeface="Arial"/>
+              </a:rPr>
+              <a:t>. The premium stops at the trader.</a:t>
+            </a:r>
+          </a:p>
+        </p:txBody>
+      </p:sp>
+    </p:spTree>
+  </p:cSld>
+  <p:clrMapOvr>
+    <a:masterClrMapping/>
+  </p:clrMapOvr>
+</p:sld>
+</file>
+
+<file path=ppt/slides/slide21.xml><?xml version="1.0" encoding="utf-8"?>
+<p:sld xmlns:a="http://schemas.openxmlformats.org/drawingml/2006/main" xmlns:p="http://schemas.openxmlformats.org/presentationml/2006/main" xmlns:r="http://schemas.openxmlformats.org/officeDocument/2006/relationships">
+  <p:cSld>
+    <p:spTree>
+      <p:nvGrpSpPr>
+        <p:cNvPr id="1" name=""/>
+        <p:cNvGrpSpPr/>
+        <p:nvPr/>
+      </p:nvGrpSpPr>
+      <p:grpSpPr/>
+      <p:sp>
+        <p:nvSpPr>
+          <p:cNvPr id="2" name="Title 1"/>
+          <p:cNvSpPr>
+            <a:spLocks noGrp="1"/>
+          </p:cNvSpPr>
+          <p:nvPr>
+            <p:ph type="title"/>
+          </p:nvPr>
+        </p:nvSpPr>
+        <p:spPr/>
+        <p:txBody>
+          <a:bodyPr/>
+          <a:lstStyle/>
+          <a:p>
+            <a:r>
+              <a:rPr sz="3000" b="1">
+                <a:solidFill>
+                  <a:srgbClr val="44546A"/>
+                </a:solidFill>
+                <a:latin typeface="Arial"/>
+              </a:rPr>
+              <a:t>Conclusion: necessary, but not sufficient</a:t>
+            </a:r>
+          </a:p>
+        </p:txBody>
+      </p:sp>
+      <p:sp>
+        <p:nvSpPr>
+          <p:cNvPr id="3" name="TextBox 2"/>
+          <p:cNvSpPr txBox="1"/>
+          <p:nvPr/>
+        </p:nvSpPr>
+        <p:spPr>
+          <a:xfrm>
+            <a:off x="640080" y="1554480"/>
+            <a:ext cx="10972800" cy="1280160"/>
+          </a:xfrm>
+          <a:prstGeom prst="rect">
+            <a:avLst/>
+          </a:prstGeom>
+          <a:noFill/>
+        </p:spPr>
+        <p:txBody>
+          <a:bodyPr wrap="square" anchor="t">
+            <a:spAutoFit/>
+          </a:bodyPr>
+          <a:lstStyle/>
+          <a:p>
+            <a:pPr algn="l">
+              <a:spcAft>
+                <a:spcPts val="0"/>
+              </a:spcAft>
+              <a:buNone/>
+            </a:pPr>
+            <a:r>
+              <a:rPr sz="2100" b="1" i="0">
+                <a:solidFill>
+                  <a:srgbClr val="44546A"/>
+                </a:solidFill>
+                <a:latin typeface="Arial"/>
+              </a:rPr>
+              <a:t>Observability is </a:t>
+            </a:r>
+            <a:r>
+              <a:rPr sz="2100" b="1" i="0">
+                <a:solidFill>
+                  <a:srgbClr val="EF463B"/>
+                </a:solidFill>
+                <a:latin typeface="Arial"/>
+              </a:rPr>
+              <a:t>necessary but not sufficient</a:t>
+            </a:r>
+            <a:r>
+              <a:rPr sz="2100" b="1" i="0">
+                <a:solidFill>
+                  <a:srgbClr val="44546A"/>
+                </a:solidFill>
+                <a:latin typeface="Arial"/>
+              </a:rPr>
+              <a:t> for a market for quality. Even when prices reward quality, </a:t>
+            </a:r>
+            <a:r>
+              <a:rPr sz="2100" b="1" i="0">
+                <a:solidFill>
+                  <a:srgbClr val="44546A"/>
+                </a:solidFill>
+                <a:latin typeface="Arial"/>
+              </a:rPr>
+              <a:t>the structure of intermediation decides who captures the returns.</a:t>
+            </a:r>
+          </a:p>
+        </p:txBody>
+      </p:sp>
+      <p:sp>
+        <p:nvSpPr>
+          <p:cNvPr id="4" name="TextBox 3"/>
+          <p:cNvSpPr txBox="1"/>
+          <p:nvPr/>
+        </p:nvSpPr>
+        <p:spPr>
+          <a:xfrm>
+            <a:off x="640080" y="2880360"/>
+            <a:ext cx="10972800" cy="3383280"/>
+          </a:xfrm>
+          <a:prstGeom prst="rect">
+            <a:avLst/>
+          </a:prstGeom>
+          <a:noFill/>
+        </p:spPr>
+        <p:txBody>
+          <a:bodyPr wrap="square" anchor="t">
+            <a:spAutoFit/>
+          </a:bodyPr>
+          <a:lstStyle/>
+          <a:p>
+            <a:pPr algn="l" marL="274320" indent="-274320">
+              <a:spcAft>
+                <a:spcPts val="1200"/>
+              </a:spcAft>
+              <a:buFont typeface="Arial"/>
+              <a:buChar char="•"/>
+            </a:pPr>
+            <a:r>
+              <a:rPr sz="1800" b="1" i="0">
+                <a:solidFill>
+                  <a:srgbClr val="62BA45"/>
+                </a:solidFill>
+                <a:latin typeface="Arial"/>
+              </a:rPr>
+              <a:t>Exp 1: </a:t>
+            </a:r>
+            <a:r>
+              <a:rPr sz="1800" b="1" i="0">
+                <a:solidFill>
+                  <a:srgbClr val="2A2A2A"/>
+                </a:solidFill>
+                <a:latin typeface="Arial"/>
+              </a:rPr>
+              <a:t>measurement → enforcement</a:t>
+            </a:r>
+            <a:r>
+              <a:rPr sz="1800" b="0" i="0">
+                <a:solidFill>
+                  <a:srgbClr val="2A2A2A"/>
+                </a:solidFill>
+                <a:latin typeface="Arial"/>
+              </a:rPr>
+              <a:t>. Quality rises (less adulteration), but no premium anywhere — processors buy flat per litre.</a:t>
+            </a:r>
+          </a:p>
+          <a:p>
+            <a:pPr algn="l" marL="274320" indent="-274320">
+              <a:spcAft>
+                <a:spcPts val="1200"/>
+              </a:spcAft>
+              <a:buFont typeface="Arial"/>
+              <a:buChar char="•"/>
+            </a:pPr>
+            <a:r>
+              <a:rPr sz="1800" b="1" i="0">
+                <a:solidFill>
+                  <a:srgbClr val="F7921E"/>
+                </a:solidFill>
+                <a:latin typeface="Arial"/>
+              </a:rPr>
+              <a:t>Exp 2: </a:t>
+            </a:r>
+            <a:r>
+              <a:rPr sz="1800" b="1" i="0">
+                <a:solidFill>
+                  <a:srgbClr val="2A2A2A"/>
+                </a:solidFill>
+                <a:latin typeface="Arial"/>
+              </a:rPr>
+              <a:t>inject a premium → quality rises when the floor binds</a:t>
+            </a:r>
+            <a:r>
+              <a:rPr sz="1800" b="0" i="0">
+                <a:solidFill>
+                  <a:srgbClr val="2A2A2A"/>
+                </a:solidFill>
+                <a:latin typeface="Arial"/>
+              </a:rPr>
+              <a:t>, but the surplus is retained by traders and farm-gate prices </a:t>
+            </a:r>
+            <a:r>
+              <a:rPr sz="1800" b="1" i="0">
+                <a:solidFill>
+                  <a:srgbClr val="EF463B"/>
+                </a:solidFill>
+                <a:latin typeface="Arial"/>
+              </a:rPr>
+              <a:t>fall</a:t>
+            </a:r>
+            <a:r>
+              <a:rPr sz="1800" b="0" i="0">
+                <a:solidFill>
+                  <a:srgbClr val="2A2A2A"/>
+                </a:solidFill>
+                <a:latin typeface="Arial"/>
+              </a:rPr>
+              <a:t>.</a:t>
+            </a:r>
+          </a:p>
+          <a:p>
+            <a:pPr algn="l" marL="274320" indent="-274320">
+              <a:spcAft>
+                <a:spcPts val="1200"/>
+              </a:spcAft>
+              <a:buFont typeface="Arial"/>
+              <a:buChar char="•"/>
+            </a:pPr>
+            <a:r>
+              <a:rPr sz="1800" b="1" i="0">
+                <a:solidFill>
+                  <a:srgbClr val="8850A0"/>
+                </a:solidFill>
+                <a:latin typeface="Arial"/>
+              </a:rPr>
+              <a:t>Thresholds beat gradients</a:t>
+            </a:r>
+            <a:r>
+              <a:rPr sz="1800" b="0" i="0">
+                <a:solidFill>
+                  <a:srgbClr val="2A2A2A"/>
+                </a:solidFill>
+                <a:latin typeface="Arial"/>
+              </a:rPr>
+              <a:t>: discrete pass/fail signals move intermediaries facing lumpy adjustment costs; smooth gradients don’t.</a:t>
+            </a:r>
+          </a:p>
+          <a:p>
+            <a:pPr algn="l" marL="274320" indent="-274320">
+              <a:spcAft>
+                <a:spcPts val="0"/>
+              </a:spcAft>
+              <a:buFont typeface="Arial"/>
+              <a:buChar char="•"/>
+            </a:pPr>
+            <a:r>
+              <a:rPr sz="1800" b="1" i="0">
+                <a:solidFill>
+                  <a:srgbClr val="007DB3"/>
+                </a:solidFill>
+                <a:latin typeface="Arial"/>
+              </a:rPr>
+              <a:t>Policy: </a:t>
+            </a:r>
+            <a:r>
+              <a:rPr sz="1800" b="0" i="0">
+                <a:solidFill>
+                  <a:srgbClr val="2A2A2A"/>
+                </a:solidFill>
+                <a:latin typeface="Arial"/>
+              </a:rPr>
+              <a:t>measurement + pricing are complementary, not substitutes. Partial fixes leave a low-quality trap intact; pass-through to farmers needs its own instrument.</a:t>
+            </a:r>
+          </a:p>
+        </p:txBody>
+      </p:sp>
+    </p:spTree>
   </p:cSld>
   <p:clrMapOvr>
     <a:masterClrMapping/>
@@ -3081,6 +8269,1355 @@
         <p14:creationId xmlns:p14="http://schemas.microsoft.com/office/powerpoint/2010/main" val="337801036"/>
       </p:ext>
     </p:extLst>
+  </p:cSld>
+  <p:clrMapOvr>
+    <a:masterClrMapping/>
+  </p:clrMapOvr>
+</p:sld>
+</file>
+
+<file path=ppt/slides/slide6.xml><?xml version="1.0" encoding="utf-8"?>
+<p:sld xmlns:a="http://schemas.openxmlformats.org/drawingml/2006/main" xmlns:p="http://schemas.openxmlformats.org/presentationml/2006/main" xmlns:r="http://schemas.openxmlformats.org/officeDocument/2006/relationships">
+  <p:cSld>
+    <p:spTree>
+      <p:nvGrpSpPr>
+        <p:cNvPr id="1" name=""/>
+        <p:cNvGrpSpPr/>
+        <p:nvPr/>
+      </p:nvGrpSpPr>
+      <p:grpSpPr/>
+      <p:sp>
+        <p:nvSpPr>
+          <p:cNvPr id="2" name="Title 1"/>
+          <p:cNvSpPr>
+            <a:spLocks noGrp="1"/>
+          </p:cNvSpPr>
+          <p:nvPr>
+            <p:ph type="title"/>
+          </p:nvPr>
+        </p:nvSpPr>
+        <p:spPr/>
+        <p:txBody>
+          <a:bodyPr/>
+          <a:lstStyle/>
+          <a:p>
+            <a:r>
+              <a:rPr sz="3000" b="1">
+                <a:solidFill>
+                  <a:srgbClr val="44546A"/>
+                </a:solidFill>
+                <a:latin typeface="Arial"/>
+              </a:rPr>
+              <a:t>The problem (1): quality you cannot see</a:t>
+            </a:r>
+          </a:p>
+        </p:txBody>
+      </p:sp>
+      <p:sp>
+        <p:nvSpPr>
+          <p:cNvPr id="3" name="TextBox 2"/>
+          <p:cNvSpPr txBox="1"/>
+          <p:nvPr/>
+        </p:nvSpPr>
+        <p:spPr>
+          <a:xfrm>
+            <a:off x="640080" y="1554480"/>
+            <a:ext cx="6766560" cy="4754880"/>
+          </a:xfrm>
+          <a:prstGeom prst="rect">
+            <a:avLst/>
+          </a:prstGeom>
+          <a:noFill/>
+        </p:spPr>
+        <p:txBody>
+          <a:bodyPr wrap="square" anchor="t">
+            <a:spAutoFit/>
+          </a:bodyPr>
+          <a:lstStyle/>
+          <a:p>
+            <a:pPr algn="l">
+              <a:spcAft>
+                <a:spcPts val="1400"/>
+              </a:spcAft>
+              <a:buNone/>
+            </a:pPr>
+            <a:r>
+              <a:rPr sz="2100" b="1" i="0">
+                <a:solidFill>
+                  <a:srgbClr val="44546A"/>
+                </a:solidFill>
+                <a:latin typeface="Arial"/>
+              </a:rPr>
+              <a:t>Milk quality (butterfat, solids-not-fat, added water) is costly to verify at the point of sale.</a:t>
+            </a:r>
+          </a:p>
+          <a:p>
+            <a:pPr algn="l" marL="274320" indent="-274320">
+              <a:spcAft>
+                <a:spcPts val="1000"/>
+              </a:spcAft>
+              <a:buFont typeface="Arial"/>
+              <a:buChar char="•"/>
+            </a:pPr>
+            <a:r>
+              <a:rPr sz="1800" b="0" i="0">
+                <a:solidFill>
+                  <a:srgbClr val="2A2A2A"/>
+                </a:solidFill>
+                <a:latin typeface="Arial"/>
+              </a:rPr>
+              <a:t>MCCs rely on crude tools: </a:t>
+            </a:r>
+            <a:r>
+              <a:rPr sz="1800" b="1" i="0">
+                <a:solidFill>
+                  <a:srgbClr val="007DB3"/>
+                </a:solidFill>
+                <a:latin typeface="Arial"/>
+              </a:rPr>
+              <a:t>lactometer + alcohol test</a:t>
+            </a:r>
+            <a:r>
+              <a:rPr sz="1800" b="0" i="0">
+                <a:solidFill>
+                  <a:srgbClr val="2A2A2A"/>
+                </a:solidFill>
+                <a:latin typeface="Arial"/>
+              </a:rPr>
+              <a:t> — detect gross adulteration, not composition.</a:t>
+            </a:r>
+          </a:p>
+          <a:p>
+            <a:pPr algn="l" marL="274320" indent="-274320">
+              <a:spcAft>
+                <a:spcPts val="1000"/>
+              </a:spcAft>
+              <a:buFont typeface="Arial"/>
+              <a:buChar char="•"/>
+            </a:pPr>
+            <a:r>
+              <a:rPr sz="1800" b="0" i="0">
+                <a:solidFill>
+                  <a:srgbClr val="2A2A2A"/>
+                </a:solidFill>
+                <a:latin typeface="Arial"/>
+              </a:rPr>
+              <a:t>High- and low-quality milk therefore trade at the </a:t>
+            </a:r>
+            <a:r>
+              <a:rPr sz="1800" b="1" i="0">
+                <a:solidFill>
+                  <a:srgbClr val="EF463B"/>
+                </a:solidFill>
+                <a:latin typeface="Arial"/>
+              </a:rPr>
+              <a:t>same per-litre price</a:t>
+            </a:r>
+            <a:r>
+              <a:rPr sz="1800" b="0" i="0">
+                <a:solidFill>
+                  <a:srgbClr val="2A2A2A"/>
+                </a:solidFill>
+                <a:latin typeface="Arial"/>
+              </a:rPr>
+              <a:t>.</a:t>
+            </a:r>
+          </a:p>
+          <a:p>
+            <a:pPr algn="l" marL="274320" indent="-274320">
+              <a:spcAft>
+                <a:spcPts val="1000"/>
+              </a:spcAft>
+              <a:buFont typeface="Arial"/>
+              <a:buChar char="•"/>
+            </a:pPr>
+            <a:r>
+              <a:rPr sz="1800" b="0" i="0">
+                <a:solidFill>
+                  <a:srgbClr val="2A2A2A"/>
+                </a:solidFill>
+                <a:latin typeface="Arial"/>
+              </a:rPr>
+              <a:t>Classic </a:t>
+            </a:r>
+            <a:r>
+              <a:rPr sz="1800" b="1" i="0">
+                <a:solidFill>
+                  <a:srgbClr val="8850A0"/>
+                </a:solidFill>
+                <a:latin typeface="Arial"/>
+              </a:rPr>
+              <a:t>asymmetric information</a:t>
+            </a:r>
+            <a:r>
+              <a:rPr sz="1800" b="0" i="0">
+                <a:solidFill>
+                  <a:srgbClr val="2A2A2A"/>
+                </a:solidFill>
+                <a:latin typeface="Arial"/>
+              </a:rPr>
+              <a:t> (Akerlof 1970): no credible signal → no reward for quality → quality erodes.</a:t>
+            </a:r>
+          </a:p>
+          <a:p>
+            <a:pPr algn="l" marL="274320" indent="-274320">
+              <a:spcAft>
+                <a:spcPts val="1000"/>
+              </a:spcAft>
+              <a:buFont typeface="Arial"/>
+              <a:buChar char="•"/>
+            </a:pPr>
+            <a:r>
+              <a:rPr sz="1800" b="0" i="0">
+                <a:solidFill>
+                  <a:srgbClr val="2A2A2A"/>
+                </a:solidFill>
+                <a:latin typeface="Arial"/>
+              </a:rPr>
+              <a:t>Both adulteration margins pay: </a:t>
+            </a:r>
+            <a:r>
+              <a:rPr sz="1800" b="1" i="0">
+                <a:solidFill>
+                  <a:srgbClr val="EF463B"/>
+                </a:solidFill>
+                <a:latin typeface="Arial"/>
+              </a:rPr>
+              <a:t>watering</a:t>
+            </a:r>
+            <a:r>
+              <a:rPr sz="1800" b="0" i="0">
+                <a:solidFill>
+                  <a:srgbClr val="2A2A2A"/>
+                </a:solidFill>
+                <a:latin typeface="Arial"/>
+              </a:rPr>
+              <a:t> inflates volume; </a:t>
+            </a:r>
+            <a:r>
+              <a:rPr sz="1800" b="1" i="0">
+                <a:solidFill>
+                  <a:srgbClr val="EF463B"/>
+                </a:solidFill>
+                <a:latin typeface="Arial"/>
+              </a:rPr>
+              <a:t>skimming fat</a:t>
+            </a:r>
+            <a:r>
+              <a:rPr sz="1800" b="0" i="0">
+                <a:solidFill>
+                  <a:srgbClr val="2A2A2A"/>
+                </a:solidFill>
+                <a:latin typeface="Arial"/>
+              </a:rPr>
+              <a:t> extracts the most valuable component.</a:t>
+            </a:r>
+          </a:p>
+        </p:txBody>
+      </p:sp>
+      <p:sp>
+        <p:nvSpPr>
+          <p:cNvPr id="4" name="Rounded Rectangle 3"/>
+          <p:cNvSpPr/>
+          <p:nvPr/>
+        </p:nvSpPr>
+        <p:spPr>
+          <a:xfrm>
+            <a:off x="7772400" y="1920240"/>
+            <a:ext cx="3840480" cy="2926080"/>
+          </a:xfrm>
+          <a:prstGeom prst="roundRect">
+            <a:avLst/>
+          </a:prstGeom>
+          <a:solidFill>
+            <a:srgbClr val="F3F6F2"/>
+          </a:solidFill>
+          <a:ln>
+            <a:noFill/>
+          </a:ln>
+          <a:effectLst/>
+        </p:spPr>
+        <p:style>
+          <a:lnRef idx="1">
+            <a:schemeClr val="accent1"/>
+          </a:lnRef>
+          <a:fillRef idx="3">
+            <a:schemeClr val="accent1"/>
+          </a:fillRef>
+          <a:effectRef idx="2">
+            <a:schemeClr val="accent1"/>
+          </a:effectRef>
+          <a:fontRef idx="minor">
+            <a:schemeClr val="lt1"/>
+          </a:fontRef>
+        </p:style>
+        <p:txBody>
+          <a:bodyPr rtlCol="0" anchor="ctr" wrap="square" lIns="177800" rIns="177800"/>
+          <a:lstStyle/>
+          <a:p>
+            <a:pPr algn="ctr">
+              <a:spcAft>
+                <a:spcPts val="1000"/>
+              </a:spcAft>
+              <a:buNone/>
+            </a:pPr>
+            <a:r>
+              <a:rPr sz="2000" b="1" i="1">
+                <a:solidFill>
+                  <a:srgbClr val="44546A"/>
+                </a:solidFill>
+                <a:latin typeface="Arial"/>
+              </a:rPr>
+              <a:t>“Without verification, the market cannot tell good milk from bad.”</a:t>
+            </a:r>
+          </a:p>
+          <a:p>
+            <a:pPr algn="ctr">
+              <a:spcAft>
+                <a:spcPts val="800"/>
+              </a:spcAft>
+              <a:buNone/>
+            </a:pPr>
+            <a:r>
+              <a:rPr sz="1400" b="0" i="0">
+                <a:solidFill>
+                  <a:srgbClr val="6E6E6E"/>
+                </a:solidFill>
+                <a:latin typeface="Arial"/>
+              </a:rPr>
+              <a:t>5–10% of milk samples in the region show water addition</a:t>
+            </a:r>
+          </a:p>
+        </p:txBody>
+      </p:sp>
+    </p:spTree>
+  </p:cSld>
+  <p:clrMapOvr>
+    <a:masterClrMapping/>
+  </p:clrMapOvr>
+</p:sld>
+</file>
+
+<file path=ppt/slides/slide7.xml><?xml version="1.0" encoding="utf-8"?>
+<p:sld xmlns:a="http://schemas.openxmlformats.org/drawingml/2006/main" xmlns:p="http://schemas.openxmlformats.org/presentationml/2006/main" xmlns:r="http://schemas.openxmlformats.org/officeDocument/2006/relationships">
+  <p:cSld>
+    <p:spTree>
+      <p:nvGrpSpPr>
+        <p:cNvPr id="1" name=""/>
+        <p:cNvGrpSpPr/>
+        <p:nvPr/>
+      </p:nvGrpSpPr>
+      <p:grpSpPr/>
+      <p:sp>
+        <p:nvSpPr>
+          <p:cNvPr id="2" name="Title 1"/>
+          <p:cNvSpPr>
+            <a:spLocks noGrp="1"/>
+          </p:cNvSpPr>
+          <p:nvPr>
+            <p:ph type="title"/>
+          </p:nvPr>
+        </p:nvSpPr>
+        <p:spPr/>
+        <p:txBody>
+          <a:bodyPr/>
+          <a:lstStyle/>
+          <a:p>
+            <a:r>
+              <a:rPr sz="3000" b="1">
+                <a:solidFill>
+                  <a:srgbClr val="44546A"/>
+                </a:solidFill>
+                <a:latin typeface="Arial"/>
+              </a:rPr>
+              <a:t>The problem (2): aggregation severs the link</a:t>
+            </a:r>
+          </a:p>
+        </p:txBody>
+      </p:sp>
+      <p:sp>
+        <p:nvSpPr>
+          <p:cNvPr id="3" name="TextBox 2"/>
+          <p:cNvSpPr txBox="1"/>
+          <p:nvPr/>
+        </p:nvSpPr>
+        <p:spPr>
+          <a:xfrm>
+            <a:off x="640080" y="1554480"/>
+            <a:ext cx="6766560" cy="4754880"/>
+          </a:xfrm>
+          <a:prstGeom prst="rect">
+            <a:avLst/>
+          </a:prstGeom>
+          <a:noFill/>
+        </p:spPr>
+        <p:txBody>
+          <a:bodyPr wrap="square" anchor="t">
+            <a:spAutoFit/>
+          </a:bodyPr>
+          <a:lstStyle/>
+          <a:p>
+            <a:pPr algn="l">
+              <a:spcAft>
+                <a:spcPts val="1400"/>
+              </a:spcAft>
+              <a:buNone/>
+            </a:pPr>
+            <a:r>
+              <a:rPr sz="2100" b="1" i="0">
+                <a:solidFill>
+                  <a:srgbClr val="44546A"/>
+                </a:solidFill>
+                <a:latin typeface="Arial"/>
+              </a:rPr>
+              <a:t>Milk is pooled across many farmers early in the chain.</a:t>
+            </a:r>
+          </a:p>
+          <a:p>
+            <a:pPr algn="l" marL="274320" indent="-274320">
+              <a:spcAft>
+                <a:spcPts val="1000"/>
+              </a:spcAft>
+              <a:buFont typeface="Arial"/>
+              <a:buChar char="•"/>
+            </a:pPr>
+            <a:r>
+              <a:rPr sz="1800" b="0" i="0">
+                <a:solidFill>
+                  <a:srgbClr val="2A2A2A"/>
+                </a:solidFill>
+                <a:latin typeface="Arial"/>
+              </a:rPr>
+              <a:t>Buyers observe only a </a:t>
+            </a:r>
+            <a:r>
+              <a:rPr sz="1800" b="1" i="0">
+                <a:solidFill>
+                  <a:srgbClr val="00AE9A"/>
+                </a:solidFill>
+                <a:latin typeface="Arial"/>
+              </a:rPr>
+              <a:t>group-level</a:t>
+            </a:r>
+            <a:r>
+              <a:rPr sz="1800" b="0" i="0">
+                <a:solidFill>
+                  <a:srgbClr val="2A2A2A"/>
+                </a:solidFill>
+                <a:latin typeface="Arial"/>
+              </a:rPr>
+              <a:t> quality signal; individual contributions vanish into the pool.</a:t>
+            </a:r>
+          </a:p>
+          <a:p>
+            <a:pPr algn="l" marL="274320" indent="-274320">
+              <a:spcAft>
+                <a:spcPts val="1000"/>
+              </a:spcAft>
+              <a:buFont typeface="Arial"/>
+              <a:buChar char="•"/>
+            </a:pPr>
+            <a:r>
+              <a:rPr sz="1800" b="0" i="0">
+                <a:solidFill>
+                  <a:srgbClr val="2A2A2A"/>
+                </a:solidFill>
+                <a:latin typeface="Arial"/>
+              </a:rPr>
+              <a:t>Shared reputation = a </a:t>
+            </a:r>
+            <a:r>
+              <a:rPr sz="1800" b="1" i="0">
+                <a:solidFill>
+                  <a:srgbClr val="8850A0"/>
+                </a:solidFill>
+                <a:latin typeface="Arial"/>
+              </a:rPr>
+              <a:t>common-pool resource</a:t>
+            </a:r>
+            <a:r>
+              <a:rPr sz="1800" b="0" i="0">
+                <a:solidFill>
+                  <a:srgbClr val="2A2A2A"/>
+                </a:solidFill>
+                <a:latin typeface="Arial"/>
+              </a:rPr>
+              <a:t> (Winfree &amp; McCluskey 2005; Tirole 1996).</a:t>
+            </a:r>
+          </a:p>
+          <a:p>
+            <a:pPr algn="l" marL="274320" indent="-274320">
+              <a:spcAft>
+                <a:spcPts val="1000"/>
+              </a:spcAft>
+              <a:buFont typeface="Arial"/>
+              <a:buChar char="•"/>
+            </a:pPr>
+            <a:r>
+              <a:rPr sz="1800" b="0" i="0">
+                <a:solidFill>
+                  <a:srgbClr val="2A2A2A"/>
+                </a:solidFill>
+                <a:latin typeface="Arial"/>
+              </a:rPr>
+              <a:t>Moral hazard in teams: each farmer can </a:t>
+            </a:r>
+            <a:r>
+              <a:rPr sz="1800" b="1" i="0">
+                <a:solidFill>
+                  <a:srgbClr val="EF463B"/>
+                </a:solidFill>
+                <a:latin typeface="Arial"/>
+              </a:rPr>
+              <a:t>free-ride</a:t>
+            </a:r>
+            <a:r>
+              <a:rPr sz="1800" b="0" i="0">
+                <a:solidFill>
+                  <a:srgbClr val="2A2A2A"/>
+                </a:solidFill>
+                <a:latin typeface="Arial"/>
+              </a:rPr>
+              <a:t> on the pool — no one internalises the return to their own effort.</a:t>
+            </a:r>
+          </a:p>
+          <a:p>
+            <a:pPr algn="l" marL="274320" indent="-274320">
+              <a:spcAft>
+                <a:spcPts val="1400"/>
+              </a:spcAft>
+              <a:buFont typeface="Arial"/>
+              <a:buChar char="•"/>
+            </a:pPr>
+            <a:r>
+              <a:rPr sz="1800" b="0" i="0">
+                <a:solidFill>
+                  <a:srgbClr val="2A2A2A"/>
+                </a:solidFill>
+                <a:latin typeface="Arial"/>
+              </a:rPr>
+              <a:t>Layers of traders make </a:t>
+            </a:r>
+            <a:r>
+              <a:rPr sz="1800" b="1" i="0">
+                <a:solidFill>
+                  <a:srgbClr val="007DB3"/>
+                </a:solidFill>
+                <a:latin typeface="Arial"/>
+              </a:rPr>
+              <a:t>traceability</a:t>
+            </a:r>
+            <a:r>
+              <a:rPr sz="1800" b="0" i="0">
+                <a:solidFill>
+                  <a:srgbClr val="2A2A2A"/>
+                </a:solidFill>
+                <a:latin typeface="Arial"/>
+              </a:rPr>
+              <a:t> break down even faster.</a:t>
+            </a:r>
+          </a:p>
+          <a:p>
+            <a:pPr algn="l">
+              <a:spcAft>
+                <a:spcPts val="0"/>
+              </a:spcAft>
+              <a:buNone/>
+            </a:pPr>
+            <a:r>
+              <a:rPr sz="1900" b="1" i="0">
+                <a:solidFill>
+                  <a:srgbClr val="44546A"/>
+                </a:solidFill>
+                <a:latin typeface="Arial"/>
+              </a:rPr>
+              <a:t>⇒  Even if buyers </a:t>
+            </a:r>
+            <a:r>
+              <a:rPr sz="1900" b="1" i="0">
+                <a:solidFill>
+                  <a:srgbClr val="44546A"/>
+                </a:solidFill>
+                <a:latin typeface="Arial"/>
+              </a:rPr>
+              <a:t>want</a:t>
+            </a:r>
+            <a:r>
+              <a:rPr sz="1900" b="1" i="0">
+                <a:solidFill>
+                  <a:srgbClr val="44546A"/>
+                </a:solidFill>
+                <a:latin typeface="Arial"/>
+              </a:rPr>
+              <a:t> to pay for quality, the structure prevents it. </a:t>
+            </a:r>
+            <a:r>
+              <a:rPr sz="1900" b="1" i="0">
+                <a:solidFill>
+                  <a:srgbClr val="EF463B"/>
+                </a:solidFill>
+                <a:latin typeface="Arial"/>
+              </a:rPr>
+              <a:t>No market for quality emerges.</a:t>
+            </a:r>
+          </a:p>
+        </p:txBody>
+      </p:sp>
+      <p:sp>
+        <p:nvSpPr>
+          <p:cNvPr id="4" name="Rounded Rectangle 3"/>
+          <p:cNvSpPr/>
+          <p:nvPr/>
+        </p:nvSpPr>
+        <p:spPr>
+          <a:xfrm>
+            <a:off x="7863840" y="1828800"/>
+            <a:ext cx="3749039" cy="3291840"/>
+          </a:xfrm>
+          <a:prstGeom prst="roundRect">
+            <a:avLst/>
+          </a:prstGeom>
+          <a:solidFill>
+            <a:srgbClr val="F3F6F2"/>
+          </a:solidFill>
+          <a:ln>
+            <a:noFill/>
+          </a:ln>
+          <a:effectLst/>
+        </p:spPr>
+        <p:style>
+          <a:lnRef idx="1">
+            <a:schemeClr val="accent1"/>
+          </a:lnRef>
+          <a:fillRef idx="3">
+            <a:schemeClr val="accent1"/>
+          </a:fillRef>
+          <a:effectRef idx="2">
+            <a:schemeClr val="accent1"/>
+          </a:effectRef>
+          <a:fontRef idx="minor">
+            <a:schemeClr val="lt1"/>
+          </a:fontRef>
+        </p:style>
+        <p:txBody>
+          <a:bodyPr rtlCol="0" anchor="ctr" wrap="square" lIns="152400" rIns="152400"/>
+          <a:lstStyle/>
+          <a:p>
+            <a:pPr algn="ctr">
+              <a:spcAft>
+                <a:spcPts val="1200"/>
+              </a:spcAft>
+              <a:buNone/>
+            </a:pPr>
+            <a:r>
+              <a:rPr sz="1500" b="1" i="0">
+                <a:solidFill>
+                  <a:srgbClr val="44546A"/>
+                </a:solidFill>
+                <a:latin typeface="Arial"/>
+              </a:rPr>
+              <a:t>Farmers  →  Trader  →  MCC (pool)  →  Processor</a:t>
+            </a:r>
+          </a:p>
+          <a:p>
+            <a:pPr algn="ctr">
+              <a:spcAft>
+                <a:spcPts val="1200"/>
+              </a:spcAft>
+              <a:buNone/>
+            </a:pPr>
+            <a:r>
+              <a:rPr sz="1300" b="0" i="0">
+                <a:solidFill>
+                  <a:srgbClr val="6E6E6E"/>
+                </a:solidFill>
+                <a:latin typeface="Arial"/>
+              </a:rPr>
+              <a:t>individual quality
+observed with noise</a:t>
+            </a:r>
+          </a:p>
+          <a:p>
+            <a:pPr algn="ctr">
+              <a:spcAft>
+                <a:spcPts val="0"/>
+              </a:spcAft>
+              <a:buNone/>
+            </a:pPr>
+            <a:r>
+              <a:rPr sz="1300" b="0" i="0">
+                <a:solidFill>
+                  <a:srgbClr val="6E6E6E"/>
+                </a:solidFill>
+                <a:latin typeface="Arial"/>
+              </a:rPr>
+              <a:t>pooled &amp; paid one
+flat price per litre</a:t>
+            </a:r>
+          </a:p>
+        </p:txBody>
+      </p:sp>
+    </p:spTree>
+  </p:cSld>
+  <p:clrMapOvr>
+    <a:masterClrMapping/>
+  </p:clrMapOvr>
+</p:sld>
+</file>
+
+<file path=ppt/slides/slide8.xml><?xml version="1.0" encoding="utf-8"?>
+<p:sld xmlns:a="http://schemas.openxmlformats.org/drawingml/2006/main" xmlns:p="http://schemas.openxmlformats.org/presentationml/2006/main" xmlns:r="http://schemas.openxmlformats.org/officeDocument/2006/relationships">
+  <p:cSld>
+    <p:spTree>
+      <p:nvGrpSpPr>
+        <p:cNvPr id="1" name=""/>
+        <p:cNvGrpSpPr/>
+        <p:nvPr/>
+      </p:nvGrpSpPr>
+      <p:grpSpPr/>
+      <p:sp>
+        <p:nvSpPr>
+          <p:cNvPr id="2" name="Title 1"/>
+          <p:cNvSpPr>
+            <a:spLocks noGrp="1"/>
+          </p:cNvSpPr>
+          <p:nvPr>
+            <p:ph type="title"/>
+          </p:nvPr>
+        </p:nvSpPr>
+        <p:spPr/>
+        <p:txBody>
+          <a:bodyPr/>
+          <a:lstStyle/>
+          <a:p>
+            <a:r>
+              <a:rPr sz="3000" b="1">
+                <a:solidFill>
+                  <a:srgbClr val="44546A"/>
+                </a:solidFill>
+                <a:latin typeface="Arial"/>
+              </a:rPr>
+              <a:t>This paper: two linked field experiments</a:t>
+            </a:r>
+          </a:p>
+        </p:txBody>
+      </p:sp>
+      <p:sp>
+        <p:nvSpPr>
+          <p:cNvPr id="3" name="TextBox 2"/>
+          <p:cNvSpPr txBox="1"/>
+          <p:nvPr/>
+        </p:nvSpPr>
+        <p:spPr>
+          <a:xfrm>
+            <a:off x="640080" y="1463040"/>
+            <a:ext cx="10972800" cy="822960"/>
+          </a:xfrm>
+          <a:prstGeom prst="rect">
+            <a:avLst/>
+          </a:prstGeom>
+          <a:noFill/>
+        </p:spPr>
+        <p:txBody>
+          <a:bodyPr wrap="square" anchor="t">
+            <a:spAutoFit/>
+          </a:bodyPr>
+          <a:lstStyle/>
+          <a:p>
+            <a:pPr algn="l">
+              <a:spcAft>
+                <a:spcPts val="0"/>
+              </a:spcAft>
+              <a:buNone/>
+            </a:pPr>
+            <a:r>
+              <a:rPr sz="2200" b="1" i="0">
+                <a:solidFill>
+                  <a:srgbClr val="44546A"/>
+                </a:solidFill>
+                <a:latin typeface="Arial"/>
+              </a:rPr>
+              <a:t>Can making quality </a:t>
+            </a:r>
+            <a:r>
+              <a:rPr sz="2200" b="1" i="0">
+                <a:solidFill>
+                  <a:srgbClr val="00AE9A"/>
+                </a:solidFill>
+                <a:latin typeface="Arial"/>
+              </a:rPr>
+              <a:t>observable and traceable</a:t>
+            </a:r>
+            <a:r>
+              <a:rPr sz="2200" b="1" i="0">
+                <a:solidFill>
+                  <a:srgbClr val="44546A"/>
+                </a:solidFill>
+                <a:latin typeface="Arial"/>
+              </a:rPr>
+              <a:t> create a market for quality?</a:t>
+            </a:r>
+          </a:p>
+        </p:txBody>
+      </p:sp>
+      <p:sp>
+        <p:nvSpPr>
+          <p:cNvPr id="4" name="Rounded Rectangle 3"/>
+          <p:cNvSpPr/>
+          <p:nvPr/>
+        </p:nvSpPr>
+        <p:spPr>
+          <a:xfrm>
+            <a:off x="640080" y="2468880"/>
+            <a:ext cx="5212080" cy="3291840"/>
+          </a:xfrm>
+          <a:prstGeom prst="roundRect">
+            <a:avLst/>
+          </a:prstGeom>
+          <a:solidFill>
+            <a:srgbClr val="ECF5E9"/>
+          </a:solidFill>
+          <a:ln w="12700">
+            <a:solidFill>
+              <a:srgbClr val="62BA45"/>
+            </a:solidFill>
+          </a:ln>
+          <a:effectLst/>
+        </p:spPr>
+        <p:style>
+          <a:lnRef idx="1">
+            <a:schemeClr val="accent1"/>
+          </a:lnRef>
+          <a:fillRef idx="3">
+            <a:schemeClr val="accent1"/>
+          </a:fillRef>
+          <a:effectRef idx="2">
+            <a:schemeClr val="accent1"/>
+          </a:effectRef>
+          <a:fontRef idx="minor">
+            <a:schemeClr val="lt1"/>
+          </a:fontRef>
+        </p:style>
+        <p:txBody>
+          <a:bodyPr rtlCol="0" anchor="ctr" wrap="square" lIns="203200" rIns="203200" tIns="152400"/>
+          <a:lstStyle/>
+          <a:p>
+            <a:pPr algn="l">
+              <a:spcAft>
+                <a:spcPts val="400"/>
+              </a:spcAft>
+              <a:buNone/>
+            </a:pPr>
+            <a:r>
+              <a:rPr sz="2000" b="1" i="0">
+                <a:solidFill>
+                  <a:srgbClr val="62BA45"/>
+                </a:solidFill>
+                <a:latin typeface="Arial"/>
+              </a:rPr>
+              <a:t>Experiment 1</a:t>
+            </a:r>
+          </a:p>
+          <a:p>
+            <a:pPr algn="l">
+              <a:spcAft>
+                <a:spcPts val="1000"/>
+              </a:spcAft>
+              <a:buNone/>
+            </a:pPr>
+            <a:r>
+              <a:rPr sz="1600" b="1" i="0">
+                <a:solidFill>
+                  <a:srgbClr val="44546A"/>
+                </a:solidFill>
+                <a:latin typeface="Arial"/>
+              </a:rPr>
+              <a:t>Measurement &amp; digital monitoring</a:t>
+            </a:r>
+          </a:p>
+          <a:p>
+            <a:pPr algn="l" marL="274320" indent="-274320">
+              <a:spcAft>
+                <a:spcPts val="800"/>
+              </a:spcAft>
+              <a:buFont typeface="Arial"/>
+              <a:buChar char="•"/>
+            </a:pPr>
+            <a:r>
+              <a:rPr sz="1500" b="0" i="0">
+                <a:solidFill>
+                  <a:srgbClr val="2A2A2A"/>
+                </a:solidFill>
+                <a:latin typeface="Arial"/>
+              </a:rPr>
+              <a:t>Cluster-RCT, 95 catchments. Install milk analyzers + record-keeping app at MCCs.</a:t>
+            </a:r>
+          </a:p>
+          <a:p>
+            <a:pPr algn="l" marL="274320" indent="-274320">
+              <a:spcAft>
+                <a:spcPts val="0"/>
+              </a:spcAft>
+              <a:buFont typeface="Arial"/>
+              <a:buChar char="•"/>
+            </a:pPr>
+            <a:r>
+              <a:rPr sz="1500" b="0" i="0">
+                <a:solidFill>
+                  <a:srgbClr val="2A2A2A"/>
+                </a:solidFill>
+                <a:latin typeface="Arial"/>
+              </a:rPr>
+              <a:t>Tests the </a:t>
+            </a:r>
+            <a:r>
+              <a:rPr sz="1500" b="1" i="0">
+                <a:solidFill>
+                  <a:srgbClr val="62BA45"/>
+                </a:solidFill>
+                <a:latin typeface="Arial"/>
+              </a:rPr>
+              <a:t>information / enforcement</a:t>
+            </a:r>
+            <a:r>
+              <a:rPr sz="1500" b="0" i="0">
+                <a:solidFill>
+                  <a:srgbClr val="2A2A2A"/>
+                </a:solidFill>
+                <a:latin typeface="Arial"/>
+              </a:rPr>
+              <a:t> margin.</a:t>
+            </a:r>
+          </a:p>
+        </p:txBody>
+      </p:sp>
+      <p:sp>
+        <p:nvSpPr>
+          <p:cNvPr id="5" name="Rounded Rectangle 4"/>
+          <p:cNvSpPr/>
+          <p:nvPr/>
+        </p:nvSpPr>
+        <p:spPr>
+          <a:xfrm>
+            <a:off x="6309360" y="2468880"/>
+            <a:ext cx="5212080" cy="3291840"/>
+          </a:xfrm>
+          <a:prstGeom prst="roundRect">
+            <a:avLst/>
+          </a:prstGeom>
+          <a:solidFill>
+            <a:srgbClr val="FDF0E4"/>
+          </a:solidFill>
+          <a:ln w="12700">
+            <a:solidFill>
+              <a:srgbClr val="F7921E"/>
+            </a:solidFill>
+          </a:ln>
+          <a:effectLst/>
+        </p:spPr>
+        <p:style>
+          <a:lnRef idx="1">
+            <a:schemeClr val="accent1"/>
+          </a:lnRef>
+          <a:fillRef idx="3">
+            <a:schemeClr val="accent1"/>
+          </a:fillRef>
+          <a:effectRef idx="2">
+            <a:schemeClr val="accent1"/>
+          </a:effectRef>
+          <a:fontRef idx="minor">
+            <a:schemeClr val="lt1"/>
+          </a:fontRef>
+        </p:style>
+        <p:txBody>
+          <a:bodyPr rtlCol="0" anchor="ctr" wrap="square" lIns="203200" rIns="203200" tIns="152400"/>
+          <a:lstStyle/>
+          <a:p>
+            <a:pPr algn="l">
+              <a:spcAft>
+                <a:spcPts val="400"/>
+              </a:spcAft>
+              <a:buNone/>
+            </a:pPr>
+            <a:r>
+              <a:rPr sz="2000" b="1" i="0">
+                <a:solidFill>
+                  <a:srgbClr val="F7921E"/>
+                </a:solidFill>
+                <a:latin typeface="Arial"/>
+              </a:rPr>
+              <a:t>Experiment 2</a:t>
+            </a:r>
+          </a:p>
+          <a:p>
+            <a:pPr algn="l">
+              <a:spcAft>
+                <a:spcPts val="1000"/>
+              </a:spcAft>
+              <a:buNone/>
+            </a:pPr>
+            <a:r>
+              <a:rPr sz="1600" b="1" i="0">
+                <a:solidFill>
+                  <a:srgbClr val="44546A"/>
+                </a:solidFill>
+                <a:latin typeface="Arial"/>
+              </a:rPr>
+              <a:t>Activating the price channel</a:t>
+            </a:r>
+          </a:p>
+          <a:p>
+            <a:pPr algn="l" marL="274320" indent="-274320">
+              <a:spcAft>
+                <a:spcPts val="800"/>
+              </a:spcAft>
+              <a:buFont typeface="Arial"/>
+              <a:buChar char="•"/>
+            </a:pPr>
+            <a:r>
+              <a:rPr sz="1500" b="0" i="0">
+                <a:solidFill>
+                  <a:srgbClr val="2A2A2A"/>
+                </a:solidFill>
+                <a:latin typeface="Arial"/>
+              </a:rPr>
+              <a:t>Within-MCC RCT, ~100 traders. Pay traders an explicit quality premium.</a:t>
+            </a:r>
+          </a:p>
+          <a:p>
+            <a:pPr algn="l" marL="274320" indent="-274320">
+              <a:spcAft>
+                <a:spcPts val="0"/>
+              </a:spcAft>
+              <a:buFont typeface="Arial"/>
+              <a:buChar char="•"/>
+            </a:pPr>
+            <a:r>
+              <a:rPr sz="1500" b="0" i="0">
+                <a:solidFill>
+                  <a:srgbClr val="2A2A2A"/>
+                </a:solidFill>
+                <a:latin typeface="Arial"/>
+              </a:rPr>
+              <a:t>Tests the </a:t>
+            </a:r>
+            <a:r>
+              <a:rPr sz="1500" b="1" i="0">
+                <a:solidFill>
+                  <a:srgbClr val="F7921E"/>
+                </a:solidFill>
+                <a:latin typeface="Arial"/>
+              </a:rPr>
+              <a:t>price / pass-through</a:t>
+            </a:r>
+            <a:r>
+              <a:rPr sz="1500" b="0" i="0">
+                <a:solidFill>
+                  <a:srgbClr val="2A2A2A"/>
+                </a:solidFill>
+                <a:latin typeface="Arial"/>
+              </a:rPr>
+              <a:t> margin.</a:t>
+            </a:r>
+          </a:p>
+        </p:txBody>
+      </p:sp>
+    </p:spTree>
+  </p:cSld>
+  <p:clrMapOvr>
+    <a:masterClrMapping/>
+  </p:clrMapOvr>
+</p:sld>
+</file>
+
+<file path=ppt/slides/slide9.xml><?xml version="1.0" encoding="utf-8"?>
+<p:sld xmlns:a="http://schemas.openxmlformats.org/drawingml/2006/main" xmlns:p="http://schemas.openxmlformats.org/presentationml/2006/main" xmlns:r="http://schemas.openxmlformats.org/officeDocument/2006/relationships">
+  <p:cSld>
+    <p:spTree>
+      <p:nvGrpSpPr>
+        <p:cNvPr id="1" name=""/>
+        <p:cNvGrpSpPr/>
+        <p:nvPr/>
+      </p:nvGrpSpPr>
+      <p:grpSpPr/>
+      <p:sp>
+        <p:nvSpPr>
+          <p:cNvPr id="2" name="Title 1"/>
+          <p:cNvSpPr>
+            <a:spLocks noGrp="1"/>
+          </p:cNvSpPr>
+          <p:nvPr>
+            <p:ph type="title"/>
+          </p:nvPr>
+        </p:nvSpPr>
+        <p:spPr/>
+        <p:txBody>
+          <a:bodyPr/>
+          <a:lstStyle/>
+          <a:p>
+            <a:r>
+              <a:rPr sz="3000" b="1">
+                <a:solidFill>
+                  <a:srgbClr val="44546A"/>
+                </a:solidFill>
+                <a:latin typeface="Arial"/>
+              </a:rPr>
+              <a:t>Context: Uganda’s dairy supply chain</a:t>
+            </a:r>
+          </a:p>
+        </p:txBody>
+      </p:sp>
+      <p:sp>
+        <p:nvSpPr>
+          <p:cNvPr id="3" name="TextBox 2"/>
+          <p:cNvSpPr txBox="1"/>
+          <p:nvPr/>
+        </p:nvSpPr>
+        <p:spPr>
+          <a:xfrm>
+            <a:off x="640080" y="1554480"/>
+            <a:ext cx="5669280" cy="4754880"/>
+          </a:xfrm>
+          <a:prstGeom prst="rect">
+            <a:avLst/>
+          </a:prstGeom>
+          <a:noFill/>
+        </p:spPr>
+        <p:txBody>
+          <a:bodyPr wrap="square" anchor="t">
+            <a:spAutoFit/>
+          </a:bodyPr>
+          <a:lstStyle/>
+          <a:p>
+            <a:pPr algn="l">
+              <a:spcAft>
+                <a:spcPts val="1200"/>
+              </a:spcAft>
+              <a:buNone/>
+            </a:pPr>
+            <a:r>
+              <a:rPr sz="1900" b="1" i="0">
+                <a:solidFill>
+                  <a:srgbClr val="44546A"/>
+                </a:solidFill>
+                <a:latin typeface="Arial"/>
+              </a:rPr>
+              <a:t>Southwestern milk shed (Mbarara)</a:t>
+            </a:r>
+          </a:p>
+          <a:p>
+            <a:pPr algn="l" marL="274320" indent="-274320">
+              <a:spcAft>
+                <a:spcPts val="800"/>
+              </a:spcAft>
+              <a:buFont typeface="Arial"/>
+              <a:buChar char="•"/>
+            </a:pPr>
+            <a:r>
+              <a:rPr sz="1700" b="0" i="0">
+                <a:solidFill>
+                  <a:srgbClr val="2A2A2A"/>
+                </a:solidFill>
+                <a:latin typeface="Arial"/>
+              </a:rPr>
+              <a:t>Most commercialised livestock sub-sector: </a:t>
+            </a:r>
+            <a:r>
+              <a:rPr sz="1700" b="1" i="0">
+                <a:solidFill>
+                  <a:srgbClr val="007DB3"/>
+                </a:solidFill>
+                <a:latin typeface="Arial"/>
+              </a:rPr>
+              <a:t>17% of agricultural GDP</a:t>
+            </a:r>
+            <a:r>
+              <a:rPr sz="1700" b="0" i="0">
+                <a:solidFill>
+                  <a:srgbClr val="2A2A2A"/>
+                </a:solidFill>
+                <a:latin typeface="Arial"/>
+              </a:rPr>
+              <a:t>.</a:t>
+            </a:r>
+          </a:p>
+          <a:p>
+            <a:pPr algn="l" marL="274320" indent="-274320">
+              <a:spcAft>
+                <a:spcPts val="800"/>
+              </a:spcAft>
+              <a:buFont typeface="Arial"/>
+              <a:buChar char="•"/>
+            </a:pPr>
+            <a:r>
+              <a:rPr sz="1700" b="0" i="0">
+                <a:solidFill>
+                  <a:srgbClr val="2A2A2A"/>
+                </a:solidFill>
+                <a:latin typeface="Arial"/>
+              </a:rPr>
+              <a:t>Output </a:t>
+            </a:r>
+            <a:r>
+              <a:rPr sz="1700" b="1" i="0">
+                <a:solidFill>
+                  <a:srgbClr val="62BA45"/>
+                </a:solidFill>
+                <a:latin typeface="Arial"/>
+              </a:rPr>
+              <a:t>5× since 2008</a:t>
+            </a:r>
+            <a:r>
+              <a:rPr sz="1700" b="0" i="0">
+                <a:solidFill>
+                  <a:srgbClr val="2A2A2A"/>
+                </a:solidFill>
+                <a:latin typeface="Arial"/>
+              </a:rPr>
+              <a:t>; exports up to USD 265m (mostly to Kenya).</a:t>
+            </a:r>
+          </a:p>
+          <a:p>
+            <a:pPr algn="l" marL="274320" indent="-274320">
+              <a:spcAft>
+                <a:spcPts val="800"/>
+              </a:spcAft>
+              <a:buFont typeface="Arial"/>
+              <a:buChar char="•"/>
+            </a:pPr>
+            <a:r>
+              <a:rPr sz="1700" b="0" i="0">
+                <a:solidFill>
+                  <a:srgbClr val="2A2A2A"/>
+                </a:solidFill>
+                <a:latin typeface="Arial"/>
+              </a:rPr>
+              <a:t>Dense network of </a:t>
+            </a:r>
+            <a:r>
+              <a:rPr sz="1700" b="1" i="0">
+                <a:solidFill>
+                  <a:srgbClr val="00AE9A"/>
+                </a:solidFill>
+                <a:latin typeface="Arial"/>
+              </a:rPr>
+              <a:t>milk collection centres (MCCs)</a:t>
+            </a:r>
+            <a:r>
+              <a:rPr sz="1700" b="0" i="0">
+                <a:solidFill>
+                  <a:srgbClr val="2A2A2A"/>
+                </a:solidFill>
+                <a:latin typeface="Arial"/>
+              </a:rPr>
+              <a:t> linking farmers to processors.</a:t>
+            </a:r>
+          </a:p>
+          <a:p>
+            <a:pPr algn="l" marL="274320" indent="-274320">
+              <a:spcAft>
+                <a:spcPts val="800"/>
+              </a:spcAft>
+              <a:buFont typeface="Arial"/>
+              <a:buChar char="•"/>
+            </a:pPr>
+            <a:r>
+              <a:rPr sz="1700" b="0" i="0">
+                <a:solidFill>
+                  <a:srgbClr val="2A2A2A"/>
+                </a:solidFill>
+                <a:latin typeface="Arial"/>
+              </a:rPr>
+              <a:t>Quality is central: it sets processing yields for cheese, casein, infant formula.</a:t>
+            </a:r>
+          </a:p>
+          <a:p>
+            <a:pPr algn="l" marL="274320" indent="-274320">
+              <a:spcAft>
+                <a:spcPts val="0"/>
+              </a:spcAft>
+              <a:buFont typeface="Arial"/>
+              <a:buChar char="•"/>
+            </a:pPr>
+            <a:r>
+              <a:rPr sz="1700" b="0" i="0">
+                <a:solidFill>
+                  <a:srgbClr val="2A2A2A"/>
+                </a:solidFill>
+                <a:latin typeface="Arial"/>
+              </a:rPr>
+              <a:t>Yet prices are </a:t>
+            </a:r>
+            <a:r>
+              <a:rPr sz="1700" b="1" i="0">
+                <a:solidFill>
+                  <a:srgbClr val="EF463B"/>
+                </a:solidFill>
+                <a:latin typeface="Arial"/>
+              </a:rPr>
+              <a:t>fixed per litre</a:t>
+            </a:r>
+            <a:r>
+              <a:rPr sz="1700" b="0" i="0">
+                <a:solidFill>
+                  <a:srgbClr val="2A2A2A"/>
+                </a:solidFill>
+                <a:latin typeface="Arial"/>
+              </a:rPr>
+              <a:t>, set for 2-week windows, paid biweekly — the quality–payment link is severed.</a:t>
+            </a:r>
+          </a:p>
+        </p:txBody>
+      </p:sp>
+      <p:pic>
+        <p:nvPicPr>
+          <p:cNvPr id="4" name="Picture 3" descr="milk_analyzer_installed.jpg"/>
+          <p:cNvPicPr>
+            <a:picLocks noChangeAspect="1"/>
+          </p:cNvPicPr>
+          <p:nvPr/>
+        </p:nvPicPr>
+        <p:blipFill>
+          <a:blip r:embed="rId2"/>
+          <a:stretch>
+            <a:fillRect/>
+          </a:stretch>
+        </p:blipFill>
+        <p:spPr>
+          <a:xfrm>
+            <a:off x="7343660" y="1554480"/>
+            <a:ext cx="3509238" cy="4663440"/>
+          </a:xfrm>
+          <a:prstGeom prst="rect">
+            <a:avLst/>
+          </a:prstGeom>
+        </p:spPr>
+      </p:pic>
+      <p:sp>
+        <p:nvSpPr>
+          <p:cNvPr id="5" name="TextBox 4"/>
+          <p:cNvSpPr txBox="1"/>
+          <p:nvPr/>
+        </p:nvSpPr>
+        <p:spPr>
+          <a:xfrm>
+            <a:off x="6583680" y="6263640"/>
+            <a:ext cx="5029200" cy="365760"/>
+          </a:xfrm>
+          <a:prstGeom prst="rect">
+            <a:avLst/>
+          </a:prstGeom>
+          <a:noFill/>
+        </p:spPr>
+        <p:txBody>
+          <a:bodyPr wrap="square" anchor="t">
+            <a:spAutoFit/>
+          </a:bodyPr>
+          <a:lstStyle/>
+          <a:p/>
+        </p:txBody>
+      </p:sp>
+    </p:spTree>
   </p:cSld>
   <p:clrMapOvr>
     <a:masterClrMapping/>
